--- a/deliverables/code-review-presentation.pptx
+++ b/deliverables/code-review-presentation.pptx
@@ -131,360 +131,9 @@
 <file path=ppt/revisionInfo.xml><?xml version="1.0" encoding="utf-8"?>
 <p1510:revInfo xmlns:a="http://schemas.openxmlformats.org/drawingml/2006/main" xmlns:r="http://schemas.openxmlformats.org/officeDocument/2006/relationships" xmlns:p1510="http://schemas.microsoft.com/office/powerpoint/2015/10/main">
   <p1510:revLst>
-    <p1510:client id="{63FA5E46-A17E-32FF-08B6-6DD2BBFDDBA1}" v="702" dt="2026-04-17T03:40:43.869"/>
+    <p1510:client id="{63FA5E46-A17E-32FF-08B6-6DD2BBFDDBA1}" v="736" dt="2026-04-17T03:53:57.786"/>
   </p1510:revLst>
 </p1510:revInfo>
-</file>
-
-<file path=ppt/changesInfos/changesInfo1.xml><?xml version="1.0" encoding="utf-8"?>
-<pc:chgInfo xmlns:a="http://schemas.openxmlformats.org/drawingml/2006/main" xmlns:r="http://schemas.openxmlformats.org/officeDocument/2006/relationships" xmlns:ac="http://schemas.microsoft.com/office/drawing/2013/main/command" xmlns:pc="http://schemas.microsoft.com/office/powerpoint/2013/main/command">
-  <pc:docChgLst>
-    <pc:chgData name="Rochelle, Zoe" userId="S::zrochelle@quinnipiac.edu::2d6ab114-924b-4485-8cb4-918913cbb26c" providerId="AD" clId="Web-{63FA5E46-A17E-32FF-08B6-6DD2BBFDDBA1}"/>
-    <pc:docChg chg="addSld delSld modSld sldOrd">
-      <pc:chgData name="Rochelle, Zoe" userId="S::zrochelle@quinnipiac.edu::2d6ab114-924b-4485-8cb4-918913cbb26c" providerId="AD" clId="Web-{63FA5E46-A17E-32FF-08B6-6DD2BBFDDBA1}" dt="2026-04-17T03:40:43.869" v="799" actId="20577"/>
-      <pc:docMkLst>
-        <pc:docMk/>
-      </pc:docMkLst>
-      <pc:sldChg chg="modSp del">
-        <pc:chgData name="Rochelle, Zoe" userId="S::zrochelle@quinnipiac.edu::2d6ab114-924b-4485-8cb4-918913cbb26c" providerId="AD" clId="Web-{63FA5E46-A17E-32FF-08B6-6DD2BBFDDBA1}" dt="2026-04-17T03:11:04.650" v="417"/>
-        <pc:sldMkLst>
-          <pc:docMk/>
-          <pc:sldMk cId="2045383012" sldId="257"/>
-        </pc:sldMkLst>
-        <pc:spChg chg="mod">
-          <ac:chgData name="Rochelle, Zoe" userId="S::zrochelle@quinnipiac.edu::2d6ab114-924b-4485-8cb4-918913cbb26c" providerId="AD" clId="Web-{63FA5E46-A17E-32FF-08B6-6DD2BBFDDBA1}" dt="2026-04-17T02:41:35.918" v="69" actId="20577"/>
-          <ac:spMkLst>
-            <pc:docMk/>
-            <pc:sldMk cId="2045383012" sldId="257"/>
-            <ac:spMk id="2" creationId="{6B0DC30D-4A45-9272-7405-7109200E7CB7}"/>
-          </ac:spMkLst>
-        </pc:spChg>
-        <pc:spChg chg="mod">
-          <ac:chgData name="Rochelle, Zoe" userId="S::zrochelle@quinnipiac.edu::2d6ab114-924b-4485-8cb4-918913cbb26c" providerId="AD" clId="Web-{63FA5E46-A17E-32FF-08B6-6DD2BBFDDBA1}" dt="2026-04-17T02:39:10.625" v="23" actId="20577"/>
-          <ac:spMkLst>
-            <pc:docMk/>
-            <pc:sldMk cId="2045383012" sldId="257"/>
-            <ac:spMk id="3" creationId="{F6BF0655-BF29-12E4-EAB4-DF4C862EC71E}"/>
-          </ac:spMkLst>
-        </pc:spChg>
-      </pc:sldChg>
-      <pc:sldChg chg="del">
-        <pc:chgData name="Rochelle, Zoe" userId="S::zrochelle@quinnipiac.edu::2d6ab114-924b-4485-8cb4-918913cbb26c" providerId="AD" clId="Web-{63FA5E46-A17E-32FF-08B6-6DD2BBFDDBA1}" dt="2026-04-17T03:07:24.525" v="390"/>
-        <pc:sldMkLst>
-          <pc:docMk/>
-          <pc:sldMk cId="1052691985" sldId="258"/>
-        </pc:sldMkLst>
-      </pc:sldChg>
-      <pc:sldChg chg="modSp">
-        <pc:chgData name="Rochelle, Zoe" userId="S::zrochelle@quinnipiac.edu::2d6ab114-924b-4485-8cb4-918913cbb26c" providerId="AD" clId="Web-{63FA5E46-A17E-32FF-08B6-6DD2BBFDDBA1}" dt="2026-04-17T03:27:02.433" v="632" actId="20577"/>
-        <pc:sldMkLst>
-          <pc:docMk/>
-          <pc:sldMk cId="2471752387" sldId="259"/>
-        </pc:sldMkLst>
-        <pc:spChg chg="mod">
-          <ac:chgData name="Rochelle, Zoe" userId="S::zrochelle@quinnipiac.edu::2d6ab114-924b-4485-8cb4-918913cbb26c" providerId="AD" clId="Web-{63FA5E46-A17E-32FF-08B6-6DD2BBFDDBA1}" dt="2026-04-17T03:27:02.433" v="632" actId="20577"/>
-          <ac:spMkLst>
-            <pc:docMk/>
-            <pc:sldMk cId="2471752387" sldId="259"/>
-            <ac:spMk id="2" creationId="{00A298EA-3822-A62B-3D4A-BECF136732A9}"/>
-          </ac:spMkLst>
-        </pc:spChg>
-        <pc:spChg chg="mod">
-          <ac:chgData name="Rochelle, Zoe" userId="S::zrochelle@quinnipiac.edu::2d6ab114-924b-4485-8cb4-918913cbb26c" providerId="AD" clId="Web-{63FA5E46-A17E-32FF-08B6-6DD2BBFDDBA1}" dt="2026-04-17T02:50:14.596" v="142" actId="20577"/>
-          <ac:spMkLst>
-            <pc:docMk/>
-            <pc:sldMk cId="2471752387" sldId="259"/>
-            <ac:spMk id="3" creationId="{4E82D256-4289-AF72-1189-694267BC7097}"/>
-          </ac:spMkLst>
-        </pc:spChg>
-      </pc:sldChg>
-      <pc:sldChg chg="modSp">
-        <pc:chgData name="Rochelle, Zoe" userId="S::zrochelle@quinnipiac.edu::2d6ab114-924b-4485-8cb4-918913cbb26c" providerId="AD" clId="Web-{63FA5E46-A17E-32FF-08B6-6DD2BBFDDBA1}" dt="2026-04-17T03:27:14.575" v="634" actId="20577"/>
-        <pc:sldMkLst>
-          <pc:docMk/>
-          <pc:sldMk cId="3965135871" sldId="260"/>
-        </pc:sldMkLst>
-        <pc:spChg chg="mod">
-          <ac:chgData name="Rochelle, Zoe" userId="S::zrochelle@quinnipiac.edu::2d6ab114-924b-4485-8cb4-918913cbb26c" providerId="AD" clId="Web-{63FA5E46-A17E-32FF-08B6-6DD2BBFDDBA1}" dt="2026-04-17T03:27:14.575" v="634" actId="20577"/>
-          <ac:spMkLst>
-            <pc:docMk/>
-            <pc:sldMk cId="3965135871" sldId="260"/>
-            <ac:spMk id="2" creationId="{05EFAB91-49E0-0055-6253-7FC4B9E9748D}"/>
-          </ac:spMkLst>
-        </pc:spChg>
-      </pc:sldChg>
-      <pc:sldChg chg="modSp">
-        <pc:chgData name="Rochelle, Zoe" userId="S::zrochelle@quinnipiac.edu::2d6ab114-924b-4485-8cb4-918913cbb26c" providerId="AD" clId="Web-{63FA5E46-A17E-32FF-08B6-6DD2BBFDDBA1}" dt="2026-04-17T03:36:13.477" v="749" actId="20577"/>
-        <pc:sldMkLst>
-          <pc:docMk/>
-          <pc:sldMk cId="3262248952" sldId="261"/>
-        </pc:sldMkLst>
-        <pc:spChg chg="mod">
-          <ac:chgData name="Rochelle, Zoe" userId="S::zrochelle@quinnipiac.edu::2d6ab114-924b-4485-8cb4-918913cbb26c" providerId="AD" clId="Web-{63FA5E46-A17E-32FF-08B6-6DD2BBFDDBA1}" dt="2026-04-17T03:09:51.787" v="409" actId="20577"/>
-          <ac:spMkLst>
-            <pc:docMk/>
-            <pc:sldMk cId="3262248952" sldId="261"/>
-            <ac:spMk id="2" creationId="{8ED5D33C-38DF-A625-2FB7-8DBDA6AF295C}"/>
-          </ac:spMkLst>
-        </pc:spChg>
-        <pc:spChg chg="mod">
-          <ac:chgData name="Rochelle, Zoe" userId="S::zrochelle@quinnipiac.edu::2d6ab114-924b-4485-8cb4-918913cbb26c" providerId="AD" clId="Web-{63FA5E46-A17E-32FF-08B6-6DD2BBFDDBA1}" dt="2026-04-17T03:36:13.477" v="749" actId="20577"/>
-          <ac:spMkLst>
-            <pc:docMk/>
-            <pc:sldMk cId="3262248952" sldId="261"/>
-            <ac:spMk id="3" creationId="{FAB16739-EA63-4D78-6C00-D1212D06C61C}"/>
-          </ac:spMkLst>
-        </pc:spChg>
-      </pc:sldChg>
-      <pc:sldChg chg="addSp delSp modSp">
-        <pc:chgData name="Rochelle, Zoe" userId="S::zrochelle@quinnipiac.edu::2d6ab114-924b-4485-8cb4-918913cbb26c" providerId="AD" clId="Web-{63FA5E46-A17E-32FF-08B6-6DD2BBFDDBA1}" dt="2026-04-17T03:07:15.509" v="389" actId="20577"/>
-        <pc:sldMkLst>
-          <pc:docMk/>
-          <pc:sldMk cId="416096641" sldId="262"/>
-        </pc:sldMkLst>
-        <pc:spChg chg="mod">
-          <ac:chgData name="Rochelle, Zoe" userId="S::zrochelle@quinnipiac.edu::2d6ab114-924b-4485-8cb4-918913cbb26c" providerId="AD" clId="Web-{63FA5E46-A17E-32FF-08B6-6DD2BBFDDBA1}" dt="2026-04-17T03:06:57.835" v="358" actId="20577"/>
-          <ac:spMkLst>
-            <pc:docMk/>
-            <pc:sldMk cId="416096641" sldId="262"/>
-            <ac:spMk id="2" creationId="{F1FD9C7A-A270-A8E7-26EB-4D6F58ED0AD1}"/>
-          </ac:spMkLst>
-        </pc:spChg>
-        <pc:spChg chg="mod">
-          <ac:chgData name="Rochelle, Zoe" userId="S::zrochelle@quinnipiac.edu::2d6ab114-924b-4485-8cb4-918913cbb26c" providerId="AD" clId="Web-{63FA5E46-A17E-32FF-08B6-6DD2BBFDDBA1}" dt="2026-04-17T03:07:15.509" v="389" actId="20577"/>
-          <ac:spMkLst>
-            <pc:docMk/>
-            <pc:sldMk cId="416096641" sldId="262"/>
-            <ac:spMk id="3" creationId="{7AB638C5-9DC7-5CD3-FA50-BE02DE3763DC}"/>
-          </ac:spMkLst>
-        </pc:spChg>
-        <pc:spChg chg="add del mod">
-          <ac:chgData name="Rochelle, Zoe" userId="S::zrochelle@quinnipiac.edu::2d6ab114-924b-4485-8cb4-918913cbb26c" providerId="AD" clId="Web-{63FA5E46-A17E-32FF-08B6-6DD2BBFDDBA1}" dt="2026-04-17T02:43:23.659" v="74"/>
-          <ac:spMkLst>
-            <pc:docMk/>
-            <pc:sldMk cId="416096641" sldId="262"/>
-            <ac:spMk id="4" creationId="{4B000A2F-82CE-63C4-4620-68B472CA037C}"/>
-          </ac:spMkLst>
-        </pc:spChg>
-      </pc:sldChg>
-      <pc:sldChg chg="addSp delSp modSp new">
-        <pc:chgData name="Rochelle, Zoe" userId="S::zrochelle@quinnipiac.edu::2d6ab114-924b-4485-8cb4-918913cbb26c" providerId="AD" clId="Web-{63FA5E46-A17E-32FF-08B6-6DD2BBFDDBA1}" dt="2026-04-17T02:41:22.339" v="68" actId="20577"/>
-        <pc:sldMkLst>
-          <pc:docMk/>
-          <pc:sldMk cId="2725915553" sldId="263"/>
-        </pc:sldMkLst>
-        <pc:spChg chg="mod">
-          <ac:chgData name="Rochelle, Zoe" userId="S::zrochelle@quinnipiac.edu::2d6ab114-924b-4485-8cb4-918913cbb26c" providerId="AD" clId="Web-{63FA5E46-A17E-32FF-08B6-6DD2BBFDDBA1}" dt="2026-04-17T02:41:22.339" v="68" actId="20577"/>
-          <ac:spMkLst>
-            <pc:docMk/>
-            <pc:sldMk cId="2725915553" sldId="263"/>
-            <ac:spMk id="2" creationId="{D0538B8D-A343-0CAC-9308-A89F73B91356}"/>
-          </ac:spMkLst>
-        </pc:spChg>
-        <pc:spChg chg="del mod">
-          <ac:chgData name="Rochelle, Zoe" userId="S::zrochelle@quinnipiac.edu::2d6ab114-924b-4485-8cb4-918913cbb26c" providerId="AD" clId="Web-{63FA5E46-A17E-32FF-08B6-6DD2BBFDDBA1}" dt="2026-04-17T02:38:36.231" v="16"/>
-          <ac:spMkLst>
-            <pc:docMk/>
-            <pc:sldMk cId="2725915553" sldId="263"/>
-            <ac:spMk id="3" creationId="{C4F9803E-1A19-9A98-7A62-0BCD35FE6F6C}"/>
-          </ac:spMkLst>
-        </pc:spChg>
-        <pc:graphicFrameChg chg="add del mod">
-          <ac:chgData name="Rochelle, Zoe" userId="S::zrochelle@quinnipiac.edu::2d6ab114-924b-4485-8cb4-918913cbb26c" providerId="AD" clId="Web-{63FA5E46-A17E-32FF-08B6-6DD2BBFDDBA1}" dt="2026-04-17T02:38:28.512" v="15"/>
-          <ac:graphicFrameMkLst>
-            <pc:docMk/>
-            <pc:sldMk cId="2725915553" sldId="263"/>
-            <ac:graphicFrameMk id="4" creationId="{815880AF-4452-82AE-A4A4-1451C4970752}"/>
-          </ac:graphicFrameMkLst>
-        </pc:graphicFrameChg>
-        <pc:graphicFrameChg chg="add mod">
-          <ac:chgData name="Rochelle, Zoe" userId="S::zrochelle@quinnipiac.edu::2d6ab114-924b-4485-8cb4-918913cbb26c" providerId="AD" clId="Web-{63FA5E46-A17E-32FF-08B6-6DD2BBFDDBA1}" dt="2026-04-17T02:39:27.346" v="26" actId="1076"/>
-          <ac:graphicFrameMkLst>
-            <pc:docMk/>
-            <pc:sldMk cId="2725915553" sldId="263"/>
-            <ac:graphicFrameMk id="5" creationId="{815880AF-4452-82AE-A4A4-1451C4970752}"/>
-          </ac:graphicFrameMkLst>
-        </pc:graphicFrameChg>
-      </pc:sldChg>
-      <pc:sldChg chg="addSp delSp modSp new">
-        <pc:chgData name="Rochelle, Zoe" userId="S::zrochelle@quinnipiac.edu::2d6ab114-924b-4485-8cb4-918913cbb26c" providerId="AD" clId="Web-{63FA5E46-A17E-32FF-08B6-6DD2BBFDDBA1}" dt="2026-04-17T02:41:11.511" v="66" actId="20577"/>
-        <pc:sldMkLst>
-          <pc:docMk/>
-          <pc:sldMk cId="2292980719" sldId="264"/>
-        </pc:sldMkLst>
-        <pc:spChg chg="mod">
-          <ac:chgData name="Rochelle, Zoe" userId="S::zrochelle@quinnipiac.edu::2d6ab114-924b-4485-8cb4-918913cbb26c" providerId="AD" clId="Web-{63FA5E46-A17E-32FF-08B6-6DD2BBFDDBA1}" dt="2026-04-17T02:41:11.511" v="66" actId="20577"/>
-          <ac:spMkLst>
-            <pc:docMk/>
-            <pc:sldMk cId="2292980719" sldId="264"/>
-            <ac:spMk id="2" creationId="{2B693293-D2F9-2884-BF8A-FB53D58C43D9}"/>
-          </ac:spMkLst>
-        </pc:spChg>
-        <pc:spChg chg="del">
-          <ac:chgData name="Rochelle, Zoe" userId="S::zrochelle@quinnipiac.edu::2d6ab114-924b-4485-8cb4-918913cbb26c" providerId="AD" clId="Web-{63FA5E46-A17E-32FF-08B6-6DD2BBFDDBA1}" dt="2026-04-17T02:38:51.217" v="20"/>
-          <ac:spMkLst>
-            <pc:docMk/>
-            <pc:sldMk cId="2292980719" sldId="264"/>
-            <ac:spMk id="3" creationId="{13486B42-0FB8-734F-80BE-372D09DD582B}"/>
-          </ac:spMkLst>
-        </pc:spChg>
-        <pc:graphicFrameChg chg="add mod">
-          <ac:chgData name="Rochelle, Zoe" userId="S::zrochelle@quinnipiac.edu::2d6ab114-924b-4485-8cb4-918913cbb26c" providerId="AD" clId="Web-{63FA5E46-A17E-32FF-08B6-6DD2BBFDDBA1}" dt="2026-04-17T02:39:38.034" v="30" actId="1076"/>
-          <ac:graphicFrameMkLst>
-            <pc:docMk/>
-            <pc:sldMk cId="2292980719" sldId="264"/>
-            <ac:graphicFrameMk id="4" creationId="{7230FBBE-9CC7-F59C-B17B-CBD3C9C0AD7F}"/>
-          </ac:graphicFrameMkLst>
-        </pc:graphicFrameChg>
-      </pc:sldChg>
-      <pc:sldChg chg="modSp add replId">
-        <pc:chgData name="Rochelle, Zoe" userId="S::zrochelle@quinnipiac.edu::2d6ab114-924b-4485-8cb4-918913cbb26c" providerId="AD" clId="Web-{63FA5E46-A17E-32FF-08B6-6DD2BBFDDBA1}" dt="2026-04-17T03:27:10.090" v="633" actId="20577"/>
-        <pc:sldMkLst>
-          <pc:docMk/>
-          <pc:sldMk cId="2455247622" sldId="265"/>
-        </pc:sldMkLst>
-        <pc:spChg chg="mod">
-          <ac:chgData name="Rochelle, Zoe" userId="S::zrochelle@quinnipiac.edu::2d6ab114-924b-4485-8cb4-918913cbb26c" providerId="AD" clId="Web-{63FA5E46-A17E-32FF-08B6-6DD2BBFDDBA1}" dt="2026-04-17T03:27:10.090" v="633" actId="20577"/>
-          <ac:spMkLst>
-            <pc:docMk/>
-            <pc:sldMk cId="2455247622" sldId="265"/>
-            <ac:spMk id="2" creationId="{B3292363-CDC8-BF21-C911-F1C9322A6819}"/>
-          </ac:spMkLst>
-        </pc:spChg>
-      </pc:sldChg>
-      <pc:sldChg chg="modSp add replId">
-        <pc:chgData name="Rochelle, Zoe" userId="S::zrochelle@quinnipiac.edu::2d6ab114-924b-4485-8cb4-918913cbb26c" providerId="AD" clId="Web-{63FA5E46-A17E-32FF-08B6-6DD2BBFDDBA1}" dt="2026-04-17T03:26:52.855" v="630" actId="20577"/>
-        <pc:sldMkLst>
-          <pc:docMk/>
-          <pc:sldMk cId="189024862" sldId="266"/>
-        </pc:sldMkLst>
-        <pc:spChg chg="mod">
-          <ac:chgData name="Rochelle, Zoe" userId="S::zrochelle@quinnipiac.edu::2d6ab114-924b-4485-8cb4-918913cbb26c" providerId="AD" clId="Web-{63FA5E46-A17E-32FF-08B6-6DD2BBFDDBA1}" dt="2026-04-17T03:26:52.855" v="630" actId="20577"/>
-          <ac:spMkLst>
-            <pc:docMk/>
-            <pc:sldMk cId="189024862" sldId="266"/>
-            <ac:spMk id="2" creationId="{3CAAC3EE-54B2-CF29-608D-2175695E7E42}"/>
-          </ac:spMkLst>
-        </pc:spChg>
-        <pc:spChg chg="mod">
-          <ac:chgData name="Rochelle, Zoe" userId="S::zrochelle@quinnipiac.edu::2d6ab114-924b-4485-8cb4-918913cbb26c" providerId="AD" clId="Web-{63FA5E46-A17E-32FF-08B6-6DD2BBFDDBA1}" dt="2026-04-17T03:15:55.549" v="475" actId="20577"/>
-          <ac:spMkLst>
-            <pc:docMk/>
-            <pc:sldMk cId="189024862" sldId="266"/>
-            <ac:spMk id="3" creationId="{DFBD8772-1089-811F-CAB7-936BD73282E3}"/>
-          </ac:spMkLst>
-        </pc:spChg>
-      </pc:sldChg>
-      <pc:sldChg chg="modSp add replId modNotes">
-        <pc:chgData name="Rochelle, Zoe" userId="S::zrochelle@quinnipiac.edu::2d6ab114-924b-4485-8cb4-918913cbb26c" providerId="AD" clId="Web-{63FA5E46-A17E-32FF-08B6-6DD2BBFDDBA1}" dt="2026-04-17T03:40:43.869" v="799" actId="20577"/>
-        <pc:sldMkLst>
-          <pc:docMk/>
-          <pc:sldMk cId="2957766565" sldId="267"/>
-        </pc:sldMkLst>
-        <pc:spChg chg="mod">
-          <ac:chgData name="Rochelle, Zoe" userId="S::zrochelle@quinnipiac.edu::2d6ab114-924b-4485-8cb4-918913cbb26c" providerId="AD" clId="Web-{63FA5E46-A17E-32FF-08B6-6DD2BBFDDBA1}" dt="2026-04-17T03:40:43.869" v="799" actId="20577"/>
-          <ac:spMkLst>
-            <pc:docMk/>
-            <pc:sldMk cId="2957766565" sldId="267"/>
-            <ac:spMk id="2" creationId="{40EE7E0F-8C8A-BFCC-A742-C4A7DCBAEE3B}"/>
-          </ac:spMkLst>
-        </pc:spChg>
-        <pc:spChg chg="mod">
-          <ac:chgData name="Rochelle, Zoe" userId="S::zrochelle@quinnipiac.edu::2d6ab114-924b-4485-8cb4-918913cbb26c" providerId="AD" clId="Web-{63FA5E46-A17E-32FF-08B6-6DD2BBFDDBA1}" dt="2026-04-17T03:33:59.241" v="721" actId="20577"/>
-          <ac:spMkLst>
-            <pc:docMk/>
-            <pc:sldMk cId="2957766565" sldId="267"/>
-            <ac:spMk id="3" creationId="{AD17AA79-0307-E012-C3C3-47C1D6D4CF8D}"/>
-          </ac:spMkLst>
-        </pc:spChg>
-      </pc:sldChg>
-      <pc:sldChg chg="modSp add replId">
-        <pc:chgData name="Rochelle, Zoe" userId="S::zrochelle@quinnipiac.edu::2d6ab114-924b-4485-8cb4-918913cbb26c" providerId="AD" clId="Web-{63FA5E46-A17E-32FF-08B6-6DD2BBFDDBA1}" dt="2026-04-17T03:10:40.649" v="411" actId="20577"/>
-        <pc:sldMkLst>
-          <pc:docMk/>
-          <pc:sldMk cId="3586971591" sldId="268"/>
-        </pc:sldMkLst>
-        <pc:spChg chg="mod">
-          <ac:chgData name="Rochelle, Zoe" userId="S::zrochelle@quinnipiac.edu::2d6ab114-924b-4485-8cb4-918913cbb26c" providerId="AD" clId="Web-{63FA5E46-A17E-32FF-08B6-6DD2BBFDDBA1}" dt="2026-04-17T03:10:40.649" v="411" actId="20577"/>
-          <ac:spMkLst>
-            <pc:docMk/>
-            <pc:sldMk cId="3586971591" sldId="268"/>
-            <ac:spMk id="2" creationId="{D5BDE26E-BA2E-83DD-E869-0BB5230CDBC0}"/>
-          </ac:spMkLst>
-        </pc:spChg>
-      </pc:sldChg>
-      <pc:sldChg chg="modSp add replId">
-        <pc:chgData name="Rochelle, Zoe" userId="S::zrochelle@quinnipiac.edu::2d6ab114-924b-4485-8cb4-918913cbb26c" providerId="AD" clId="Web-{63FA5E46-A17E-32FF-08B6-6DD2BBFDDBA1}" dt="2026-04-17T03:38:36.715" v="760" actId="20577"/>
-        <pc:sldMkLst>
-          <pc:docMk/>
-          <pc:sldMk cId="582132285" sldId="269"/>
-        </pc:sldMkLst>
-        <pc:spChg chg="mod">
-          <ac:chgData name="Rochelle, Zoe" userId="S::zrochelle@quinnipiac.edu::2d6ab114-924b-4485-8cb4-918913cbb26c" providerId="AD" clId="Web-{63FA5E46-A17E-32FF-08B6-6DD2BBFDDBA1}" dt="2026-04-17T03:10:54.071" v="414" actId="20577"/>
-          <ac:spMkLst>
-            <pc:docMk/>
-            <pc:sldMk cId="582132285" sldId="269"/>
-            <ac:spMk id="2" creationId="{76EC283D-565D-ADB4-21FC-FE2210C1C183}"/>
-          </ac:spMkLst>
-        </pc:spChg>
-        <pc:spChg chg="mod">
-          <ac:chgData name="Rochelle, Zoe" userId="S::zrochelle@quinnipiac.edu::2d6ab114-924b-4485-8cb4-918913cbb26c" providerId="AD" clId="Web-{63FA5E46-A17E-32FF-08B6-6DD2BBFDDBA1}" dt="2026-04-17T03:38:36.715" v="760" actId="20577"/>
-          <ac:spMkLst>
-            <pc:docMk/>
-            <pc:sldMk cId="582132285" sldId="269"/>
-            <ac:spMk id="3" creationId="{8C0F8985-1230-970B-E60B-7EFCD30E5CD1}"/>
-          </ac:spMkLst>
-        </pc:spChg>
-      </pc:sldChg>
-      <pc:sldChg chg="modSp add replId modNotes">
-        <pc:chgData name="Rochelle, Zoe" userId="S::zrochelle@quinnipiac.edu::2d6ab114-924b-4485-8cb4-918913cbb26c" providerId="AD" clId="Web-{63FA5E46-A17E-32FF-08B6-6DD2BBFDDBA1}" dt="2026-04-17T03:39:55.865" v="784"/>
-        <pc:sldMkLst>
-          <pc:docMk/>
-          <pc:sldMk cId="1333383094" sldId="270"/>
-        </pc:sldMkLst>
-        <pc:spChg chg="mod">
-          <ac:chgData name="Rochelle, Zoe" userId="S::zrochelle@quinnipiac.edu::2d6ab114-924b-4485-8cb4-918913cbb26c" providerId="AD" clId="Web-{63FA5E46-A17E-32FF-08B6-6DD2BBFDDBA1}" dt="2026-04-17T03:28:21.343" v="639" actId="20577"/>
-          <ac:spMkLst>
-            <pc:docMk/>
-            <pc:sldMk cId="1333383094" sldId="270"/>
-            <ac:spMk id="2" creationId="{9806BD8E-677D-18CB-A3AD-00BAD95AC546}"/>
-          </ac:spMkLst>
-        </pc:spChg>
-        <pc:spChg chg="mod">
-          <ac:chgData name="Rochelle, Zoe" userId="S::zrochelle@quinnipiac.edu::2d6ab114-924b-4485-8cb4-918913cbb26c" providerId="AD" clId="Web-{63FA5E46-A17E-32FF-08B6-6DD2BBFDDBA1}" dt="2026-04-17T03:35:41.930" v="746" actId="20577"/>
-          <ac:spMkLst>
-            <pc:docMk/>
-            <pc:sldMk cId="1333383094" sldId="270"/>
-            <ac:spMk id="3" creationId="{F20E4046-12AA-A9C4-822E-02F2FEB7185B}"/>
-          </ac:spMkLst>
-        </pc:spChg>
-      </pc:sldChg>
-      <pc:sldChg chg="modSp add ord replId modNotes">
-        <pc:chgData name="Rochelle, Zoe" userId="S::zrochelle@quinnipiac.edu::2d6ab114-924b-4485-8cb4-918913cbb26c" providerId="AD" clId="Web-{63FA5E46-A17E-32FF-08B6-6DD2BBFDDBA1}" dt="2026-04-17T03:39:33.566" v="773"/>
-        <pc:sldMkLst>
-          <pc:docMk/>
-          <pc:sldMk cId="1543916677" sldId="271"/>
-        </pc:sldMkLst>
-        <pc:spChg chg="mod">
-          <ac:chgData name="Rochelle, Zoe" userId="S::zrochelle@quinnipiac.edu::2d6ab114-924b-4485-8cb4-918913cbb26c" providerId="AD" clId="Web-{63FA5E46-A17E-32FF-08B6-6DD2BBFDDBA1}" dt="2026-04-17T03:26:48.745" v="629" actId="20577"/>
-          <ac:spMkLst>
-            <pc:docMk/>
-            <pc:sldMk cId="1543916677" sldId="271"/>
-            <ac:spMk id="2" creationId="{9428D23D-C0A7-F678-C5E7-A87D5D0816DF}"/>
-          </ac:spMkLst>
-        </pc:spChg>
-        <pc:spChg chg="mod">
-          <ac:chgData name="Rochelle, Zoe" userId="S::zrochelle@quinnipiac.edu::2d6ab114-924b-4485-8cb4-918913cbb26c" providerId="AD" clId="Web-{63FA5E46-A17E-32FF-08B6-6DD2BBFDDBA1}" dt="2026-04-17T03:30:34.784" v="698" actId="20577"/>
-          <ac:spMkLst>
-            <pc:docMk/>
-            <pc:sldMk cId="1543916677" sldId="271"/>
-            <ac:spMk id="3" creationId="{9A6ED0DF-4BBD-A6A6-54D3-1E037EA5269A}"/>
-          </ac:spMkLst>
-        </pc:spChg>
-      </pc:sldChg>
-    </pc:docChg>
-  </pc:docChgLst>
-</pc:chgInfo>
 </file>
 
 <file path=ppt/charts/chart1.xml><?xml version="1.0" encoding="utf-8"?>
@@ -2919,6 +2568,106 @@
           <a:lstStyle/>
           <a:p>
             <a:r>
+              <a:rPr lang="en-US" dirty="0">
+                <a:ea typeface="Calibri"/>
+                <a:cs typeface="Calibri"/>
+              </a:rPr>
+              <a:t>Edit this, shorten, make it </a:t>
+            </a:r>
+            <a:r>
+              <a:rPr lang="en-US">
+                <a:ea typeface="Calibri"/>
+                <a:cs typeface="Calibri"/>
+              </a:rPr>
+              <a:t>simpler.</a:t>
+            </a:r>
+            <a:endParaRPr lang="en-US" dirty="0">
+              <a:ea typeface="Calibri"/>
+              <a:cs typeface="Calibri"/>
+            </a:endParaRPr>
+          </a:p>
+        </p:txBody>
+      </p:sp>
+      <p:sp>
+        <p:nvSpPr>
+          <p:cNvPr id="4" name="Slide Number Placeholder 3"/>
+          <p:cNvSpPr>
+            <a:spLocks noGrp="1"/>
+          </p:cNvSpPr>
+          <p:nvPr>
+            <p:ph type="sldNum" sz="quarter" idx="5"/>
+          </p:nvPr>
+        </p:nvSpPr>
+        <p:spPr/>
+        <p:txBody>
+          <a:bodyPr/>
+          <a:lstStyle/>
+          <a:p>
+            <a:fld id="{5970AA1C-A59A-4D57-AE60-B13F134F4FC4}" type="slidenum">
+              <a:t>8</a:t>
+            </a:fld>
+            <a:endParaRPr lang="en-US"/>
+          </a:p>
+        </p:txBody>
+      </p:sp>
+    </p:spTree>
+    <p:extLst>
+      <p:ext uri="{BB962C8B-B14F-4D97-AF65-F5344CB8AC3E}">
+        <p14:creationId xmlns:p14="http://schemas.microsoft.com/office/powerpoint/2010/main" val="152222252"/>
+      </p:ext>
+    </p:extLst>
+  </p:cSld>
+  <p:clrMapOvr>
+    <a:masterClrMapping/>
+  </p:clrMapOvr>
+</p:notes>
+</file>
+
+<file path=ppt/notesSlides/notesSlide4.xml><?xml version="1.0" encoding="utf-8"?>
+<p:notes xmlns:a="http://schemas.openxmlformats.org/drawingml/2006/main" xmlns:r="http://schemas.openxmlformats.org/officeDocument/2006/relationships" xmlns:p="http://schemas.openxmlformats.org/presentationml/2006/main">
+  <p:cSld>
+    <p:spTree>
+      <p:nvGrpSpPr>
+        <p:cNvPr id="1" name=""/>
+        <p:cNvGrpSpPr/>
+        <p:nvPr/>
+      </p:nvGrpSpPr>
+      <p:grpSpPr>
+        <a:xfrm>
+          <a:off x="0" y="0"/>
+          <a:ext cx="0" cy="0"/>
+          <a:chOff x="0" y="0"/>
+          <a:chExt cx="0" cy="0"/>
+        </a:xfrm>
+      </p:grpSpPr>
+      <p:sp>
+        <p:nvSpPr>
+          <p:cNvPr id="2" name="Slide Image Placeholder 1"/>
+          <p:cNvSpPr>
+            <a:spLocks noGrp="1" noRot="1" noChangeAspect="1"/>
+          </p:cNvSpPr>
+          <p:nvPr>
+            <p:ph type="sldImg"/>
+          </p:nvPr>
+        </p:nvSpPr>
+        <p:spPr/>
+      </p:sp>
+      <p:sp>
+        <p:nvSpPr>
+          <p:cNvPr id="3" name="Notes Placeholder 2"/>
+          <p:cNvSpPr>
+            <a:spLocks noGrp="1"/>
+          </p:cNvSpPr>
+          <p:nvPr>
+            <p:ph type="body" idx="1"/>
+          </p:nvPr>
+        </p:nvSpPr>
+        <p:spPr/>
+        <p:txBody>
+          <a:bodyPr/>
+          <a:lstStyle/>
+          <a:p>
+            <a:r>
               <a:rPr lang="en-US">
                 <a:ea typeface="Calibri"/>
                 <a:cs typeface="Calibri"/>
@@ -2954,6 +2703,92 @@
     <p:extLst>
       <p:ext uri="{BB962C8B-B14F-4D97-AF65-F5344CB8AC3E}">
         <p14:creationId xmlns:p14="http://schemas.microsoft.com/office/powerpoint/2010/main" val="252487568"/>
+      </p:ext>
+    </p:extLst>
+  </p:cSld>
+  <p:clrMapOvr>
+    <a:masterClrMapping/>
+  </p:clrMapOvr>
+</p:notes>
+</file>
+
+<file path=ppt/notesSlides/notesSlide5.xml><?xml version="1.0" encoding="utf-8"?>
+<p:notes xmlns:a="http://schemas.openxmlformats.org/drawingml/2006/main" xmlns:r="http://schemas.openxmlformats.org/officeDocument/2006/relationships" xmlns:p="http://schemas.openxmlformats.org/presentationml/2006/main">
+  <p:cSld>
+    <p:spTree>
+      <p:nvGrpSpPr>
+        <p:cNvPr id="1" name=""/>
+        <p:cNvGrpSpPr/>
+        <p:nvPr/>
+      </p:nvGrpSpPr>
+      <p:grpSpPr>
+        <a:xfrm>
+          <a:off x="0" y="0"/>
+          <a:ext cx="0" cy="0"/>
+          <a:chOff x="0" y="0"/>
+          <a:chExt cx="0" cy="0"/>
+        </a:xfrm>
+      </p:grpSpPr>
+      <p:sp>
+        <p:nvSpPr>
+          <p:cNvPr id="2" name="Slide Image Placeholder 1"/>
+          <p:cNvSpPr>
+            <a:spLocks noGrp="1" noRot="1" noChangeAspect="1"/>
+          </p:cNvSpPr>
+          <p:nvPr>
+            <p:ph type="sldImg"/>
+          </p:nvPr>
+        </p:nvSpPr>
+        <p:spPr/>
+      </p:sp>
+      <p:sp>
+        <p:nvSpPr>
+          <p:cNvPr id="3" name="Notes Placeholder 2"/>
+          <p:cNvSpPr>
+            <a:spLocks noGrp="1"/>
+          </p:cNvSpPr>
+          <p:nvPr>
+            <p:ph type="body" idx="1"/>
+          </p:nvPr>
+        </p:nvSpPr>
+        <p:spPr/>
+        <p:txBody>
+          <a:bodyPr/>
+          <a:lstStyle/>
+          <a:p>
+            <a:endParaRPr lang="en-US" dirty="0">
+              <a:ea typeface="Calibri"/>
+              <a:cs typeface="Calibri"/>
+            </a:endParaRPr>
+          </a:p>
+        </p:txBody>
+      </p:sp>
+      <p:sp>
+        <p:nvSpPr>
+          <p:cNvPr id="4" name="Slide Number Placeholder 3"/>
+          <p:cNvSpPr>
+            <a:spLocks noGrp="1"/>
+          </p:cNvSpPr>
+          <p:nvPr>
+            <p:ph type="sldNum" sz="quarter" idx="5"/>
+          </p:nvPr>
+        </p:nvSpPr>
+        <p:spPr/>
+        <p:txBody>
+          <a:bodyPr/>
+          <a:lstStyle/>
+          <a:p>
+            <a:fld id="{5970AA1C-A59A-4D57-AE60-B13F134F4FC4}" type="slidenum">
+              <a:t>13</a:t>
+            </a:fld>
+            <a:endParaRPr lang="en-US"/>
+          </a:p>
+        </p:txBody>
+      </p:sp>
+    </p:spTree>
+    <p:extLst>
+      <p:ext uri="{BB962C8B-B14F-4D97-AF65-F5344CB8AC3E}">
+        <p14:creationId xmlns:p14="http://schemas.microsoft.com/office/powerpoint/2010/main" val="1081051988"/>
       </p:ext>
     </p:extLst>
   </p:cSld>
@@ -7367,54 +7202,54 @@
               <a:buNone/>
             </a:pPr>
             <a:r>
-              <a:rPr lang="en-US" sz="1700" b="1"/>
+              <a:rPr lang="en-US" sz="2000" b="1"/>
               <a:t>Compare</a:t>
             </a:r>
-            <a:endParaRPr lang="en-US" sz="1700" dirty="0"/>
+            <a:endParaRPr lang="en-US" sz="2000" dirty="0"/>
           </a:p>
           <a:p>
             <a:pPr lvl="1">
               <a:buNone/>
             </a:pPr>
             <a:r>
-              <a:rPr lang="en-US" sz="1700" dirty="0"/>
+              <a:rPr lang="en-US" sz="2000" dirty="0"/>
               <a:t>TS-RAG, implemented as a retrieval-augmented model, i.e. </a:t>
             </a:r>
             <a:r>
-              <a:rPr lang="en-US" sz="1700" dirty="0" err="1"/>
+              <a:rPr lang="en-US" sz="2000" dirty="0" err="1"/>
               <a:t>ChronosBoltRetrieve</a:t>
             </a:r>
-            <a:endParaRPr lang="en-US" sz="1700" dirty="0"/>
+            <a:endParaRPr lang="en-US" sz="2000" dirty="0"/>
           </a:p>
           <a:p>
             <a:pPr>
               <a:buNone/>
             </a:pPr>
             <a:r>
-              <a:rPr lang="en-US" sz="1700" b="1"/>
+              <a:rPr lang="en-US" sz="2000" b="1"/>
               <a:t>With</a:t>
             </a:r>
-            <a:endParaRPr lang="en-US" sz="1700" dirty="0"/>
+            <a:endParaRPr lang="en-US" sz="2000" dirty="0"/>
           </a:p>
           <a:p>
             <a:pPr lvl="1">
               <a:buNone/>
             </a:pPr>
             <a:r>
-              <a:rPr lang="en-US" sz="1700" dirty="0"/>
+              <a:rPr lang="en-US" sz="2000" dirty="0"/>
               <a:t>The non-retrieval the backbone model </a:t>
             </a:r>
             <a:r>
-              <a:rPr lang="en-US" sz="1700" dirty="0" err="1"/>
+              <a:rPr lang="en-US" sz="2000" dirty="0" err="1"/>
               <a:t>ChronosBolt</a:t>
             </a:r>
-            <a:endParaRPr lang="en-US" sz="1700" dirty="0"/>
+            <a:endParaRPr lang="en-US" sz="2000" dirty="0"/>
           </a:p>
           <a:p>
             <a:pPr marL="0" indent="0">
               <a:buNone/>
             </a:pPr>
-            <a:endParaRPr lang="en-US" sz="1700" dirty="0">
+            <a:endParaRPr lang="en-US" sz="2000" dirty="0">
               <a:ea typeface="+mn-lt"/>
               <a:cs typeface="+mn-lt"/>
             </a:endParaRPr>
@@ -7424,24 +7259,24 @@
               <a:buNone/>
             </a:pPr>
             <a:r>
-              <a:rPr lang="en-US" sz="1700">
+              <a:rPr lang="en-US" sz="2000">
                 <a:ea typeface="+mn-lt"/>
                 <a:cs typeface="+mn-lt"/>
               </a:rPr>
               <a:t>The repo’s zero-shot script supports these model choices:</a:t>
             </a:r>
-            <a:endParaRPr lang="en-US" sz="1700" dirty="0"/>
+            <a:endParaRPr lang="en-US" sz="2000" dirty="0"/>
           </a:p>
           <a:p>
             <a:pPr marL="914400" lvl="1" indent="-457200"/>
             <a:r>
-              <a:rPr lang="en-US" sz="1700" err="1">
+              <a:rPr lang="en-US" sz="2000" dirty="0" err="1">
                 <a:ea typeface="+mn-lt"/>
                 <a:cs typeface="+mn-lt"/>
               </a:rPr>
               <a:t>ChronosBoltRetrieve</a:t>
             </a:r>
-            <a:endParaRPr lang="en-US" sz="1700" dirty="0">
+            <a:endParaRPr lang="en-US" sz="2000" dirty="0">
               <a:ea typeface="+mn-lt"/>
               <a:cs typeface="+mn-lt"/>
             </a:endParaRPr>
@@ -7449,37 +7284,37 @@
           <a:p>
             <a:pPr marL="914400" lvl="1" indent="-457200"/>
             <a:r>
-              <a:rPr lang="en-US" sz="1700" err="1">
+              <a:rPr lang="en-US" sz="2000" dirty="0" err="1">
                 <a:ea typeface="+mn-lt"/>
                 <a:cs typeface="+mn-lt"/>
               </a:rPr>
               <a:t>ChronosBolt</a:t>
             </a:r>
-            <a:endParaRPr lang="en-US" sz="1700" dirty="0"/>
+            <a:endParaRPr lang="en-US" sz="2000" dirty="0"/>
           </a:p>
           <a:p>
             <a:pPr marL="914400" lvl="1" indent="-457200"/>
             <a:r>
-              <a:rPr lang="en-US" sz="1700" dirty="0" err="1">
+              <a:rPr lang="en-US" sz="2000" dirty="0" err="1">
                 <a:ea typeface="+mn-lt"/>
                 <a:cs typeface="+mn-lt"/>
               </a:rPr>
               <a:t>MOMENTRetrieve</a:t>
             </a:r>
             <a:r>
-              <a:rPr lang="en-US" sz="1700" dirty="0">
+              <a:rPr lang="en-US" sz="2000" dirty="0">
                 <a:ea typeface="+mn-lt"/>
                 <a:cs typeface="+mn-lt"/>
               </a:rPr>
               <a:t> (unused)</a:t>
             </a:r>
-            <a:endParaRPr lang="en-US" sz="1700" dirty="0"/>
+            <a:endParaRPr lang="en-US" sz="2000" dirty="0"/>
           </a:p>
           <a:p>
             <a:pPr lvl="1">
               <a:buNone/>
             </a:pPr>
-            <a:endParaRPr lang="en-US" sz="1700" dirty="0"/>
+            <a:endParaRPr lang="en-US" sz="2000" dirty="0"/>
           </a:p>
         </p:txBody>
       </p:sp>
@@ -7570,10 +7405,127 @@
         </p:nvSpPr>
         <p:spPr/>
         <p:txBody>
-          <a:bodyPr/>
-          <a:lstStyle/>
-          <a:p>
+          <a:bodyPr vert="horz" lIns="91440" tIns="45720" rIns="91440" bIns="45720" rtlCol="0" anchor="t">
+            <a:normAutofit/>
+          </a:bodyPr>
+          <a:lstStyle/>
+          <a:p>
+            <a:r>
+              <a:rPr lang="en-US" sz="2000" b="1">
+                <a:ea typeface="+mn-lt"/>
+                <a:cs typeface="+mn-lt"/>
+              </a:rPr>
+              <a:t>MSE </a:t>
+            </a:r>
+            <a:r>
+              <a:rPr lang="en-US" sz="2000">
+                <a:ea typeface="+mn-lt"/>
+                <a:cs typeface="+mn-lt"/>
+              </a:rPr>
+              <a:t>(Mean Squared Error) - measures prediction error, but it squares the errors, so it penalizes larger mistakes more heavily. That makes it useful when big forecasting misses are especially undesirable.</a:t>
+            </a:r>
+          </a:p>
+          <a:p>
+            <a:r>
+              <a:rPr lang="en-US" sz="2000" b="1">
+                <a:ea typeface="+mn-lt"/>
+                <a:cs typeface="+mn-lt"/>
+              </a:rPr>
+              <a:t>MAE </a:t>
+            </a:r>
+            <a:r>
+              <a:rPr lang="en-US" sz="2000">
+                <a:ea typeface="+mn-lt"/>
+                <a:cs typeface="+mn-lt"/>
+              </a:rPr>
+              <a:t>(Mean Absolute Error) - measures the average absolute difference between the forecast and the true values. It is easy to interpret because it tells you the typical size of the model’s error.</a:t>
+            </a:r>
+          </a:p>
+          <a:p>
+            <a:endParaRPr lang="en-US" sz="2000" dirty="0">
+              <a:ea typeface="+mn-lt"/>
+              <a:cs typeface="+mn-lt"/>
+            </a:endParaRPr>
+          </a:p>
+          <a:p>
+            <a:pPr>
+              <a:buNone/>
+            </a:pPr>
+            <a:r>
+              <a:rPr lang="en-US" sz="2000">
+                <a:ea typeface="+mn-lt"/>
+                <a:cs typeface="+mn-lt"/>
+              </a:rPr>
+              <a:t>Why? -- Using both metrics gives a more balanced evaluation: MAE shows overall average error,</a:t>
+            </a:r>
             <a:endParaRPr lang="en-US"/>
+          </a:p>
+          <a:p>
+            <a:pPr>
+              <a:buNone/>
+            </a:pPr>
+            <a:r>
+              <a:rPr lang="en-US" sz="2000">
+                <a:ea typeface="+mn-lt"/>
+                <a:cs typeface="+mn-lt"/>
+              </a:rPr>
+              <a:t>while MSE highlights whether the model sometimes makes especially large mistakes. That is</a:t>
+            </a:r>
+            <a:endParaRPr lang="en-US"/>
+          </a:p>
+          <a:p>
+            <a:pPr>
+              <a:buNone/>
+            </a:pPr>
+            <a:r>
+              <a:rPr lang="en-US" sz="2000">
+                <a:ea typeface="+mn-lt"/>
+                <a:cs typeface="+mn-lt"/>
+              </a:rPr>
+              <a:t>why they are commonly reported together in time series forecasting experiments. The paper</a:t>
+            </a:r>
+            <a:endParaRPr lang="en-US"/>
+          </a:p>
+          <a:p>
+            <a:pPr>
+              <a:buNone/>
+            </a:pPr>
+            <a:r>
+              <a:rPr lang="en-US" sz="2000">
+                <a:ea typeface="+mn-lt"/>
+                <a:cs typeface="+mn-lt"/>
+              </a:rPr>
+              <a:t>consistently uses them to compare TS-RAG against baselines and retrieval-based</a:t>
+            </a:r>
+            <a:endParaRPr lang="en-US"/>
+          </a:p>
+          <a:p>
+            <a:pPr>
+              <a:buNone/>
+            </a:pPr>
+            <a:r>
+              <a:rPr lang="en-US" sz="2000">
+                <a:ea typeface="+mn-lt"/>
+                <a:cs typeface="+mn-lt"/>
+              </a:rPr>
+              <a:t>alternatives.</a:t>
+            </a:r>
+            <a:endParaRPr lang="en-US"/>
+          </a:p>
+          <a:p>
+            <a:pPr>
+              <a:buNone/>
+            </a:pPr>
+            <a:endParaRPr lang="en-US" sz="2000" dirty="0"/>
+          </a:p>
+          <a:p>
+            <a:pPr marL="0" indent="0">
+              <a:buNone/>
+            </a:pPr>
+            <a:endParaRPr lang="en-US" sz="2000" dirty="0">
+              <a:ea typeface="+mn-lt"/>
+              <a:cs typeface="+mn-lt"/>
+            </a:endParaRPr>
           </a:p>
         </p:txBody>
       </p:sp>

--- a/deliverables/code-review-presentation.pptx
+++ b/deliverables/code-review-presentation.pptx
@@ -131,7 +131,7 @@
 <file path=ppt/revisionInfo.xml><?xml version="1.0" encoding="utf-8"?>
 <p1510:revInfo xmlns:a="http://schemas.openxmlformats.org/drawingml/2006/main" xmlns:r="http://schemas.openxmlformats.org/officeDocument/2006/relationships" xmlns:p1510="http://schemas.microsoft.com/office/powerpoint/2015/10/main">
   <p1510:revLst>
-    <p1510:client id="{63FA5E46-A17E-32FF-08B6-6DD2BBFDDBA1}" v="736" dt="2026-04-17T03:53:57.786"/>
+    <p1510:client id="{C854B660-205F-A51C-0EBB-658FCDB223F7}" v="141" dt="2026-04-20T18:25:55.652"/>
   </p1510:revLst>
 </p1510:revInfo>
 </file>
@@ -2075,7 +2075,7 @@
           </a:lstStyle>
           <a:p>
             <a:fld id="{0604E06E-E5ED-48A5-9D5E-E1AAD3C6EB5E}" type="datetimeFigureOut">
-              <a:t>4/16/2026</a:t>
+              <a:t>4/20/2026</a:t>
             </a:fld>
             <a:endParaRPr lang="en-US"/>
           </a:p>
@@ -2567,20 +2567,6 @@
           <a:bodyPr/>
           <a:lstStyle/>
           <a:p>
-            <a:r>
-              <a:rPr lang="en-US" dirty="0">
-                <a:ea typeface="Calibri"/>
-                <a:cs typeface="Calibri"/>
-              </a:rPr>
-              <a:t>Edit this, shorten, make it </a:t>
-            </a:r>
-            <a:r>
-              <a:rPr lang="en-US">
-                <a:ea typeface="Calibri"/>
-                <a:cs typeface="Calibri"/>
-              </a:rPr>
-              <a:t>simpler.</a:t>
-            </a:r>
             <a:endParaRPr lang="en-US" dirty="0">
               <a:ea typeface="Calibri"/>
               <a:cs typeface="Calibri"/>
@@ -2756,6 +2742,93 @@
           <a:bodyPr/>
           <a:lstStyle/>
           <a:p>
+            <a:r>
+              <a:rPr lang="en-US"/>
+              <a:t>ETTh1  = Electricity Transformer dataset</a:t>
+            </a:r>
+          </a:p>
+        </p:txBody>
+      </p:sp>
+      <p:sp>
+        <p:nvSpPr>
+          <p:cNvPr id="4" name="Slide Number Placeholder 3"/>
+          <p:cNvSpPr>
+            <a:spLocks noGrp="1"/>
+          </p:cNvSpPr>
+          <p:nvPr>
+            <p:ph type="sldNum" sz="quarter" idx="5"/>
+          </p:nvPr>
+        </p:nvSpPr>
+        <p:spPr/>
+        <p:txBody>
+          <a:bodyPr/>
+          <a:lstStyle/>
+          <a:p>
+            <a:fld id="{5970AA1C-A59A-4D57-AE60-B13F134F4FC4}" type="slidenum">
+              <a:rPr lang="en-US"/>
+              <a:t>10</a:t>
+            </a:fld>
+            <a:endParaRPr lang="en-US"/>
+          </a:p>
+        </p:txBody>
+      </p:sp>
+    </p:spTree>
+    <p:extLst>
+      <p:ext uri="{BB962C8B-B14F-4D97-AF65-F5344CB8AC3E}">
+        <p14:creationId xmlns:p14="http://schemas.microsoft.com/office/powerpoint/2010/main" val="1826018138"/>
+      </p:ext>
+    </p:extLst>
+  </p:cSld>
+  <p:clrMapOvr>
+    <a:masterClrMapping/>
+  </p:clrMapOvr>
+</p:notes>
+</file>
+
+<file path=ppt/notesSlides/notesSlide6.xml><?xml version="1.0" encoding="utf-8"?>
+<p:notes xmlns:a="http://schemas.openxmlformats.org/drawingml/2006/main" xmlns:r="http://schemas.openxmlformats.org/officeDocument/2006/relationships" xmlns:p="http://schemas.openxmlformats.org/presentationml/2006/main">
+  <p:cSld>
+    <p:spTree>
+      <p:nvGrpSpPr>
+        <p:cNvPr id="1" name=""/>
+        <p:cNvGrpSpPr/>
+        <p:nvPr/>
+      </p:nvGrpSpPr>
+      <p:grpSpPr>
+        <a:xfrm>
+          <a:off x="0" y="0"/>
+          <a:ext cx="0" cy="0"/>
+          <a:chOff x="0" y="0"/>
+          <a:chExt cx="0" cy="0"/>
+        </a:xfrm>
+      </p:grpSpPr>
+      <p:sp>
+        <p:nvSpPr>
+          <p:cNvPr id="2" name="Slide Image Placeholder 1"/>
+          <p:cNvSpPr>
+            <a:spLocks noGrp="1" noRot="1" noChangeAspect="1"/>
+          </p:cNvSpPr>
+          <p:nvPr>
+            <p:ph type="sldImg"/>
+          </p:nvPr>
+        </p:nvSpPr>
+        <p:spPr/>
+      </p:sp>
+      <p:sp>
+        <p:nvSpPr>
+          <p:cNvPr id="3" name="Notes Placeholder 2"/>
+          <p:cNvSpPr>
+            <a:spLocks noGrp="1"/>
+          </p:cNvSpPr>
+          <p:nvPr>
+            <p:ph type="body" idx="1"/>
+          </p:nvPr>
+        </p:nvSpPr>
+        <p:spPr/>
+        <p:txBody>
+          <a:bodyPr/>
+          <a:lstStyle/>
+          <a:p>
             <a:endParaRPr lang="en-US" dirty="0">
               <a:ea typeface="Calibri"/>
               <a:cs typeface="Calibri"/>
@@ -2927,7 +3000,7 @@
           <a:p>
             <a:fld id="{846CE7D5-CF57-46EF-B807-FDD0502418D4}" type="datetimeFigureOut">
               <a:rPr lang="en-US" smtClean="0"/>
-              <a:t>4/16/2026</a:t>
+              <a:t>4/20/2026</a:t>
             </a:fld>
             <a:endParaRPr lang="en-US"/>
           </a:p>
@@ -3095,7 +3168,7 @@
           <a:p>
             <a:fld id="{846CE7D5-CF57-46EF-B807-FDD0502418D4}" type="datetimeFigureOut">
               <a:rPr lang="en-US" smtClean="0"/>
-              <a:t>4/16/2026</a:t>
+              <a:t>4/20/2026</a:t>
             </a:fld>
             <a:endParaRPr lang="en-US"/>
           </a:p>
@@ -3273,7 +3346,7 @@
           <a:p>
             <a:fld id="{846CE7D5-CF57-46EF-B807-FDD0502418D4}" type="datetimeFigureOut">
               <a:rPr lang="en-US" smtClean="0"/>
-              <a:t>4/16/2026</a:t>
+              <a:t>4/20/2026</a:t>
             </a:fld>
             <a:endParaRPr lang="en-US"/>
           </a:p>
@@ -3441,7 +3514,7 @@
           <a:p>
             <a:fld id="{846CE7D5-CF57-46EF-B807-FDD0502418D4}" type="datetimeFigureOut">
               <a:rPr lang="en-US" smtClean="0"/>
-              <a:t>4/16/2026</a:t>
+              <a:t>4/20/2026</a:t>
             </a:fld>
             <a:endParaRPr lang="en-US"/>
           </a:p>
@@ -3686,7 +3759,7 @@
           <a:p>
             <a:fld id="{846CE7D5-CF57-46EF-B807-FDD0502418D4}" type="datetimeFigureOut">
               <a:rPr lang="en-US" smtClean="0"/>
-              <a:t>4/16/2026</a:t>
+              <a:t>4/20/2026</a:t>
             </a:fld>
             <a:endParaRPr lang="en-US"/>
           </a:p>
@@ -3915,7 +3988,7 @@
           <a:p>
             <a:fld id="{846CE7D5-CF57-46EF-B807-FDD0502418D4}" type="datetimeFigureOut">
               <a:rPr lang="en-US" smtClean="0"/>
-              <a:t>4/16/2026</a:t>
+              <a:t>4/20/2026</a:t>
             </a:fld>
             <a:endParaRPr lang="en-US"/>
           </a:p>
@@ -4279,7 +4352,7 @@
           <a:p>
             <a:fld id="{846CE7D5-CF57-46EF-B807-FDD0502418D4}" type="datetimeFigureOut">
               <a:rPr lang="en-US" smtClean="0"/>
-              <a:t>4/16/2026</a:t>
+              <a:t>4/20/2026</a:t>
             </a:fld>
             <a:endParaRPr lang="en-US"/>
           </a:p>
@@ -4396,7 +4469,7 @@
           <a:p>
             <a:fld id="{846CE7D5-CF57-46EF-B807-FDD0502418D4}" type="datetimeFigureOut">
               <a:rPr lang="en-US" smtClean="0"/>
-              <a:t>4/16/2026</a:t>
+              <a:t>4/20/2026</a:t>
             </a:fld>
             <a:endParaRPr lang="en-US"/>
           </a:p>
@@ -4491,7 +4564,7 @@
           <a:p>
             <a:fld id="{846CE7D5-CF57-46EF-B807-FDD0502418D4}" type="datetimeFigureOut">
               <a:rPr lang="en-US" smtClean="0"/>
-              <a:t>4/16/2026</a:t>
+              <a:t>4/20/2026</a:t>
             </a:fld>
             <a:endParaRPr lang="en-US"/>
           </a:p>
@@ -4766,7 +4839,7 @@
           <a:p>
             <a:fld id="{846CE7D5-CF57-46EF-B807-FDD0502418D4}" type="datetimeFigureOut">
               <a:rPr lang="en-US" smtClean="0"/>
-              <a:t>4/16/2026</a:t>
+              <a:t>4/20/2026</a:t>
             </a:fld>
             <a:endParaRPr lang="en-US"/>
           </a:p>
@@ -5021,7 +5094,7 @@
           <a:p>
             <a:fld id="{846CE7D5-CF57-46EF-B807-FDD0502418D4}" type="datetimeFigureOut">
               <a:rPr lang="en-US" smtClean="0"/>
-              <a:t>4/16/2026</a:t>
+              <a:t>4/20/2026</a:t>
             </a:fld>
             <a:endParaRPr lang="en-US"/>
           </a:p>
@@ -5232,7 +5305,7 @@
           <a:p>
             <a:fld id="{846CE7D5-CF57-46EF-B807-FDD0502418D4}" type="datetimeFigureOut">
               <a:rPr lang="en-US" smtClean="0"/>
-              <a:t>4/16/2026</a:t>
+              <a:t>4/20/2026</a:t>
             </a:fld>
             <a:endParaRPr lang="en-US"/>
           </a:p>
@@ -5908,14 +5981,14 @@
               <a:t>    Mean Absolute Error: </a:t>
             </a:r>
             <a:r>
-              <a:rPr lang="en-US" sz="2000">
+              <a:rPr lang="en-US" sz="2000" b="1">
                 <a:solidFill>
                   <a:srgbClr val="FF0000"/>
                 </a:solidFill>
               </a:rPr>
               <a:t>0.3623</a:t>
             </a:r>
-            <a:endParaRPr lang="en-US" sz="2000"/>
+            <a:endParaRPr lang="en-US" sz="2000" b="1"/>
           </a:p>
           <a:p>
             <a:pPr>
@@ -5927,14 +6000,14 @@
               <a:t>    Mean Squared Error:  </a:t>
             </a:r>
             <a:r>
-              <a:rPr lang="en-US" sz="2000">
+              <a:rPr lang="en-US" sz="2000" b="1">
                 <a:solidFill>
                   <a:srgbClr val="FF0000"/>
                 </a:solidFill>
               </a:rPr>
               <a:t>0.3556</a:t>
             </a:r>
-            <a:endParaRPr lang="en-US" sz="2000"/>
+            <a:endParaRPr lang="en-US" sz="2000" b="1"/>
           </a:p>
           <a:p>
             <a:pPr marL="0" indent="0">
@@ -5965,7 +6038,19 @@
             </a:r>
             <a:r>
               <a:rPr lang="en-US" sz="2000" dirty="0"/>
-              <a:t> can use this data to argue that TS-RAG improves zero-shot forecasting by comparing it against other methods, like RAF.</a:t>
+              <a:t> can use this data to argue </a:t>
+            </a:r>
+            <a:r>
+              <a:rPr lang="en-US" sz="2000" b="1" dirty="0">
+                <a:solidFill>
+                  <a:srgbClr val="FF0000"/>
+                </a:solidFill>
+              </a:rPr>
+              <a:t>that TS-RAG improves zero-shot forecasting</a:t>
+            </a:r>
+            <a:r>
+              <a:rPr lang="en-US" sz="2000" dirty="0"/>
+              <a:t> by comparing it against other methods, like RAF.</a:t>
             </a:r>
           </a:p>
           <a:p>
@@ -6560,11 +6645,18 @@
           <a:lstStyle/>
           <a:p>
             <a:r>
+              <a:rPr lang="en-US" sz="4000" dirty="0">
+                <a:ea typeface="+mj-lt"/>
+                <a:cs typeface="+mj-lt"/>
+              </a:rPr>
+              <a:t>What is the repo </a:t>
+            </a:r>
+            <a:r>
               <a:rPr lang="en-US" sz="4000">
                 <a:ea typeface="+mj-lt"/>
                 <a:cs typeface="+mj-lt"/>
               </a:rPr>
-              <a:t>What the repo proposes</a:t>
+              <a:t>proposing?</a:t>
             </a:r>
             <a:endParaRPr lang="en-US" sz="4000"/>
           </a:p>
@@ -6605,6 +6697,9 @@
             </a:r>
             <a:r>
               <a:rPr lang="en-US" sz="2000" b="1">
+                <a:solidFill>
+                  <a:srgbClr val="FF0000"/>
+                </a:solidFill>
                 <a:ea typeface="+mn-lt"/>
                 <a:cs typeface="+mn-lt"/>
               </a:rPr>
@@ -6637,25 +6732,29 @@
                 <a:ea typeface="+mn-lt"/>
                 <a:cs typeface="+mn-lt"/>
               </a:rPr>
-              <a:t>To demonstrate this, the project proposes a test - compare a retrieval augmented</a:t>
-            </a:r>
-            <a:endParaRPr lang="en-US" dirty="0"/>
+              <a:t>To demonstrate this, the project offers a test:</a:t>
+            </a:r>
           </a:p>
           <a:p>
             <a:pPr>
               <a:buNone/>
             </a:pPr>
+            <a:br>
+              <a:rPr lang="en-US" sz="2000" dirty="0">
+                <a:ea typeface="+mn-lt"/>
+                <a:cs typeface="+mn-lt"/>
+              </a:rPr>
+            </a:br>
             <a:r>
               <a:rPr lang="en-US" sz="2000">
                 <a:ea typeface="+mn-lt"/>
                 <a:cs typeface="+mn-lt"/>
               </a:rPr>
-              <a:t>forecasting model (TS-RAG) against a standard backbone forecasting model without retrieval.</a:t>
-            </a:r>
-            <a:endParaRPr lang="en-US"/>
-          </a:p>
-          <a:p>
-            <a:pPr>
+              <a:t>Compare a retrieval augmented forecasting model (TS-RAG) against a standard backbone forecasting model without retrieval.</a:t>
+            </a:r>
+          </a:p>
+          <a:p>
+            <a:pPr algn="r">
               <a:buNone/>
             </a:pPr>
             <a:endParaRPr lang="en-US" sz="2000" dirty="0"/>
@@ -6672,37 +6771,53 @@
               <a:t>In the code, this appears as the models </a:t>
             </a:r>
             <a:r>
-              <a:rPr lang="en-US" sz="2000" err="1">
+              <a:rPr lang="en-US" sz="2000" b="1" dirty="0" err="1">
                 <a:ea typeface="+mn-lt"/>
                 <a:cs typeface="+mn-lt"/>
               </a:rPr>
               <a:t>ChronosBoltRetrieve</a:t>
             </a:r>
             <a:r>
+              <a:rPr lang="en-US" sz="2000" b="1" dirty="0">
+                <a:ea typeface="+mn-lt"/>
+                <a:cs typeface="+mn-lt"/>
+              </a:rPr>
+              <a:t> </a:t>
+            </a:r>
+            <a:r>
               <a:rPr lang="en-US" sz="2000" dirty="0">
                 <a:ea typeface="+mn-lt"/>
                 <a:cs typeface="+mn-lt"/>
               </a:rPr>
-              <a:t> versus </a:t>
-            </a:r>
-            <a:r>
-              <a:rPr lang="en-US" sz="2000" err="1">
+              <a:t>and </a:t>
+            </a:r>
+            <a:r>
+              <a:rPr lang="en-US" sz="2000" b="1" dirty="0" err="1">
                 <a:ea typeface="+mn-lt"/>
                 <a:cs typeface="+mn-lt"/>
               </a:rPr>
               <a:t>ChronosBolt</a:t>
             </a:r>
             <a:r>
-              <a:rPr lang="en-US" sz="2000" dirty="0">
+              <a:rPr lang="en-US" sz="2000" b="1" dirty="0">
                 <a:ea typeface="+mn-lt"/>
                 <a:cs typeface="+mn-lt"/>
               </a:rPr>
-              <a:t> respectively.</a:t>
-            </a:r>
-            <a:endParaRPr lang="en-US" dirty="0">
-              <a:ea typeface="+mn-lt"/>
-              <a:cs typeface="+mn-lt"/>
-            </a:endParaRPr>
+              <a:t> </a:t>
+            </a:r>
+          </a:p>
+          <a:p>
+            <a:pPr>
+              <a:buNone/>
+            </a:pPr>
+            <a:r>
+              <a:rPr lang="en-US" sz="2000">
+                <a:ea typeface="+mn-lt"/>
+                <a:cs typeface="+mn-lt"/>
+              </a:rPr>
+              <a:t>respectively.</a:t>
+            </a:r>
+            <a:endParaRPr lang="en-US"/>
           </a:p>
         </p:txBody>
       </p:sp>
@@ -6800,11 +6915,18 @@
           <a:lstStyle/>
           <a:p>
             <a:r>
+              <a:rPr lang="en-US" sz="2000" b="1">
+                <a:ea typeface="+mn-lt"/>
+                <a:cs typeface="+mn-lt"/>
+              </a:rPr>
+              <a:t>Standard backbone forecasting model</a:t>
+            </a:r>
+            <a:r>
               <a:rPr lang="en-US" sz="2000">
                 <a:ea typeface="+mn-lt"/>
                 <a:cs typeface="+mn-lt"/>
               </a:rPr>
-              <a:t>Standard backbone forecasting model</a:t>
+              <a:t>: the plain base model used to make forecasts, without the extra TS-RAG retrieval components added on top. In our case "Chronos-Bolt".</a:t>
             </a:r>
             <a:endParaRPr lang="en-US" sz="2000" dirty="0">
               <a:ea typeface="+mn-lt"/>
@@ -6813,13 +6935,13 @@
           </a:p>
           <a:p>
             <a:r>
-              <a:rPr lang="en-US" sz="2000">
+              <a:rPr lang="en-US" sz="2000" b="1">
                 <a:ea typeface="+mn-lt"/>
                 <a:cs typeface="+mn-lt"/>
               </a:rPr>
               <a:t>TS-RAG</a:t>
             </a:r>
-            <a:endParaRPr lang="en-US" sz="2000" dirty="0">
+            <a:endParaRPr lang="en-US" sz="2000" b="1" dirty="0">
               <a:ea typeface="+mn-lt"/>
               <a:cs typeface="+mn-lt"/>
             </a:endParaRPr>
@@ -6833,7 +6955,7 @@
                 <a:ea typeface="+mn-lt"/>
                 <a:cs typeface="+mn-lt"/>
               </a:rPr>
-              <a:t>has three components:</a:t>
+              <a:t>Consists of 3 parts:</a:t>
             </a:r>
           </a:p>
           <a:p>
@@ -6845,7 +6967,7 @@
                 <a:ea typeface="+mn-lt"/>
                 <a:cs typeface="+mn-lt"/>
               </a:rPr>
-              <a:t>a time series foundation model,</a:t>
+              <a:t>a time series foundation model (Chronos Bolt)</a:t>
             </a:r>
           </a:p>
           <a:p>
@@ -6882,11 +7004,18 @@
           </a:p>
           <a:p>
             <a:r>
+              <a:rPr lang="en-US" sz="2000" b="1">
+                <a:ea typeface="+mn-lt"/>
+                <a:cs typeface="+mn-lt"/>
+              </a:rPr>
+              <a:t>Zero-Shot</a:t>
+            </a:r>
+            <a:r>
               <a:rPr lang="en-US" sz="2000">
                 <a:ea typeface="+mn-lt"/>
                 <a:cs typeface="+mn-lt"/>
               </a:rPr>
-              <a:t>Zero-Shot</a:t>
+              <a:t>: the model is asked to solve a task without being trained or fine-tuned specifically for dataset beforehand.</a:t>
             </a:r>
             <a:endParaRPr lang="en-US" sz="2000" dirty="0">
               <a:ea typeface="+mn-lt"/>
@@ -6895,10 +7024,24 @@
           </a:p>
           <a:p>
             <a:r>
+              <a:rPr lang="en-US" sz="2000" b="1"/>
+              <a:t>Time series</a:t>
+            </a:r>
+            <a:r>
               <a:rPr lang="en-US" sz="2000"/>
-              <a:t>Etc.</a:t>
-            </a:r>
-            <a:endParaRPr lang="en-US" sz="2000" dirty="0"/>
+              <a:t>: </a:t>
+            </a:r>
+            <a:r>
+              <a:rPr lang="en-US" sz="2000">
+                <a:ea typeface="+mn-lt"/>
+                <a:cs typeface="+mn-lt"/>
+              </a:rPr>
+              <a:t>a set of data points recorded in time order: daily, hourly, etc.</a:t>
+            </a:r>
+            <a:endParaRPr lang="en-US" sz="2000" b="1" dirty="0">
+              <a:ea typeface="+mn-lt"/>
+              <a:cs typeface="+mn-lt"/>
+            </a:endParaRPr>
           </a:p>
           <a:p>
             <a:pPr>
@@ -7212,8 +7355,16 @@
               <a:buNone/>
             </a:pPr>
             <a:r>
+              <a:rPr lang="en-US" sz="2000" b="1" dirty="0">
+                <a:solidFill>
+                  <a:srgbClr val="FF0000"/>
+                </a:solidFill>
+              </a:rPr>
+              <a:t>TS-RAG</a:t>
+            </a:r>
+            <a:r>
               <a:rPr lang="en-US" sz="2000" dirty="0"/>
-              <a:t>TS-RAG, implemented as a retrieval-augmented model, i.e. </a:t>
+              <a:t>, implemented as a retrieval-augmented model, i.e. </a:t>
             </a:r>
             <a:r>
               <a:rPr lang="en-US" sz="2000" dirty="0" err="1"/>
@@ -7240,10 +7391,18 @@
               <a:t>The non-retrieval the backbone model </a:t>
             </a:r>
             <a:r>
-              <a:rPr lang="en-US" sz="2000" dirty="0" err="1"/>
+              <a:rPr lang="en-US" sz="2000" b="1" dirty="0" err="1">
+                <a:solidFill>
+                  <a:srgbClr val="FF0000"/>
+                </a:solidFill>
+              </a:rPr>
               <a:t>ChronosBolt</a:t>
             </a:r>
-            <a:endParaRPr lang="en-US" sz="2000" dirty="0"/>
+            <a:endParaRPr lang="en-US" sz="2000" dirty="0">
+              <a:solidFill>
+                <a:srgbClr val="FF0000"/>
+              </a:solidFill>
+            </a:endParaRPr>
           </a:p>
           <a:p>
             <a:pPr marL="0" indent="0">
@@ -7381,7 +7540,7 @@
             </a:r>
             <a:r>
               <a:rPr lang="en-US" sz="4000"/>
-              <a:t> Logic (Cont.) - Metrics?</a:t>
+              <a:t> Logic (Cont.) - Metrics</a:t>
             </a:r>
             <a:endParaRPr lang="en-US" sz="4000" dirty="0"/>
           </a:p>
@@ -7422,7 +7581,24 @@
                 <a:ea typeface="+mn-lt"/>
                 <a:cs typeface="+mn-lt"/>
               </a:rPr>
-              <a:t>(Mean Squared Error) - measures prediction error, but it squares the errors, so it penalizes larger mistakes more heavily. That makes it useful when big forecasting misses are especially undesirable.</a:t>
+              <a:t>(Mean Squared Error) - measures prediction error, but it squares the errors, so </a:t>
+            </a:r>
+            <a:r>
+              <a:rPr lang="en-US" sz="2000" b="1">
+                <a:solidFill>
+                  <a:srgbClr val="FF0000"/>
+                </a:solidFill>
+                <a:ea typeface="+mn-lt"/>
+                <a:cs typeface="+mn-lt"/>
+              </a:rPr>
+              <a:t>it penalizes larger mistakes more heavily</a:t>
+            </a:r>
+            <a:r>
+              <a:rPr lang="en-US" sz="2000">
+                <a:ea typeface="+mn-lt"/>
+                <a:cs typeface="+mn-lt"/>
+              </a:rPr>
+              <a:t>. That makes it useful when big forecasting misses are especially undesirable.</a:t>
             </a:r>
           </a:p>
           <a:p>
@@ -7438,7 +7614,24 @@
                 <a:ea typeface="+mn-lt"/>
                 <a:cs typeface="+mn-lt"/>
               </a:rPr>
-              <a:t>(Mean Absolute Error) - measures the average absolute difference between the forecast and the true values. It is easy to interpret because it tells you the typical size of the model’s error.</a:t>
+              <a:t>(Mean Absolute Error) - measures the average absolute difference between the forecast and the true values. It is easy to interpret because </a:t>
+            </a:r>
+            <a:r>
+              <a:rPr lang="en-US" sz="2000" b="1">
+                <a:solidFill>
+                  <a:srgbClr val="FF0000"/>
+                </a:solidFill>
+                <a:ea typeface="+mn-lt"/>
+                <a:cs typeface="+mn-lt"/>
+              </a:rPr>
+              <a:t>it tells you the typical size of the model’s error</a:t>
+            </a:r>
+            <a:r>
+              <a:rPr lang="en-US" sz="2000">
+                <a:ea typeface="+mn-lt"/>
+                <a:cs typeface="+mn-lt"/>
+              </a:rPr>
+              <a:t>.</a:t>
             </a:r>
           </a:p>
           <a:p>
@@ -7456,7 +7649,7 @@
                 <a:ea typeface="+mn-lt"/>
                 <a:cs typeface="+mn-lt"/>
               </a:rPr>
-              <a:t>Why? -- Using both metrics gives a more balanced evaluation: MAE shows overall average error,</a:t>
+              <a:t>Using both metrics gives a more balanced evaluation: MAE shows overall average error,</a:t>
             </a:r>
             <a:endParaRPr lang="en-US"/>
           </a:p>
@@ -7469,63 +7662,24 @@
                 <a:ea typeface="+mn-lt"/>
                 <a:cs typeface="+mn-lt"/>
               </a:rPr>
-              <a:t>while MSE highlights whether the model sometimes makes especially large mistakes. That is</a:t>
-            </a:r>
-            <a:endParaRPr lang="en-US"/>
-          </a:p>
-          <a:p>
-            <a:pPr>
-              <a:buNone/>
-            </a:pPr>
-            <a:r>
-              <a:rPr lang="en-US" sz="2000">
-                <a:ea typeface="+mn-lt"/>
-                <a:cs typeface="+mn-lt"/>
-              </a:rPr>
-              <a:t>why they are commonly reported together in time series forecasting experiments. The paper</a:t>
-            </a:r>
-            <a:endParaRPr lang="en-US"/>
-          </a:p>
-          <a:p>
-            <a:pPr>
-              <a:buNone/>
-            </a:pPr>
-            <a:r>
-              <a:rPr lang="en-US" sz="2000">
-                <a:ea typeface="+mn-lt"/>
-                <a:cs typeface="+mn-lt"/>
-              </a:rPr>
-              <a:t>consistently uses them to compare TS-RAG against baselines and retrieval-based</a:t>
-            </a:r>
-            <a:endParaRPr lang="en-US"/>
-          </a:p>
-          <a:p>
-            <a:pPr>
-              <a:buNone/>
-            </a:pPr>
-            <a:r>
-              <a:rPr lang="en-US" sz="2000">
-                <a:ea typeface="+mn-lt"/>
-                <a:cs typeface="+mn-lt"/>
-              </a:rPr>
-              <a:t>alternatives.</a:t>
-            </a:r>
-            <a:endParaRPr lang="en-US"/>
-          </a:p>
-          <a:p>
-            <a:pPr>
-              <a:buNone/>
-            </a:pPr>
-            <a:endParaRPr lang="en-US" sz="2000" dirty="0"/>
-          </a:p>
-          <a:p>
-            <a:pPr marL="0" indent="0">
-              <a:buNone/>
-            </a:pPr>
-            <a:endParaRPr lang="en-US" sz="2000" dirty="0">
+              <a:t>while MSE highlights whether the model sometimes makes especially large mistakes. </a:t>
+            </a:r>
+            <a:endParaRPr lang="en-US">
               <a:ea typeface="+mn-lt"/>
               <a:cs typeface="+mn-lt"/>
             </a:endParaRPr>
+          </a:p>
+          <a:p>
+            <a:pPr>
+              <a:buNone/>
+            </a:pPr>
+            <a:endParaRPr lang="en-US" sz="2000" dirty="0"/>
+          </a:p>
+          <a:p>
+            <a:pPr marL="0" indent="0">
+              <a:buNone/>
+            </a:pPr>
+            <a:endParaRPr lang="en-US" sz="2000" dirty="0"/>
           </a:p>
         </p:txBody>
       </p:sp>

--- a/deliverables/code-review-presentation.pptx
+++ b/deliverables/code-review-presentation.pptx
@@ -5,11 +5,11 @@
     <p:sldMasterId id="2147483660" r:id="rId1"/>
   </p:sldMasterIdLst>
   <p:notesMasterIdLst>
-    <p:notesMasterId r:id="rId15"/>
+    <p:notesMasterId r:id="rId17"/>
   </p:notesMasterIdLst>
   <p:sldIdLst>
     <p:sldId id="259" r:id="rId2"/>
-    <p:sldId id="267" r:id="rId3"/>
+    <p:sldId id="273" r:id="rId3"/>
     <p:sldId id="266" r:id="rId4"/>
     <p:sldId id="270" r:id="rId5"/>
     <p:sldId id="265" r:id="rId6"/>
@@ -20,7 +20,9 @@
     <p:sldId id="269" r:id="rId11"/>
     <p:sldId id="263" r:id="rId12"/>
     <p:sldId id="264" r:id="rId13"/>
-    <p:sldId id="262" r:id="rId14"/>
+    <p:sldId id="272" r:id="rId14"/>
+    <p:sldId id="262" r:id="rId15"/>
+    <p:sldId id="274" r:id="rId16"/>
   </p:sldIdLst>
   <p:sldSz cx="12192000" cy="6858000"/>
   <p:notesSz cx="6858000" cy="9144000"/>
@@ -119,6 +121,11 @@
       </a:defRPr>
     </a:lvl9pPr>
   </p:defaultTextStyle>
+  <p:extLst>
+    <p:ext uri="{EFAFB233-063F-42B5-8137-9DF3F51BA10A}">
+      <p15:sldGuideLst xmlns:p15="http://schemas.microsoft.com/office/powerpoint/2012/main"/>
+    </p:ext>
+  </p:extLst>
 </p:presentation>
 </file>
 
@@ -131,7 +138,7 @@
 <file path=ppt/revisionInfo.xml><?xml version="1.0" encoding="utf-8"?>
 <p1510:revInfo xmlns:a="http://schemas.openxmlformats.org/drawingml/2006/main" xmlns:r="http://schemas.openxmlformats.org/officeDocument/2006/relationships" xmlns:p1510="http://schemas.microsoft.com/office/powerpoint/2015/10/main">
   <p1510:revLst>
-    <p1510:client id="{C854B660-205F-A51C-0EBB-658FCDB223F7}" v="141" dt="2026-04-20T18:25:55.652"/>
+    <p1510:client id="{C543CBA5-581A-5FA3-C7E0-82080635DA43}" v="1097" dt="2026-04-22T21:58:53.320"/>
   </p1510:revLst>
 </p1510:revInfo>
 </file>
@@ -2075,7 +2082,7 @@
           </a:lstStyle>
           <a:p>
             <a:fld id="{0604E06E-E5ED-48A5-9D5E-E1AAD3C6EB5E}" type="datetimeFigureOut">
-              <a:t>4/20/2026</a:t>
+              <a:t>4/22/2026</a:t>
             </a:fld>
             <a:endParaRPr lang="en-US"/>
           </a:p>
@@ -2390,11 +2397,7 @@
                 <a:ea typeface="Calibri"/>
                 <a:cs typeface="Calibri"/>
               </a:rPr>
-              <a:t>TS-RAG and TS-RAG with retrieval are the same thing. Some people just like to add the "with retrieval" part for some reason. </a:t>
-            </a:r>
-            <a:r>
-              <a:rPr lang="en-US"/>
-              <a:t>TS-RAG necessarily has retrieval.</a:t>
+              <a:t>Update this.</a:t>
             </a:r>
           </a:p>
         </p:txBody>
@@ -2415,7 +2418,7 @@
           <a:lstStyle/>
           <a:p>
             <a:fld id="{5970AA1C-A59A-4D57-AE60-B13F134F4FC4}" type="slidenum">
-              <a:t>2</a:t>
+              <a:t>4</a:t>
             </a:fld>
             <a:endParaRPr lang="en-US"/>
           </a:p>
@@ -2424,7 +2427,7 @@
     </p:spTree>
     <p:extLst>
       <p:ext uri="{BB962C8B-B14F-4D97-AF65-F5344CB8AC3E}">
-        <p14:creationId xmlns:p14="http://schemas.microsoft.com/office/powerpoint/2010/main" val="2600588497"/>
+        <p14:creationId xmlns:p14="http://schemas.microsoft.com/office/powerpoint/2010/main" val="764633639"/>
       </p:ext>
     </p:extLst>
   </p:cSld>
@@ -2478,13 +2481,10 @@
           <a:bodyPr/>
           <a:lstStyle/>
           <a:p>
-            <a:r>
-              <a:rPr lang="en-US">
-                <a:ea typeface="Calibri"/>
-                <a:cs typeface="Calibri"/>
-              </a:rPr>
-              <a:t>Update this.</a:t>
-            </a:r>
+            <a:endParaRPr lang="en-US" dirty="0">
+              <a:ea typeface="Calibri"/>
+              <a:cs typeface="Calibri"/>
+            </a:endParaRPr>
           </a:p>
         </p:txBody>
       </p:sp>
@@ -2504,7 +2504,7 @@
           <a:lstStyle/>
           <a:p>
             <a:fld id="{5970AA1C-A59A-4D57-AE60-B13F134F4FC4}" type="slidenum">
-              <a:t>4</a:t>
+              <a:t>8</a:t>
             </a:fld>
             <a:endParaRPr lang="en-US"/>
           </a:p>
@@ -2513,7 +2513,7 @@
     </p:spTree>
     <p:extLst>
       <p:ext uri="{BB962C8B-B14F-4D97-AF65-F5344CB8AC3E}">
-        <p14:creationId xmlns:p14="http://schemas.microsoft.com/office/powerpoint/2010/main" val="764633639"/>
+        <p14:creationId xmlns:p14="http://schemas.microsoft.com/office/powerpoint/2010/main" val="152222252"/>
       </p:ext>
     </p:extLst>
   </p:cSld>
@@ -2567,10 +2567,13 @@
           <a:bodyPr/>
           <a:lstStyle/>
           <a:p>
-            <a:endParaRPr lang="en-US" dirty="0">
-              <a:ea typeface="Calibri"/>
-              <a:cs typeface="Calibri"/>
-            </a:endParaRPr>
+            <a:r>
+              <a:rPr lang="en-US">
+                <a:ea typeface="Calibri"/>
+                <a:cs typeface="Calibri"/>
+              </a:rPr>
+              <a:t>Not sure to include this slide.</a:t>
+            </a:r>
           </a:p>
         </p:txBody>
       </p:sp>
@@ -2590,7 +2593,7 @@
           <a:lstStyle/>
           <a:p>
             <a:fld id="{5970AA1C-A59A-4D57-AE60-B13F134F4FC4}" type="slidenum">
-              <a:t>8</a:t>
+              <a:t>9</a:t>
             </a:fld>
             <a:endParaRPr lang="en-US"/>
           </a:p>
@@ -2599,7 +2602,7 @@
     </p:spTree>
     <p:extLst>
       <p:ext uri="{BB962C8B-B14F-4D97-AF65-F5344CB8AC3E}">
-        <p14:creationId xmlns:p14="http://schemas.microsoft.com/office/powerpoint/2010/main" val="152222252"/>
+        <p14:creationId xmlns:p14="http://schemas.microsoft.com/office/powerpoint/2010/main" val="252487568"/>
       </p:ext>
     </p:extLst>
   </p:cSld>
@@ -2654,11 +2657,8 @@
           <a:lstStyle/>
           <a:p>
             <a:r>
-              <a:rPr lang="en-US">
-                <a:ea typeface="Calibri"/>
-                <a:cs typeface="Calibri"/>
-              </a:rPr>
-              <a:t>Not sure to include this slide.</a:t>
+              <a:rPr lang="en-US"/>
+              <a:t>ETTh1  = Electricity Transformer dataset</a:t>
             </a:r>
           </a:p>
         </p:txBody>
@@ -2679,7 +2679,8 @@
           <a:lstStyle/>
           <a:p>
             <a:fld id="{5970AA1C-A59A-4D57-AE60-B13F134F4FC4}" type="slidenum">
-              <a:t>9</a:t>
+              <a:rPr lang="en-US"/>
+              <a:t>10</a:t>
             </a:fld>
             <a:endParaRPr lang="en-US"/>
           </a:p>
@@ -2688,7 +2689,7 @@
     </p:spTree>
     <p:extLst>
       <p:ext uri="{BB962C8B-B14F-4D97-AF65-F5344CB8AC3E}">
-        <p14:creationId xmlns:p14="http://schemas.microsoft.com/office/powerpoint/2010/main" val="252487568"/>
+        <p14:creationId xmlns:p14="http://schemas.microsoft.com/office/powerpoint/2010/main" val="1826018138"/>
       </p:ext>
     </p:extLst>
   </p:cSld>
@@ -2742,93 +2743,6 @@
           <a:bodyPr/>
           <a:lstStyle/>
           <a:p>
-            <a:r>
-              <a:rPr lang="en-US"/>
-              <a:t>ETTh1  = Electricity Transformer dataset</a:t>
-            </a:r>
-          </a:p>
-        </p:txBody>
-      </p:sp>
-      <p:sp>
-        <p:nvSpPr>
-          <p:cNvPr id="4" name="Slide Number Placeholder 3"/>
-          <p:cNvSpPr>
-            <a:spLocks noGrp="1"/>
-          </p:cNvSpPr>
-          <p:nvPr>
-            <p:ph type="sldNum" sz="quarter" idx="5"/>
-          </p:nvPr>
-        </p:nvSpPr>
-        <p:spPr/>
-        <p:txBody>
-          <a:bodyPr/>
-          <a:lstStyle/>
-          <a:p>
-            <a:fld id="{5970AA1C-A59A-4D57-AE60-B13F134F4FC4}" type="slidenum">
-              <a:rPr lang="en-US"/>
-              <a:t>10</a:t>
-            </a:fld>
-            <a:endParaRPr lang="en-US"/>
-          </a:p>
-        </p:txBody>
-      </p:sp>
-    </p:spTree>
-    <p:extLst>
-      <p:ext uri="{BB962C8B-B14F-4D97-AF65-F5344CB8AC3E}">
-        <p14:creationId xmlns:p14="http://schemas.microsoft.com/office/powerpoint/2010/main" val="1826018138"/>
-      </p:ext>
-    </p:extLst>
-  </p:cSld>
-  <p:clrMapOvr>
-    <a:masterClrMapping/>
-  </p:clrMapOvr>
-</p:notes>
-</file>
-
-<file path=ppt/notesSlides/notesSlide6.xml><?xml version="1.0" encoding="utf-8"?>
-<p:notes xmlns:a="http://schemas.openxmlformats.org/drawingml/2006/main" xmlns:r="http://schemas.openxmlformats.org/officeDocument/2006/relationships" xmlns:p="http://schemas.openxmlformats.org/presentationml/2006/main">
-  <p:cSld>
-    <p:spTree>
-      <p:nvGrpSpPr>
-        <p:cNvPr id="1" name=""/>
-        <p:cNvGrpSpPr/>
-        <p:nvPr/>
-      </p:nvGrpSpPr>
-      <p:grpSpPr>
-        <a:xfrm>
-          <a:off x="0" y="0"/>
-          <a:ext cx="0" cy="0"/>
-          <a:chOff x="0" y="0"/>
-          <a:chExt cx="0" cy="0"/>
-        </a:xfrm>
-      </p:grpSpPr>
-      <p:sp>
-        <p:nvSpPr>
-          <p:cNvPr id="2" name="Slide Image Placeholder 1"/>
-          <p:cNvSpPr>
-            <a:spLocks noGrp="1" noRot="1" noChangeAspect="1"/>
-          </p:cNvSpPr>
-          <p:nvPr>
-            <p:ph type="sldImg"/>
-          </p:nvPr>
-        </p:nvSpPr>
-        <p:spPr/>
-      </p:sp>
-      <p:sp>
-        <p:nvSpPr>
-          <p:cNvPr id="3" name="Notes Placeholder 2"/>
-          <p:cNvSpPr>
-            <a:spLocks noGrp="1"/>
-          </p:cNvSpPr>
-          <p:nvPr>
-            <p:ph type="body" idx="1"/>
-          </p:nvPr>
-        </p:nvSpPr>
-        <p:spPr/>
-        <p:txBody>
-          <a:bodyPr/>
-          <a:lstStyle/>
-          <a:p>
             <a:endParaRPr lang="en-US" dirty="0">
               <a:ea typeface="Calibri"/>
               <a:cs typeface="Calibri"/>
@@ -2852,7 +2766,7 @@
           <a:lstStyle/>
           <a:p>
             <a:fld id="{5970AA1C-A59A-4D57-AE60-B13F134F4FC4}" type="slidenum">
-              <a:t>13</a:t>
+              <a:t>14</a:t>
             </a:fld>
             <a:endParaRPr lang="en-US"/>
           </a:p>
@@ -3000,7 +2914,7 @@
           <a:p>
             <a:fld id="{846CE7D5-CF57-46EF-B807-FDD0502418D4}" type="datetimeFigureOut">
               <a:rPr lang="en-US" smtClean="0"/>
-              <a:t>4/20/2026</a:t>
+              <a:t>4/22/2026</a:t>
             </a:fld>
             <a:endParaRPr lang="en-US"/>
           </a:p>
@@ -3168,7 +3082,7 @@
           <a:p>
             <a:fld id="{846CE7D5-CF57-46EF-B807-FDD0502418D4}" type="datetimeFigureOut">
               <a:rPr lang="en-US" smtClean="0"/>
-              <a:t>4/20/2026</a:t>
+              <a:t>4/22/2026</a:t>
             </a:fld>
             <a:endParaRPr lang="en-US"/>
           </a:p>
@@ -3346,7 +3260,7 @@
           <a:p>
             <a:fld id="{846CE7D5-CF57-46EF-B807-FDD0502418D4}" type="datetimeFigureOut">
               <a:rPr lang="en-US" smtClean="0"/>
-              <a:t>4/20/2026</a:t>
+              <a:t>4/22/2026</a:t>
             </a:fld>
             <a:endParaRPr lang="en-US"/>
           </a:p>
@@ -3514,7 +3428,7 @@
           <a:p>
             <a:fld id="{846CE7D5-CF57-46EF-B807-FDD0502418D4}" type="datetimeFigureOut">
               <a:rPr lang="en-US" smtClean="0"/>
-              <a:t>4/20/2026</a:t>
+              <a:t>4/22/2026</a:t>
             </a:fld>
             <a:endParaRPr lang="en-US"/>
           </a:p>
@@ -3759,7 +3673,7 @@
           <a:p>
             <a:fld id="{846CE7D5-CF57-46EF-B807-FDD0502418D4}" type="datetimeFigureOut">
               <a:rPr lang="en-US" smtClean="0"/>
-              <a:t>4/20/2026</a:t>
+              <a:t>4/22/2026</a:t>
             </a:fld>
             <a:endParaRPr lang="en-US"/>
           </a:p>
@@ -3988,7 +3902,7 @@
           <a:p>
             <a:fld id="{846CE7D5-CF57-46EF-B807-FDD0502418D4}" type="datetimeFigureOut">
               <a:rPr lang="en-US" smtClean="0"/>
-              <a:t>4/20/2026</a:t>
+              <a:t>4/22/2026</a:t>
             </a:fld>
             <a:endParaRPr lang="en-US"/>
           </a:p>
@@ -4352,7 +4266,7 @@
           <a:p>
             <a:fld id="{846CE7D5-CF57-46EF-B807-FDD0502418D4}" type="datetimeFigureOut">
               <a:rPr lang="en-US" smtClean="0"/>
-              <a:t>4/20/2026</a:t>
+              <a:t>4/22/2026</a:t>
             </a:fld>
             <a:endParaRPr lang="en-US"/>
           </a:p>
@@ -4469,7 +4383,7 @@
           <a:p>
             <a:fld id="{846CE7D5-CF57-46EF-B807-FDD0502418D4}" type="datetimeFigureOut">
               <a:rPr lang="en-US" smtClean="0"/>
-              <a:t>4/20/2026</a:t>
+              <a:t>4/22/2026</a:t>
             </a:fld>
             <a:endParaRPr lang="en-US"/>
           </a:p>
@@ -4564,7 +4478,7 @@
           <a:p>
             <a:fld id="{846CE7D5-CF57-46EF-B807-FDD0502418D4}" type="datetimeFigureOut">
               <a:rPr lang="en-US" smtClean="0"/>
-              <a:t>4/20/2026</a:t>
+              <a:t>4/22/2026</a:t>
             </a:fld>
             <a:endParaRPr lang="en-US"/>
           </a:p>
@@ -4839,7 +4753,7 @@
           <a:p>
             <a:fld id="{846CE7D5-CF57-46EF-B807-FDD0502418D4}" type="datetimeFigureOut">
               <a:rPr lang="en-US" smtClean="0"/>
-              <a:t>4/20/2026</a:t>
+              <a:t>4/22/2026</a:t>
             </a:fld>
             <a:endParaRPr lang="en-US"/>
           </a:p>
@@ -5094,7 +5008,7 @@
           <a:p>
             <a:fld id="{846CE7D5-CF57-46EF-B807-FDD0502418D4}" type="datetimeFigureOut">
               <a:rPr lang="en-US" smtClean="0"/>
-              <a:t>4/20/2026</a:t>
+              <a:t>4/22/2026</a:t>
             </a:fld>
             <a:endParaRPr lang="en-US"/>
           </a:p>
@@ -5305,7 +5219,7 @@
           <a:p>
             <a:fld id="{846CE7D5-CF57-46EF-B807-FDD0502418D4}" type="datetimeFigureOut">
               <a:rPr lang="en-US" smtClean="0"/>
-              <a:t>4/20/2026</a:t>
+              <a:t>4/22/2026</a:t>
             </a:fld>
             <a:endParaRPr lang="en-US"/>
           </a:p>
@@ -5696,6 +5610,14 @@
 <file path=ppt/slides/slide1.xml><?xml version="1.0" encoding="utf-8"?>
 <p:sld xmlns:a="http://schemas.openxmlformats.org/drawingml/2006/main" xmlns:r="http://schemas.openxmlformats.org/officeDocument/2006/relationships" xmlns:p="http://schemas.openxmlformats.org/presentationml/2006/main">
   <p:cSld>
+    <p:bg>
+      <p:bgPr>
+        <a:solidFill>
+          <a:schemeClr val="bg1"/>
+        </a:solidFill>
+        <a:effectLst/>
+      </p:bgPr>
+    </p:bg>
     <p:spTree>
       <p:nvGrpSpPr>
         <p:cNvPr id="1" name=""/>
@@ -5710,6 +5632,66 @@
           <a:chExt cx="0" cy="0"/>
         </a:xfrm>
       </p:grpSpPr>
+      <p:sp useBgFill="1">
+        <p:nvSpPr>
+          <p:cNvPr id="12" name="Rectangle 11">
+            <a:extLst>
+              <a:ext uri="{FF2B5EF4-FFF2-40B4-BE49-F238E27FC236}">
+                <a16:creationId xmlns:a16="http://schemas.microsoft.com/office/drawing/2014/main" id="{9B7AD9F6-8CE7-4299-8FC6-328F4DCD3FF9}"/>
+              </a:ext>
+              <a:ext uri="{C183D7F6-B498-43B3-948B-1728B52AA6E4}">
+                <adec:decorative xmlns:adec="http://schemas.microsoft.com/office/drawing/2017/decorative" val="1"/>
+              </a:ext>
+            </a:extLst>
+          </p:cNvPr>
+          <p:cNvSpPr>
+            <a:spLocks noGrp="1" noRot="1" noChangeAspect="1" noMove="1" noResize="1" noEditPoints="1" noAdjustHandles="1" noChangeArrowheads="1" noChangeShapeType="1" noTextEdit="1"/>
+          </p:cNvSpPr>
+          <p:nvPr>
+            <p:extLst>
+              <p:ext uri="{386F3935-93C4-4BCD-93E2-E3B085C9AB24}">
+                <p16:designElem xmlns:p16="http://schemas.microsoft.com/office/powerpoint/2015/main" val="1"/>
+              </p:ext>
+            </p:extLst>
+          </p:nvPr>
+        </p:nvSpPr>
+        <p:spPr>
+          <a:xfrm>
+            <a:off x="0" y="0"/>
+            <a:ext cx="12188952" cy="6858000"/>
+          </a:xfrm>
+          <a:prstGeom prst="rect">
+            <a:avLst/>
+          </a:prstGeom>
+          <a:ln>
+            <a:noFill/>
+          </a:ln>
+        </p:spPr>
+        <p:style>
+          <a:lnRef idx="2">
+            <a:schemeClr val="accent1">
+              <a:shade val="50000"/>
+            </a:schemeClr>
+          </a:lnRef>
+          <a:fillRef idx="1">
+            <a:schemeClr val="accent1"/>
+          </a:fillRef>
+          <a:effectRef idx="0">
+            <a:schemeClr val="accent1"/>
+          </a:effectRef>
+          <a:fontRef idx="minor">
+            <a:schemeClr val="lt1"/>
+          </a:fontRef>
+        </p:style>
+        <p:txBody>
+          <a:bodyPr rtlCol="0" anchor="ctr"/>
+          <a:lstStyle/>
+          <a:p>
+            <a:pPr algn="ctr"/>
+            <a:endParaRPr lang="en-US"/>
+          </a:p>
+        </p:txBody>
+      </p:sp>
       <p:sp>
         <p:nvSpPr>
           <p:cNvPr id="2" name="Title 1">
@@ -5726,112 +5708,475 @@
             <p:ph type="title"/>
           </p:nvPr>
         </p:nvSpPr>
-        <p:spPr/>
-        <p:txBody>
-          <a:bodyPr>
-            <a:normAutofit/>
-          </a:bodyPr>
-          <a:lstStyle/>
-          <a:p>
-            <a:r>
-              <a:rPr lang="en-US" sz="4000"/>
-              <a:t>Problem/Motivation</a:t>
-            </a:r>
-          </a:p>
-        </p:txBody>
-      </p:sp>
-      <p:sp>
-        <p:nvSpPr>
-          <p:cNvPr id="3" name="Content Placeholder 2">
-            <a:extLst>
-              <a:ext uri="{FF2B5EF4-FFF2-40B4-BE49-F238E27FC236}">
-                <a16:creationId xmlns:a16="http://schemas.microsoft.com/office/drawing/2014/main" id="{4E82D256-4289-AF72-1189-694267BC7097}"/>
-              </a:ext>
-            </a:extLst>
-          </p:cNvPr>
-          <p:cNvSpPr>
-            <a:spLocks noGrp="1"/>
-          </p:cNvSpPr>
-          <p:nvPr>
-            <p:ph idx="1"/>
-          </p:nvPr>
-        </p:nvSpPr>
-        <p:spPr/>
+        <p:spPr>
+          <a:xfrm>
+            <a:off x="761549" y="1219629"/>
+            <a:ext cx="5515590" cy="2621710"/>
+          </a:xfrm>
+        </p:spPr>
         <p:txBody>
           <a:bodyPr vert="horz" lIns="91440" tIns="45720" rIns="91440" bIns="45720" rtlCol="0" anchor="t">
             <a:normAutofit/>
           </a:bodyPr>
           <a:lstStyle/>
           <a:p>
+            <a:r>
+              <a:rPr lang="en-US" sz="3000" b="1">
+                <a:highlight>
+                  <a:srgbClr val="FFFFFF"/>
+                </a:highlight>
+              </a:rPr>
+              <a:t>Code Review</a:t>
+            </a:r>
+            <a:br>
+              <a:rPr lang="en-US" sz="3000" dirty="0">
+                <a:highlight>
+                  <a:srgbClr val="FFFFFF"/>
+                </a:highlight>
+              </a:rPr>
+            </a:br>
+            <a:r>
+              <a:rPr lang="en-US" sz="3000">
+                <a:highlight>
+                  <a:srgbClr val="FFFFFF"/>
+                </a:highlight>
+              </a:rPr>
+              <a:t>TS-RAG: Retrieval-Augmented Generation based Time Series Foundation Models are Stronger Zero-Shot Forecaster</a:t>
+            </a:r>
+            <a:endParaRPr lang="en-US" sz="3000"/>
+          </a:p>
+        </p:txBody>
+      </p:sp>
+      <p:sp>
+        <p:nvSpPr>
+          <p:cNvPr id="7" name="TextBox 6">
+            <a:extLst>
+              <a:ext uri="{FF2B5EF4-FFF2-40B4-BE49-F238E27FC236}">
+                <a16:creationId xmlns:a16="http://schemas.microsoft.com/office/drawing/2014/main" id="{68B89C4A-EACE-0F1D-5DB3-3DDE38AA09D6}"/>
+              </a:ext>
+            </a:extLst>
+          </p:cNvPr>
+          <p:cNvSpPr txBox="1"/>
+          <p:nvPr/>
+        </p:nvSpPr>
+        <p:spPr>
+          <a:xfrm>
+            <a:off x="890339" y="4657473"/>
+            <a:ext cx="4968239" cy="2012796"/>
+          </a:xfrm>
+          <a:prstGeom prst="rect">
+            <a:avLst/>
+          </a:prstGeom>
+        </p:spPr>
+        <p:txBody>
+          <a:bodyPr rot="0" spcFirstLastPara="0" vertOverflow="overflow" horzOverflow="overflow" vert="horz" lIns="91440" tIns="45720" rIns="91440" bIns="45720" numCol="1" spcCol="0" rtlCol="0" fromWordArt="0" anchor="t" anchorCtr="0" forceAA="0" compatLnSpc="1">
+            <a:prstTxWarp prst="textNoShape">
+              <a:avLst/>
+            </a:prstTxWarp>
+            <a:noAutofit/>
+          </a:bodyPr>
+          <a:lstStyle/>
+          <a:p>
+            <a:r>
+              <a:rPr lang="en-US" sz="1600"/>
+              <a:t>Intelligent Systems - CSC 500</a:t>
+            </a:r>
+            <a:endParaRPr lang="en-US" sz="1600" dirty="0"/>
+          </a:p>
+          <a:p>
+            <a:r>
+              <a:rPr lang="en-US" sz="1600"/>
+              <a:t>Dr. Sahoo</a:t>
+            </a:r>
+            <a:endParaRPr lang="en-US" sz="1600" dirty="0"/>
+          </a:p>
+          <a:p>
+            <a:r>
+              <a:rPr lang="en-US" sz="1600"/>
+              <a:t>Quinnipiac University</a:t>
+            </a:r>
+            <a:endParaRPr lang="en-US" sz="1600" dirty="0"/>
+          </a:p>
+          <a:p>
+            <a:r>
+              <a:rPr lang="en-US" sz="1600"/>
+              <a:t>April 21, 2026</a:t>
+            </a:r>
+            <a:endParaRPr lang="en-US" sz="1600" dirty="0"/>
+          </a:p>
+          <a:p>
+            <a:endParaRPr lang="en-US" sz="1600" dirty="0"/>
+          </a:p>
+          <a:p>
+            <a:r>
+              <a:rPr lang="en-US" sz="1600"/>
+              <a:t>Repo: </a:t>
+            </a:r>
+            <a:r>
+              <a:rPr lang="en-US" sz="1600" i="1">
+                <a:solidFill>
+                  <a:srgbClr val="122BE3"/>
+                </a:solidFill>
+              </a:rPr>
+              <a:t>https://github.com/UConn-DSIS/TS-RAG</a:t>
+            </a:r>
+          </a:p>
+        </p:txBody>
+      </p:sp>
+      <p:sp>
+        <p:nvSpPr>
+          <p:cNvPr id="14" name="sketchy line">
+            <a:extLst>
+              <a:ext uri="{FF2B5EF4-FFF2-40B4-BE49-F238E27FC236}">
+                <a16:creationId xmlns:a16="http://schemas.microsoft.com/office/drawing/2014/main" id="{F49775AF-8896-43EE-92C6-83497D6DC56F}"/>
+              </a:ext>
+              <a:ext uri="{C183D7F6-B498-43B3-948B-1728B52AA6E4}">
+                <adec:decorative xmlns:adec="http://schemas.microsoft.com/office/drawing/2017/decorative" val="1"/>
+              </a:ext>
+            </a:extLst>
+          </p:cNvPr>
+          <p:cNvSpPr>
+            <a:spLocks noGrp="1" noRot="1" noChangeAspect="1" noMove="1" noResize="1" noEditPoints="1" noAdjustHandles="1" noChangeArrowheads="1" noChangeShapeType="1" noTextEdit="1"/>
+          </p:cNvSpPr>
+          <p:nvPr>
+            <p:extLst>
+              <p:ext uri="{386F3935-93C4-4BCD-93E2-E3B085C9AB24}">
+                <p16:designElem xmlns:p16="http://schemas.microsoft.com/office/powerpoint/2015/main" val="1"/>
+              </p:ext>
+            </p:extLst>
+          </p:nvPr>
+        </p:nvSpPr>
+        <p:spPr>
+          <a:xfrm>
+            <a:off x="890338" y="4409267"/>
+            <a:ext cx="3474720" cy="18288"/>
+          </a:xfrm>
+          <a:custGeom>
+            <a:avLst/>
+            <a:gdLst>
+              <a:gd name="csX0" fmla="*/ 0 w 3474720"/>
+              <a:gd name="csY0" fmla="*/ 0 h 18288"/>
+              <a:gd name="csX1" fmla="*/ 694944 w 3474720"/>
+              <a:gd name="csY1" fmla="*/ 0 h 18288"/>
+              <a:gd name="csX2" fmla="*/ 1355141 w 3474720"/>
+              <a:gd name="csY2" fmla="*/ 0 h 18288"/>
+              <a:gd name="csX3" fmla="*/ 2015338 w 3474720"/>
+              <a:gd name="csY3" fmla="*/ 0 h 18288"/>
+              <a:gd name="csX4" fmla="*/ 2779776 w 3474720"/>
+              <a:gd name="csY4" fmla="*/ 0 h 18288"/>
+              <a:gd name="csX5" fmla="*/ 3474720 w 3474720"/>
+              <a:gd name="csY5" fmla="*/ 0 h 18288"/>
+              <a:gd name="csX6" fmla="*/ 3474720 w 3474720"/>
+              <a:gd name="csY6" fmla="*/ 18288 h 18288"/>
+              <a:gd name="csX7" fmla="*/ 2779776 w 3474720"/>
+              <a:gd name="csY7" fmla="*/ 18288 h 18288"/>
+              <a:gd name="csX8" fmla="*/ 2189074 w 3474720"/>
+              <a:gd name="csY8" fmla="*/ 18288 h 18288"/>
+              <a:gd name="csX9" fmla="*/ 1528877 w 3474720"/>
+              <a:gd name="csY9" fmla="*/ 18288 h 18288"/>
+              <a:gd name="csX10" fmla="*/ 868680 w 3474720"/>
+              <a:gd name="csY10" fmla="*/ 18288 h 18288"/>
+              <a:gd name="csX11" fmla="*/ 0 w 3474720"/>
+              <a:gd name="csY11" fmla="*/ 18288 h 18288"/>
+              <a:gd name="csX12" fmla="*/ 0 w 3474720"/>
+              <a:gd name="csY12" fmla="*/ 0 h 18288"/>
+            </a:gdLst>
+            <a:ahLst/>
+            <a:cxnLst>
+              <a:cxn ang="0">
+                <a:pos x="csX0" y="csY0"/>
+              </a:cxn>
+              <a:cxn ang="0">
+                <a:pos x="csX1" y="csY1"/>
+              </a:cxn>
+              <a:cxn ang="0">
+                <a:pos x="csX2" y="csY2"/>
+              </a:cxn>
+              <a:cxn ang="0">
+                <a:pos x="csX3" y="csY3"/>
+              </a:cxn>
+              <a:cxn ang="0">
+                <a:pos x="csX4" y="csY4"/>
+              </a:cxn>
+              <a:cxn ang="0">
+                <a:pos x="csX5" y="csY5"/>
+              </a:cxn>
+              <a:cxn ang="0">
+                <a:pos x="csX6" y="csY6"/>
+              </a:cxn>
+              <a:cxn ang="0">
+                <a:pos x="csX7" y="csY7"/>
+              </a:cxn>
+              <a:cxn ang="0">
+                <a:pos x="csX8" y="csY8"/>
+              </a:cxn>
+              <a:cxn ang="0">
+                <a:pos x="csX9" y="csY9"/>
+              </a:cxn>
+              <a:cxn ang="0">
+                <a:pos x="csX10" y="csY10"/>
+              </a:cxn>
+              <a:cxn ang="0">
+                <a:pos x="csX11" y="csY11"/>
+              </a:cxn>
+              <a:cxn ang="0">
+                <a:pos x="csX12" y="csY12"/>
+              </a:cxn>
+            </a:cxnLst>
+            <a:rect l="l" t="t" r="r" b="b"/>
+            <a:pathLst>
+              <a:path w="3474720" h="18288" fill="none" extrusionOk="0">
+                <a:moveTo>
+                  <a:pt x="0" y="0"/>
+                </a:moveTo>
+                <a:cubicBezTo>
+                  <a:pt x="224454" y="-14544"/>
+                  <a:pt x="495407" y="26540"/>
+                  <a:pt x="694944" y="0"/>
+                </a:cubicBezTo>
+                <a:cubicBezTo>
+                  <a:pt x="894481" y="-26540"/>
+                  <a:pt x="1130063" y="24713"/>
+                  <a:pt x="1355141" y="0"/>
+                </a:cubicBezTo>
+                <a:cubicBezTo>
+                  <a:pt x="1580219" y="-24713"/>
+                  <a:pt x="1820099" y="26695"/>
+                  <a:pt x="2015338" y="0"/>
+                </a:cubicBezTo>
+                <a:cubicBezTo>
+                  <a:pt x="2210577" y="-26695"/>
+                  <a:pt x="2402045" y="165"/>
+                  <a:pt x="2779776" y="0"/>
+                </a:cubicBezTo>
+                <a:cubicBezTo>
+                  <a:pt x="3157507" y="-165"/>
+                  <a:pt x="3286859" y="-15571"/>
+                  <a:pt x="3474720" y="0"/>
+                </a:cubicBezTo>
+                <a:cubicBezTo>
+                  <a:pt x="3474286" y="7551"/>
+                  <a:pt x="3474253" y="9822"/>
+                  <a:pt x="3474720" y="18288"/>
+                </a:cubicBezTo>
+                <a:cubicBezTo>
+                  <a:pt x="3233904" y="29845"/>
+                  <a:pt x="2945134" y="-5256"/>
+                  <a:pt x="2779776" y="18288"/>
+                </a:cubicBezTo>
+                <a:cubicBezTo>
+                  <a:pt x="2614418" y="41832"/>
+                  <a:pt x="2339768" y="22709"/>
+                  <a:pt x="2189074" y="18288"/>
+                </a:cubicBezTo>
+                <a:cubicBezTo>
+                  <a:pt x="2038380" y="13867"/>
+                  <a:pt x="1817434" y="-4947"/>
+                  <a:pt x="1528877" y="18288"/>
+                </a:cubicBezTo>
+                <a:cubicBezTo>
+                  <a:pt x="1240320" y="41523"/>
+                  <a:pt x="1042447" y="37198"/>
+                  <a:pt x="868680" y="18288"/>
+                </a:cubicBezTo>
+                <a:cubicBezTo>
+                  <a:pt x="694913" y="-622"/>
+                  <a:pt x="233232" y="44909"/>
+                  <a:pt x="0" y="18288"/>
+                </a:cubicBezTo>
+                <a:cubicBezTo>
+                  <a:pt x="60" y="11696"/>
+                  <a:pt x="66" y="3758"/>
+                  <a:pt x="0" y="0"/>
+                </a:cubicBezTo>
+                <a:close/>
+              </a:path>
+              <a:path w="3474720" h="18288" stroke="0" extrusionOk="0">
+                <a:moveTo>
+                  <a:pt x="0" y="0"/>
+                </a:moveTo>
+                <a:cubicBezTo>
+                  <a:pt x="202328" y="-14716"/>
+                  <a:pt x="332722" y="-11499"/>
+                  <a:pt x="625450" y="0"/>
+                </a:cubicBezTo>
+                <a:cubicBezTo>
+                  <a:pt x="918178" y="11499"/>
+                  <a:pt x="1096688" y="5123"/>
+                  <a:pt x="1389888" y="0"/>
+                </a:cubicBezTo>
+                <a:cubicBezTo>
+                  <a:pt x="1683088" y="-5123"/>
+                  <a:pt x="1835981" y="-14038"/>
+                  <a:pt x="1980590" y="0"/>
+                </a:cubicBezTo>
+                <a:cubicBezTo>
+                  <a:pt x="2125199" y="14038"/>
+                  <a:pt x="2396099" y="-7203"/>
+                  <a:pt x="2571293" y="0"/>
+                </a:cubicBezTo>
+                <a:cubicBezTo>
+                  <a:pt x="2746487" y="7203"/>
+                  <a:pt x="3041609" y="-12036"/>
+                  <a:pt x="3474720" y="0"/>
+                </a:cubicBezTo>
+                <a:cubicBezTo>
+                  <a:pt x="3474638" y="4406"/>
+                  <a:pt x="3474631" y="9982"/>
+                  <a:pt x="3474720" y="18288"/>
+                </a:cubicBezTo>
+                <a:cubicBezTo>
+                  <a:pt x="3324873" y="21876"/>
+                  <a:pt x="3136771" y="12587"/>
+                  <a:pt x="2814523" y="18288"/>
+                </a:cubicBezTo>
+                <a:cubicBezTo>
+                  <a:pt x="2492275" y="23989"/>
+                  <a:pt x="2294402" y="47111"/>
+                  <a:pt x="2154326" y="18288"/>
+                </a:cubicBezTo>
+                <a:cubicBezTo>
+                  <a:pt x="2014250" y="-10535"/>
+                  <a:pt x="1820317" y="33903"/>
+                  <a:pt x="1494130" y="18288"/>
+                </a:cubicBezTo>
+                <a:cubicBezTo>
+                  <a:pt x="1167943" y="2673"/>
+                  <a:pt x="948432" y="14868"/>
+                  <a:pt x="729691" y="18288"/>
+                </a:cubicBezTo>
+                <a:cubicBezTo>
+                  <a:pt x="510950" y="21708"/>
+                  <a:pt x="264032" y="24354"/>
+                  <a:pt x="0" y="18288"/>
+                </a:cubicBezTo>
+                <a:cubicBezTo>
+                  <a:pt x="189" y="14288"/>
+                  <a:pt x="-703" y="3747"/>
+                  <a:pt x="0" y="0"/>
+                </a:cubicBezTo>
+                <a:close/>
+              </a:path>
+            </a:pathLst>
+          </a:custGeom>
+          <a:solidFill>
+            <a:schemeClr val="accent2"/>
+          </a:solidFill>
+          <a:ln w="44450" cap="rnd">
+            <a:solidFill>
+              <a:schemeClr val="accent2"/>
+            </a:solidFill>
+            <a:round/>
+            <a:extLst>
+              <a:ext uri="{C807C97D-BFC1-408E-A445-0C87EB9F89A2}">
+                <ask:lineSketchStyleProps xmlns:ask="http://schemas.microsoft.com/office/drawing/2018/sketchyshapes" sd="2863741219">
+                  <a:prstGeom prst="rect">
+                    <a:avLst/>
+                  </a:prstGeom>
+                  <ask:type>
+                    <ask:lineSketchFreehand/>
+                  </ask:type>
+                </ask:lineSketchStyleProps>
+              </a:ext>
+            </a:extLst>
+          </a:ln>
+        </p:spPr>
+        <p:style>
+          <a:lnRef idx="2">
+            <a:schemeClr val="accent1">
+              <a:shade val="50000"/>
+            </a:schemeClr>
+          </a:lnRef>
+          <a:fillRef idx="1">
+            <a:schemeClr val="accent1"/>
+          </a:fillRef>
+          <a:effectRef idx="0">
+            <a:schemeClr val="accent1"/>
+          </a:effectRef>
+          <a:fontRef idx="minor">
+            <a:schemeClr val="lt1"/>
+          </a:fontRef>
+        </p:style>
+        <p:txBody>
+          <a:bodyPr rtlCol="0" anchor="ctr"/>
+          <a:lstStyle/>
+          <a:p>
+            <a:pPr algn="ctr"/>
+            <a:endParaRPr lang="en-US"/>
+          </a:p>
+        </p:txBody>
+      </p:sp>
+      <p:sp>
+        <p:nvSpPr>
+          <p:cNvPr id="6" name="TextBox 5">
+            <a:extLst>
+              <a:ext uri="{FF2B5EF4-FFF2-40B4-BE49-F238E27FC236}">
+                <a16:creationId xmlns:a16="http://schemas.microsoft.com/office/drawing/2014/main" id="{C7B0DBB8-6589-23C1-15AD-BD2361A032C8}"/>
+              </a:ext>
+            </a:extLst>
+          </p:cNvPr>
+          <p:cNvSpPr txBox="1"/>
+          <p:nvPr/>
+        </p:nvSpPr>
+        <p:spPr>
+          <a:xfrm>
+            <a:off x="8266309" y="1711271"/>
+            <a:ext cx="3112395" cy="1169551"/>
+          </a:xfrm>
+          <a:prstGeom prst="rect">
+            <a:avLst/>
+          </a:prstGeom>
+          <a:noFill/>
+        </p:spPr>
+        <p:txBody>
+          <a:bodyPr rot="0" spcFirstLastPara="0" vertOverflow="overflow" horzOverflow="overflow" vert="horz" wrap="square" lIns="91440" tIns="45720" rIns="91440" bIns="45720" numCol="1" spcCol="0" rtlCol="0" fromWordArt="0" anchor="t" anchorCtr="0" forceAA="0" compatLnSpc="1">
+            <a:prstTxWarp prst="textNoShape">
+              <a:avLst/>
+            </a:prstTxWarp>
+            <a:spAutoFit/>
+          </a:bodyPr>
+          <a:lstStyle/>
+          <a:p>
             <a:pPr>
-              <a:buNone/>
+              <a:spcAft>
+                <a:spcPts val="600"/>
+              </a:spcAft>
             </a:pPr>
             <a:r>
-              <a:rPr lang="en-US" sz="2000">
+              <a:rPr lang="en-US" sz="2000" b="1"/>
+              <a:t>Group members</a:t>
+            </a:r>
+            <a:endParaRPr lang="en-US" b="1"/>
+          </a:p>
+          <a:p>
+            <a:pPr lvl="1">
+              <a:spcAft>
+                <a:spcPts val="600"/>
+              </a:spcAft>
+            </a:pPr>
+            <a:r>
+              <a:rPr lang="en-US" sz="2000"/>
+              <a:t>Zoe Rochelle</a:t>
+            </a:r>
+          </a:p>
+          <a:p>
+            <a:pPr lvl="1">
+              <a:spcAft>
+                <a:spcPts val="600"/>
+              </a:spcAft>
+            </a:pPr>
+            <a:r>
+              <a:rPr lang="en-US" sz="2000" dirty="0"/>
+              <a:t>Sarah </a:t>
+            </a:r>
+            <a:r>
+              <a:rPr lang="en-US" sz="2000" dirty="0" err="1">
                 <a:ea typeface="+mn-lt"/>
                 <a:cs typeface="+mn-lt"/>
               </a:rPr>
-              <a:t>How can we improve zero-shot time series forecasting by retrieving similar historical time</a:t>
-            </a:r>
-            <a:endParaRPr lang="en-US"/>
-          </a:p>
-          <a:p>
-            <a:pPr>
-              <a:buNone/>
-            </a:pPr>
-            <a:r>
-              <a:rPr lang="en-US" sz="2000">
-                <a:ea typeface="+mn-lt"/>
-                <a:cs typeface="+mn-lt"/>
-              </a:rPr>
-              <a:t>series patterns from a knowledge base and combining them with the current input before</a:t>
-            </a:r>
-            <a:endParaRPr lang="en-US"/>
-          </a:p>
-          <a:p>
-            <a:pPr>
-              <a:buNone/>
-            </a:pPr>
-            <a:r>
-              <a:rPr lang="en-US" sz="2000">
-                <a:ea typeface="+mn-lt"/>
-                <a:cs typeface="+mn-lt"/>
-              </a:rPr>
-              <a:t>generating the forecast?</a:t>
-            </a:r>
-            <a:endParaRPr lang="en-US"/>
-          </a:p>
-          <a:p>
-            <a:pPr>
-              <a:buNone/>
-            </a:pPr>
-            <a:endParaRPr lang="en-US"/>
-          </a:p>
-          <a:p>
-            <a:pPr>
-              <a:buNone/>
-            </a:pPr>
-            <a:r>
-              <a:rPr lang="en-US" sz="2000" dirty="0">
-                <a:ea typeface="+mn-lt"/>
-                <a:cs typeface="+mn-lt"/>
-              </a:rPr>
-              <a:t>Essentially, the goal is to improve time series forecasts by using similar past examples to</a:t>
-            </a:r>
-            <a:endParaRPr lang="en-US" dirty="0"/>
-          </a:p>
-          <a:p>
-            <a:pPr>
-              <a:buNone/>
-            </a:pPr>
-            <a:r>
-              <a:rPr lang="en-US" sz="2000">
-                <a:ea typeface="+mn-lt"/>
-                <a:cs typeface="+mn-lt"/>
-              </a:rPr>
-              <a:t>provide extra context.</a:t>
-            </a:r>
-            <a:endParaRPr lang="en-US"/>
+              <a:t>Quraishy</a:t>
+            </a:r>
+            <a:endParaRPr lang="en-US" err="1"/>
           </a:p>
         </p:txBody>
       </p:sp>
@@ -5919,7 +6264,7 @@
         <p:spPr/>
         <p:txBody>
           <a:bodyPr vert="horz" lIns="91440" tIns="45720" rIns="91440" bIns="45720" rtlCol="0" anchor="t">
-            <a:normAutofit/>
+            <a:noAutofit/>
           </a:bodyPr>
           <a:lstStyle/>
           <a:p>
@@ -5927,34 +6272,28 @@
               <a:buNone/>
             </a:pPr>
             <a:r>
+              <a:rPr lang="en-US" sz="2000" dirty="0"/>
+              <a:t>The model successfully completed a zero-shot forecasting run on </a:t>
+            </a:r>
+            <a:r>
+              <a:rPr lang="en-US" sz="2000" dirty="0">
+                <a:ea typeface="+mn-lt"/>
+                <a:cs typeface="+mn-lt"/>
+              </a:rPr>
+              <a:t>ETTh1, ETTh2, ETTm1, </a:t>
+            </a:r>
+            <a:r>
+              <a:rPr lang="en-US" sz="2000">
+                <a:ea typeface="+mn-lt"/>
+                <a:cs typeface="+mn-lt"/>
+              </a:rPr>
+              <a:t>ETTm2, and Weather</a:t>
+            </a:r>
+            <a:r>
               <a:rPr lang="en-US" sz="2000"/>
-              <a:t>The model successfully completed a zero-shot forecasting run on the ETTh1 dataset.</a:t>
-            </a:r>
-          </a:p>
-          <a:p>
-            <a:pPr marL="0" indent="0">
-              <a:buNone/>
-            </a:pPr>
-            <a:r>
-              <a:rPr lang="en-US" sz="2000" dirty="0"/>
-              <a:t>As </a:t>
-            </a:r>
-            <a:r>
-              <a:rPr lang="en-US" sz="2000" b="1" dirty="0"/>
-              <a:t>input</a:t>
-            </a:r>
-            <a:r>
-              <a:rPr lang="en-US" sz="2000" dirty="0"/>
-              <a:t>, it used 512 past time-steps, as </a:t>
-            </a:r>
-            <a:r>
-              <a:rPr lang="en-US" sz="2000" b="1" dirty="0"/>
-              <a:t>output</a:t>
-            </a:r>
-            <a:r>
-              <a:rPr lang="en-US" sz="2000"/>
-              <a:t> it predicted the next 64 future-timesteps.</a:t>
-            </a:r>
+              <a:t>.</a:t>
+            </a:r>
+            <a:endParaRPr lang="en-US"/>
           </a:p>
           <a:p>
             <a:pPr marL="0" indent="0">
@@ -5968,46 +6307,49 @@
             </a:pPr>
             <a:r>
               <a:rPr lang="en-US" sz="2000"/>
-              <a:t>The model produced:   </a:t>
-            </a:r>
-          </a:p>
-          <a:p>
-            <a:pPr>
-              <a:buFont typeface="Arial"/>
-              <a:buChar char="•"/>
-            </a:pPr>
+              <a:t>As </a:t>
+            </a:r>
+            <a:r>
+              <a:rPr lang="en-US" sz="2000" b="1"/>
+              <a:t>input</a:t>
+            </a:r>
             <a:r>
               <a:rPr lang="en-US" sz="2000"/>
-              <a:t>    Mean Absolute Error: </a:t>
-            </a:r>
-            <a:r>
-              <a:rPr lang="en-US" sz="2000" b="1">
+              <a:t>, it used </a:t>
+            </a:r>
+            <a:r>
+              <a:rPr lang="en-US" sz="2000" b="1" dirty="0">
                 <a:solidFill>
                   <a:srgbClr val="FF0000"/>
                 </a:solidFill>
               </a:rPr>
-              <a:t>0.3623</a:t>
-            </a:r>
-            <a:endParaRPr lang="en-US" sz="2000" b="1"/>
-          </a:p>
-          <a:p>
-            <a:pPr>
-              <a:buFont typeface="Arial"/>
-              <a:buChar char="•"/>
-            </a:pPr>
-            <a:r>
-              <a:rPr lang="en-US" sz="2000"/>
-              <a:t>    Mean Squared Error:  </a:t>
-            </a:r>
-            <a:r>
-              <a:rPr lang="en-US" sz="2000" b="1">
+              <a:t>512 past time-steps</a:t>
+            </a:r>
+            <a:r>
+              <a:rPr lang="en-US" sz="2000" dirty="0"/>
+              <a:t>, as </a:t>
+            </a:r>
+            <a:r>
+              <a:rPr lang="en-US" sz="2000" b="1" dirty="0"/>
+              <a:t>output</a:t>
+            </a:r>
+            <a:r>
+              <a:rPr lang="en-US" sz="2000" dirty="0"/>
+              <a:t> it predicted the next </a:t>
+            </a:r>
+            <a:r>
+              <a:rPr lang="en-US" sz="2000" b="1" dirty="0">
                 <a:solidFill>
                   <a:srgbClr val="FF0000"/>
                 </a:solidFill>
               </a:rPr>
-              <a:t>0.3556</a:t>
-            </a:r>
-            <a:endParaRPr lang="en-US" sz="2000" b="1"/>
+              <a:t>64 future-timesteps</a:t>
+            </a:r>
+            <a:r>
+              <a:rPr lang="en-US" sz="2000" dirty="0"/>
+              <a:t>.</a:t>
+            </a:r>
+            <a:endParaRPr lang="en-US"/>
           </a:p>
           <a:p>
             <a:pPr marL="0" indent="0">
@@ -6020,25 +6362,8 @@
               <a:buNone/>
             </a:pPr>
             <a:r>
-              <a:rPr lang="en-US" sz="2000" dirty="0"/>
-              <a:t>Lower MSE and MAE indicate better forecasting performance. These values show that the model produced a valid forecast with measurable prediction error.</a:t>
-            </a:r>
-          </a:p>
-          <a:p>
-            <a:pPr marL="0" indent="0">
-              <a:buNone/>
-            </a:pPr>
-            <a:r>
-              <a:rPr lang="en-US" sz="2000" b="1"/>
-              <a:t>Conclusion:</a:t>
-            </a:r>
-            <a:r>
               <a:rPr lang="en-US" sz="2000"/>
-              <a:t> We</a:t>
-            </a:r>
-            <a:r>
-              <a:rPr lang="en-US" sz="2000" dirty="0"/>
-              <a:t> can use this data to argue </a:t>
+              <a:t>We can use this output data to argue </a:t>
             </a:r>
             <a:r>
               <a:rPr lang="en-US" sz="2000" b="1" dirty="0">
@@ -6050,14 +6375,18 @@
             </a:r>
             <a:r>
               <a:rPr lang="en-US" sz="2000" dirty="0"/>
-              <a:t> by comparing it against other methods, like RAF.</a:t>
+              <a:t> by comparing it </a:t>
+            </a:r>
+            <a:r>
+              <a:rPr lang="en-US" sz="2000"/>
+              <a:t>against other TSFMs and RAF.</a:t>
             </a:r>
           </a:p>
           <a:p>
             <a:pPr>
               <a:buNone/>
             </a:pPr>
-            <a:endParaRPr lang="en-US" sz="2000"/>
+            <a:endParaRPr lang="en-US" sz="2000" dirty="0"/>
           </a:p>
         </p:txBody>
       </p:sp>
@@ -6118,12 +6447,9 @@
             </a:r>
             <a:r>
               <a:rPr lang="en-US" sz="4000"/>
-              <a:t>Results (cont.) - </a:t>
-            </a:r>
-            <a:r>
-              <a:rPr lang="en-US" sz="4000" dirty="0"/>
-              <a:t>TS-RAG vs standard TSFMs</a:t>
-            </a:r>
+              <a:t>Results (cont.) - ETTh1</a:t>
+            </a:r>
+            <a:endParaRPr lang="en-US" sz="4000" dirty="0"/>
           </a:p>
         </p:txBody>
       </p:sp>
@@ -6142,14 +6468,14 @@
           <p:nvPr>
             <p:extLst>
               <p:ext uri="{D42A27DB-BD31-4B8C-83A1-F6EECF244321}">
-                <p14:modId xmlns:p14="http://schemas.microsoft.com/office/powerpoint/2010/main" val="28164484"/>
+                <p14:modId xmlns:p14="http://schemas.microsoft.com/office/powerpoint/2010/main" val="48465303"/>
               </p:ext>
             </p:extLst>
           </p:nvPr>
         </p:nvGraphicFramePr>
         <p:xfrm>
-          <a:off x="1922305" y="1715170"/>
-          <a:ext cx="8349803" cy="4428186"/>
+          <a:off x="1728577" y="1547273"/>
+          <a:ext cx="8750175" cy="4570253"/>
         </p:xfrm>
         <a:graphic>
           <a:graphicData uri="http://schemas.openxmlformats.org/drawingml/2006/chart">
@@ -6210,7 +6536,7 @@
           <a:p>
             <a:r>
               <a:rPr lang="en-US" sz="4000"/>
-              <a:t>Run Results (cont.) - TS-RAG vs RAF</a:t>
+              <a:t>Run Results (cont.) - ETTh1</a:t>
             </a:r>
             <a:endParaRPr lang="en-US"/>
           </a:p>
@@ -6281,6 +6607,1369 @@
       </p:grpSpPr>
       <p:sp>
         <p:nvSpPr>
+          <p:cNvPr id="4" name="Rectangle 3">
+            <a:extLst>
+              <a:ext uri="{FF2B5EF4-FFF2-40B4-BE49-F238E27FC236}">
+                <a16:creationId xmlns:a16="http://schemas.microsoft.com/office/drawing/2014/main" id="{68AF5748-FED8-45BA-8631-26D1D10F3246}"/>
+              </a:ext>
+              <a:ext uri="{C183D7F6-B498-43B3-948B-1728B52AA6E4}">
+                <adec:decorative xmlns:adec="http://schemas.microsoft.com/office/drawing/2017/decorative" val="1"/>
+              </a:ext>
+            </a:extLst>
+          </p:cNvPr>
+          <p:cNvSpPr>
+            <a:spLocks noGrp="1" noRot="1" noChangeAspect="1" noMove="1" noResize="1" noEditPoints="1" noAdjustHandles="1" noChangeArrowheads="1" noChangeShapeType="1" noTextEdit="1"/>
+          </p:cNvSpPr>
+          <p:nvPr/>
+        </p:nvSpPr>
+        <p:spPr bwMode="white">
+          <a:xfrm>
+            <a:off x="0" y="0"/>
+            <a:ext cx="12192000" cy="6858000"/>
+          </a:xfrm>
+          <a:prstGeom prst="rect">
+            <a:avLst/>
+          </a:prstGeom>
+          <a:noFill/>
+          <a:ln>
+            <a:noFill/>
+          </a:ln>
+        </p:spPr>
+        <p:style>
+          <a:lnRef idx="2">
+            <a:schemeClr val="accent1">
+              <a:shade val="50000"/>
+            </a:schemeClr>
+          </a:lnRef>
+          <a:fillRef idx="1">
+            <a:schemeClr val="accent1"/>
+          </a:fillRef>
+          <a:effectRef idx="0">
+            <a:schemeClr val="accent1"/>
+          </a:effectRef>
+          <a:fontRef idx="minor">
+            <a:schemeClr val="lt1"/>
+          </a:fontRef>
+        </p:style>
+        <p:txBody>
+          <a:bodyPr rtlCol="0" anchor="ctr"/>
+          <a:lstStyle>
+            <a:defPPr>
+              <a:defRPr lang="en-US"/>
+            </a:defPPr>
+            <a:lvl1pPr marL="0" algn="l" defTabSz="914400" rtl="0" eaLnBrk="1" latinLnBrk="0" hangingPunct="1">
+              <a:defRPr sz="1800" kern="1200">
+                <a:solidFill>
+                  <a:schemeClr val="lt1"/>
+                </a:solidFill>
+                <a:latin typeface="+mn-lt"/>
+                <a:ea typeface="+mn-ea"/>
+                <a:cs typeface="+mn-cs"/>
+              </a:defRPr>
+            </a:lvl1pPr>
+            <a:lvl2pPr marL="457200" algn="l" defTabSz="914400" rtl="0" eaLnBrk="1" latinLnBrk="0" hangingPunct="1">
+              <a:defRPr sz="1800" kern="1200">
+                <a:solidFill>
+                  <a:schemeClr val="lt1"/>
+                </a:solidFill>
+                <a:latin typeface="+mn-lt"/>
+                <a:ea typeface="+mn-ea"/>
+                <a:cs typeface="+mn-cs"/>
+              </a:defRPr>
+            </a:lvl2pPr>
+            <a:lvl3pPr marL="914400" algn="l" defTabSz="914400" rtl="0" eaLnBrk="1" latinLnBrk="0" hangingPunct="1">
+              <a:defRPr sz="1800" kern="1200">
+                <a:solidFill>
+                  <a:schemeClr val="lt1"/>
+                </a:solidFill>
+                <a:latin typeface="+mn-lt"/>
+                <a:ea typeface="+mn-ea"/>
+                <a:cs typeface="+mn-cs"/>
+              </a:defRPr>
+            </a:lvl3pPr>
+            <a:lvl4pPr marL="1371600" algn="l" defTabSz="914400" rtl="0" eaLnBrk="1" latinLnBrk="0" hangingPunct="1">
+              <a:defRPr sz="1800" kern="1200">
+                <a:solidFill>
+                  <a:schemeClr val="lt1"/>
+                </a:solidFill>
+                <a:latin typeface="+mn-lt"/>
+                <a:ea typeface="+mn-ea"/>
+                <a:cs typeface="+mn-cs"/>
+              </a:defRPr>
+            </a:lvl4pPr>
+            <a:lvl5pPr marL="1828800" algn="l" defTabSz="914400" rtl="0" eaLnBrk="1" latinLnBrk="0" hangingPunct="1">
+              <a:defRPr sz="1800" kern="1200">
+                <a:solidFill>
+                  <a:schemeClr val="lt1"/>
+                </a:solidFill>
+                <a:latin typeface="+mn-lt"/>
+                <a:ea typeface="+mn-ea"/>
+                <a:cs typeface="+mn-cs"/>
+              </a:defRPr>
+            </a:lvl5pPr>
+            <a:lvl6pPr marL="2286000" algn="l" defTabSz="914400" rtl="0" eaLnBrk="1" latinLnBrk="0" hangingPunct="1">
+              <a:defRPr sz="1800" kern="1200">
+                <a:solidFill>
+                  <a:schemeClr val="lt1"/>
+                </a:solidFill>
+                <a:latin typeface="+mn-lt"/>
+                <a:ea typeface="+mn-ea"/>
+                <a:cs typeface="+mn-cs"/>
+              </a:defRPr>
+            </a:lvl6pPr>
+            <a:lvl7pPr marL="2743200" algn="l" defTabSz="914400" rtl="0" eaLnBrk="1" latinLnBrk="0" hangingPunct="1">
+              <a:defRPr sz="1800" kern="1200">
+                <a:solidFill>
+                  <a:schemeClr val="lt1"/>
+                </a:solidFill>
+                <a:latin typeface="+mn-lt"/>
+                <a:ea typeface="+mn-ea"/>
+                <a:cs typeface="+mn-cs"/>
+              </a:defRPr>
+            </a:lvl7pPr>
+            <a:lvl8pPr marL="3200400" algn="l" defTabSz="914400" rtl="0" eaLnBrk="1" latinLnBrk="0" hangingPunct="1">
+              <a:defRPr sz="1800" kern="1200">
+                <a:solidFill>
+                  <a:schemeClr val="lt1"/>
+                </a:solidFill>
+                <a:latin typeface="+mn-lt"/>
+                <a:ea typeface="+mn-ea"/>
+                <a:cs typeface="+mn-cs"/>
+              </a:defRPr>
+            </a:lvl8pPr>
+            <a:lvl9pPr marL="3657600" algn="l" defTabSz="914400" rtl="0" eaLnBrk="1" latinLnBrk="0" hangingPunct="1">
+              <a:defRPr sz="1800" kern="1200">
+                <a:solidFill>
+                  <a:schemeClr val="lt1"/>
+                </a:solidFill>
+                <a:latin typeface="+mn-lt"/>
+                <a:ea typeface="+mn-ea"/>
+                <a:cs typeface="+mn-cs"/>
+              </a:defRPr>
+            </a:lvl9pPr>
+          </a:lstStyle>
+          <a:p>
+            <a:pPr algn="ctr"/>
+            <a:endParaRPr lang="en-US"/>
+          </a:p>
+        </p:txBody>
+      </p:sp>
+      <p:sp>
+        <p:nvSpPr>
+          <p:cNvPr id="5" name="Title 1">
+            <a:extLst>
+              <a:ext uri="{FF2B5EF4-FFF2-40B4-BE49-F238E27FC236}">
+                <a16:creationId xmlns:a16="http://schemas.microsoft.com/office/drawing/2014/main" id="{F514DA61-065B-9DCC-53A2-1F5FAA7D8DF3}"/>
+              </a:ext>
+            </a:extLst>
+          </p:cNvPr>
+          <p:cNvSpPr>
+            <a:spLocks noGrp="1"/>
+          </p:cNvSpPr>
+          <p:nvPr/>
+        </p:nvSpPr>
+        <p:spPr>
+          <a:xfrm>
+            <a:off x="477981" y="1122363"/>
+            <a:ext cx="4023360" cy="3204134"/>
+          </a:xfrm>
+          <a:prstGeom prst="rect">
+            <a:avLst/>
+          </a:prstGeom>
+        </p:spPr>
+        <p:txBody>
+          <a:bodyPr vert="horz" lIns="91440" tIns="45720" rIns="91440" bIns="45720" rtlCol="0" anchor="b">
+            <a:normAutofit fontScale="97500"/>
+          </a:bodyPr>
+          <a:lstStyle>
+            <a:lvl1pPr algn="l" defTabSz="914400" rtl="0" eaLnBrk="1" latinLnBrk="0" hangingPunct="1">
+              <a:lnSpc>
+                <a:spcPct val="90000"/>
+              </a:lnSpc>
+              <a:spcBef>
+                <a:spcPct val="0"/>
+              </a:spcBef>
+              <a:buNone/>
+              <a:defRPr sz="4400" kern="1200">
+                <a:solidFill>
+                  <a:schemeClr val="tx1"/>
+                </a:solidFill>
+                <a:latin typeface="+mj-lt"/>
+                <a:ea typeface="+mj-ea"/>
+                <a:cs typeface="+mj-cs"/>
+              </a:defRPr>
+            </a:lvl1pPr>
+          </a:lstStyle>
+          <a:p>
+            <a:r>
+              <a:rPr lang="en-US" sz="4800" kern="1200">
+                <a:latin typeface="+mj-lt"/>
+                <a:ea typeface="+mj-ea"/>
+                <a:cs typeface="+mj-cs"/>
+              </a:rPr>
+              <a:t>How do </a:t>
+            </a:r>
+            <a:r>
+              <a:rPr lang="en-US" sz="4800"/>
+              <a:t>our </a:t>
+            </a:r>
+            <a:r>
+              <a:rPr lang="en-US" sz="4800" dirty="0"/>
+              <a:t>results compare</a:t>
+            </a:r>
+            <a:r>
+              <a:rPr lang="en-US" sz="4800" kern="1200" dirty="0">
+                <a:latin typeface="+mj-lt"/>
+                <a:ea typeface="+mj-ea"/>
+                <a:cs typeface="+mj-cs"/>
+              </a:rPr>
+              <a:t> to </a:t>
+            </a:r>
+            <a:r>
+              <a:rPr lang="en-US" sz="4800" dirty="0"/>
+              <a:t>the </a:t>
+            </a:r>
+            <a:r>
+              <a:rPr lang="en-US" sz="4800"/>
+              <a:t>paper's results?</a:t>
+            </a:r>
+            <a:endParaRPr lang="en-US" sz="4800" kern="1200">
+              <a:latin typeface="+mj-lt"/>
+              <a:ea typeface="+mj-ea"/>
+              <a:cs typeface="+mj-cs"/>
+            </a:endParaRPr>
+          </a:p>
+        </p:txBody>
+      </p:sp>
+      <p:sp>
+        <p:nvSpPr>
+          <p:cNvPr id="6" name="Rectangle 5">
+            <a:extLst>
+              <a:ext uri="{FF2B5EF4-FFF2-40B4-BE49-F238E27FC236}">
+                <a16:creationId xmlns:a16="http://schemas.microsoft.com/office/drawing/2014/main" id="{AF2F604E-43BE-4DC3-B983-E071523364F8}"/>
+              </a:ext>
+              <a:ext uri="{C183D7F6-B498-43B3-948B-1728B52AA6E4}">
+                <adec:decorative xmlns:adec="http://schemas.microsoft.com/office/drawing/2017/decorative" val="1"/>
+              </a:ext>
+            </a:extLst>
+          </p:cNvPr>
+          <p:cNvSpPr>
+            <a:spLocks noGrp="1" noRot="1" noChangeAspect="1" noMove="1" noResize="1" noEditPoints="1" noAdjustHandles="1" noChangeArrowheads="1" noChangeShapeType="1" noTextEdit="1"/>
+          </p:cNvSpPr>
+          <p:nvPr/>
+        </p:nvSpPr>
+        <p:spPr>
+          <a:xfrm rot="5400000">
+            <a:off x="759921" y="346791"/>
+            <a:ext cx="146304" cy="704088"/>
+          </a:xfrm>
+          <a:prstGeom prst="rect">
+            <a:avLst/>
+          </a:prstGeom>
+          <a:solidFill>
+            <a:schemeClr val="accent2"/>
+          </a:solidFill>
+          <a:ln>
+            <a:noFill/>
+          </a:ln>
+        </p:spPr>
+        <p:style>
+          <a:lnRef idx="2">
+            <a:schemeClr val="accent1">
+              <a:shade val="50000"/>
+            </a:schemeClr>
+          </a:lnRef>
+          <a:fillRef idx="1">
+            <a:schemeClr val="accent1"/>
+          </a:fillRef>
+          <a:effectRef idx="0">
+            <a:schemeClr val="accent1"/>
+          </a:effectRef>
+          <a:fontRef idx="minor">
+            <a:schemeClr val="lt1"/>
+          </a:fontRef>
+        </p:style>
+        <p:txBody>
+          <a:bodyPr rtlCol="0" anchor="ctr"/>
+          <a:lstStyle>
+            <a:defPPr>
+              <a:defRPr lang="en-US"/>
+            </a:defPPr>
+            <a:lvl1pPr marL="0" algn="l" defTabSz="914400" rtl="0" eaLnBrk="1" latinLnBrk="0" hangingPunct="1">
+              <a:defRPr sz="1800" kern="1200">
+                <a:solidFill>
+                  <a:schemeClr val="lt1"/>
+                </a:solidFill>
+                <a:latin typeface="+mn-lt"/>
+                <a:ea typeface="+mn-ea"/>
+                <a:cs typeface="+mn-cs"/>
+              </a:defRPr>
+            </a:lvl1pPr>
+            <a:lvl2pPr marL="457200" algn="l" defTabSz="914400" rtl="0" eaLnBrk="1" latinLnBrk="0" hangingPunct="1">
+              <a:defRPr sz="1800" kern="1200">
+                <a:solidFill>
+                  <a:schemeClr val="lt1"/>
+                </a:solidFill>
+                <a:latin typeface="+mn-lt"/>
+                <a:ea typeface="+mn-ea"/>
+                <a:cs typeface="+mn-cs"/>
+              </a:defRPr>
+            </a:lvl2pPr>
+            <a:lvl3pPr marL="914400" algn="l" defTabSz="914400" rtl="0" eaLnBrk="1" latinLnBrk="0" hangingPunct="1">
+              <a:defRPr sz="1800" kern="1200">
+                <a:solidFill>
+                  <a:schemeClr val="lt1"/>
+                </a:solidFill>
+                <a:latin typeface="+mn-lt"/>
+                <a:ea typeface="+mn-ea"/>
+                <a:cs typeface="+mn-cs"/>
+              </a:defRPr>
+            </a:lvl3pPr>
+            <a:lvl4pPr marL="1371600" algn="l" defTabSz="914400" rtl="0" eaLnBrk="1" latinLnBrk="0" hangingPunct="1">
+              <a:defRPr sz="1800" kern="1200">
+                <a:solidFill>
+                  <a:schemeClr val="lt1"/>
+                </a:solidFill>
+                <a:latin typeface="+mn-lt"/>
+                <a:ea typeface="+mn-ea"/>
+                <a:cs typeface="+mn-cs"/>
+              </a:defRPr>
+            </a:lvl4pPr>
+            <a:lvl5pPr marL="1828800" algn="l" defTabSz="914400" rtl="0" eaLnBrk="1" latinLnBrk="0" hangingPunct="1">
+              <a:defRPr sz="1800" kern="1200">
+                <a:solidFill>
+                  <a:schemeClr val="lt1"/>
+                </a:solidFill>
+                <a:latin typeface="+mn-lt"/>
+                <a:ea typeface="+mn-ea"/>
+                <a:cs typeface="+mn-cs"/>
+              </a:defRPr>
+            </a:lvl5pPr>
+            <a:lvl6pPr marL="2286000" algn="l" defTabSz="914400" rtl="0" eaLnBrk="1" latinLnBrk="0" hangingPunct="1">
+              <a:defRPr sz="1800" kern="1200">
+                <a:solidFill>
+                  <a:schemeClr val="lt1"/>
+                </a:solidFill>
+                <a:latin typeface="+mn-lt"/>
+                <a:ea typeface="+mn-ea"/>
+                <a:cs typeface="+mn-cs"/>
+              </a:defRPr>
+            </a:lvl6pPr>
+            <a:lvl7pPr marL="2743200" algn="l" defTabSz="914400" rtl="0" eaLnBrk="1" latinLnBrk="0" hangingPunct="1">
+              <a:defRPr sz="1800" kern="1200">
+                <a:solidFill>
+                  <a:schemeClr val="lt1"/>
+                </a:solidFill>
+                <a:latin typeface="+mn-lt"/>
+                <a:ea typeface="+mn-ea"/>
+                <a:cs typeface="+mn-cs"/>
+              </a:defRPr>
+            </a:lvl7pPr>
+            <a:lvl8pPr marL="3200400" algn="l" defTabSz="914400" rtl="0" eaLnBrk="1" latinLnBrk="0" hangingPunct="1">
+              <a:defRPr sz="1800" kern="1200">
+                <a:solidFill>
+                  <a:schemeClr val="lt1"/>
+                </a:solidFill>
+                <a:latin typeface="+mn-lt"/>
+                <a:ea typeface="+mn-ea"/>
+                <a:cs typeface="+mn-cs"/>
+              </a:defRPr>
+            </a:lvl8pPr>
+            <a:lvl9pPr marL="3657600" algn="l" defTabSz="914400" rtl="0" eaLnBrk="1" latinLnBrk="0" hangingPunct="1">
+              <a:defRPr sz="1800" kern="1200">
+                <a:solidFill>
+                  <a:schemeClr val="lt1"/>
+                </a:solidFill>
+                <a:latin typeface="+mn-lt"/>
+                <a:ea typeface="+mn-ea"/>
+                <a:cs typeface="+mn-cs"/>
+              </a:defRPr>
+            </a:lvl9pPr>
+          </a:lstStyle>
+          <a:p>
+            <a:pPr marL="0" marR="0" lvl="0" indent="0" algn="ctr" defTabSz="914400" rtl="0" eaLnBrk="1" fontAlgn="auto" latinLnBrk="0" hangingPunct="1">
+              <a:lnSpc>
+                <a:spcPct val="100000"/>
+              </a:lnSpc>
+              <a:spcBef>
+                <a:spcPts val="0"/>
+              </a:spcBef>
+              <a:spcAft>
+                <a:spcPts val="0"/>
+              </a:spcAft>
+              <a:buClrTx/>
+              <a:buSzTx/>
+              <a:buFontTx/>
+              <a:buNone/>
+              <a:tabLst/>
+              <a:defRPr/>
+            </a:pPr>
+            <a:endParaRPr kumimoji="0" lang="en-US" sz="1800" b="0" i="0" u="none" strike="noStrike" kern="1200" cap="none" spc="0" normalizeH="0" baseline="0" noProof="0">
+              <a:ln>
+                <a:noFill/>
+              </a:ln>
+              <a:solidFill>
+                <a:prstClr val="white"/>
+              </a:solidFill>
+              <a:effectLst/>
+              <a:uLnTx/>
+              <a:uFillTx/>
+              <a:latin typeface="Calibri" panose="020F0502020204030204"/>
+              <a:ea typeface="+mn-ea"/>
+              <a:cs typeface="+mn-cs"/>
+            </a:endParaRPr>
+          </a:p>
+        </p:txBody>
+      </p:sp>
+      <p:sp>
+        <p:nvSpPr>
+          <p:cNvPr id="7" name="Rectangle 6">
+            <a:extLst>
+              <a:ext uri="{FF2B5EF4-FFF2-40B4-BE49-F238E27FC236}">
+                <a16:creationId xmlns:a16="http://schemas.microsoft.com/office/drawing/2014/main" id="{08C9B587-E65E-4B52-B37C-ABEBB6E87928}"/>
+              </a:ext>
+              <a:ext uri="{C183D7F6-B498-43B3-948B-1728B52AA6E4}">
+                <adec:decorative xmlns:adec="http://schemas.microsoft.com/office/drawing/2017/decorative" val="1"/>
+              </a:ext>
+            </a:extLst>
+          </p:cNvPr>
+          <p:cNvSpPr>
+            <a:spLocks noGrp="1" noRot="1" noChangeAspect="1" noMove="1" noResize="1" noEditPoints="1" noAdjustHandles="1" noChangeArrowheads="1" noChangeShapeType="1" noTextEdit="1"/>
+          </p:cNvSpPr>
+          <p:nvPr/>
+        </p:nvSpPr>
+        <p:spPr>
+          <a:xfrm>
+            <a:off x="481029" y="4546920"/>
+            <a:ext cx="4023360" cy="18288"/>
+          </a:xfrm>
+          <a:prstGeom prst="rect">
+            <a:avLst/>
+          </a:prstGeom>
+          <a:solidFill>
+            <a:srgbClr val="D5D5D5"/>
+          </a:solidFill>
+          <a:ln w="3175">
+            <a:noFill/>
+          </a:ln>
+          <a:effectLst/>
+        </p:spPr>
+        <p:style>
+          <a:lnRef idx="2">
+            <a:schemeClr val="accent1">
+              <a:shade val="50000"/>
+            </a:schemeClr>
+          </a:lnRef>
+          <a:fillRef idx="1">
+            <a:schemeClr val="accent1"/>
+          </a:fillRef>
+          <a:effectRef idx="0">
+            <a:schemeClr val="accent1"/>
+          </a:effectRef>
+          <a:fontRef idx="minor">
+            <a:schemeClr val="lt1"/>
+          </a:fontRef>
+        </p:style>
+        <p:txBody>
+          <a:bodyPr rtlCol="0" anchor="ctr"/>
+          <a:lstStyle>
+            <a:defPPr>
+              <a:defRPr lang="en-US"/>
+            </a:defPPr>
+            <a:lvl1pPr marL="0" algn="l" defTabSz="914400" rtl="0" eaLnBrk="1" latinLnBrk="0" hangingPunct="1">
+              <a:defRPr sz="1800" kern="1200">
+                <a:solidFill>
+                  <a:schemeClr val="lt1"/>
+                </a:solidFill>
+                <a:latin typeface="+mn-lt"/>
+                <a:ea typeface="+mn-ea"/>
+                <a:cs typeface="+mn-cs"/>
+              </a:defRPr>
+            </a:lvl1pPr>
+            <a:lvl2pPr marL="457200" algn="l" defTabSz="914400" rtl="0" eaLnBrk="1" latinLnBrk="0" hangingPunct="1">
+              <a:defRPr sz="1800" kern="1200">
+                <a:solidFill>
+                  <a:schemeClr val="lt1"/>
+                </a:solidFill>
+                <a:latin typeface="+mn-lt"/>
+                <a:ea typeface="+mn-ea"/>
+                <a:cs typeface="+mn-cs"/>
+              </a:defRPr>
+            </a:lvl2pPr>
+            <a:lvl3pPr marL="914400" algn="l" defTabSz="914400" rtl="0" eaLnBrk="1" latinLnBrk="0" hangingPunct="1">
+              <a:defRPr sz="1800" kern="1200">
+                <a:solidFill>
+                  <a:schemeClr val="lt1"/>
+                </a:solidFill>
+                <a:latin typeface="+mn-lt"/>
+                <a:ea typeface="+mn-ea"/>
+                <a:cs typeface="+mn-cs"/>
+              </a:defRPr>
+            </a:lvl3pPr>
+            <a:lvl4pPr marL="1371600" algn="l" defTabSz="914400" rtl="0" eaLnBrk="1" latinLnBrk="0" hangingPunct="1">
+              <a:defRPr sz="1800" kern="1200">
+                <a:solidFill>
+                  <a:schemeClr val="lt1"/>
+                </a:solidFill>
+                <a:latin typeface="+mn-lt"/>
+                <a:ea typeface="+mn-ea"/>
+                <a:cs typeface="+mn-cs"/>
+              </a:defRPr>
+            </a:lvl4pPr>
+            <a:lvl5pPr marL="1828800" algn="l" defTabSz="914400" rtl="0" eaLnBrk="1" latinLnBrk="0" hangingPunct="1">
+              <a:defRPr sz="1800" kern="1200">
+                <a:solidFill>
+                  <a:schemeClr val="lt1"/>
+                </a:solidFill>
+                <a:latin typeface="+mn-lt"/>
+                <a:ea typeface="+mn-ea"/>
+                <a:cs typeface="+mn-cs"/>
+              </a:defRPr>
+            </a:lvl5pPr>
+            <a:lvl6pPr marL="2286000" algn="l" defTabSz="914400" rtl="0" eaLnBrk="1" latinLnBrk="0" hangingPunct="1">
+              <a:defRPr sz="1800" kern="1200">
+                <a:solidFill>
+                  <a:schemeClr val="lt1"/>
+                </a:solidFill>
+                <a:latin typeface="+mn-lt"/>
+                <a:ea typeface="+mn-ea"/>
+                <a:cs typeface="+mn-cs"/>
+              </a:defRPr>
+            </a:lvl6pPr>
+            <a:lvl7pPr marL="2743200" algn="l" defTabSz="914400" rtl="0" eaLnBrk="1" latinLnBrk="0" hangingPunct="1">
+              <a:defRPr sz="1800" kern="1200">
+                <a:solidFill>
+                  <a:schemeClr val="lt1"/>
+                </a:solidFill>
+                <a:latin typeface="+mn-lt"/>
+                <a:ea typeface="+mn-ea"/>
+                <a:cs typeface="+mn-cs"/>
+              </a:defRPr>
+            </a:lvl7pPr>
+            <a:lvl8pPr marL="3200400" algn="l" defTabSz="914400" rtl="0" eaLnBrk="1" latinLnBrk="0" hangingPunct="1">
+              <a:defRPr sz="1800" kern="1200">
+                <a:solidFill>
+                  <a:schemeClr val="lt1"/>
+                </a:solidFill>
+                <a:latin typeface="+mn-lt"/>
+                <a:ea typeface="+mn-ea"/>
+                <a:cs typeface="+mn-cs"/>
+              </a:defRPr>
+            </a:lvl8pPr>
+            <a:lvl9pPr marL="3657600" algn="l" defTabSz="914400" rtl="0" eaLnBrk="1" latinLnBrk="0" hangingPunct="1">
+              <a:defRPr sz="1800" kern="1200">
+                <a:solidFill>
+                  <a:schemeClr val="lt1"/>
+                </a:solidFill>
+                <a:latin typeface="+mn-lt"/>
+                <a:ea typeface="+mn-ea"/>
+                <a:cs typeface="+mn-cs"/>
+              </a:defRPr>
+            </a:lvl9pPr>
+          </a:lstStyle>
+          <a:p>
+            <a:pPr algn="ctr"/>
+            <a:endParaRPr lang="en-US">
+              <a:solidFill>
+                <a:prstClr val="white"/>
+              </a:solidFill>
+              <a:latin typeface="Calibri" panose="020F0502020204030204"/>
+            </a:endParaRPr>
+          </a:p>
+        </p:txBody>
+      </p:sp>
+      <p:sp>
+        <p:nvSpPr>
+          <p:cNvPr id="9" name="TextBox 4">
+            <a:extLst>
+              <a:ext uri="{FF2B5EF4-FFF2-40B4-BE49-F238E27FC236}">
+                <a16:creationId xmlns:a16="http://schemas.microsoft.com/office/drawing/2014/main" id="{6374C14C-9580-482F-69B0-10F3332B3F96}"/>
+              </a:ext>
+            </a:extLst>
+          </p:cNvPr>
+          <p:cNvSpPr txBox="1"/>
+          <p:nvPr/>
+        </p:nvSpPr>
+        <p:spPr>
+          <a:xfrm>
+            <a:off x="5391301" y="6041338"/>
+            <a:ext cx="5850610" cy="923330"/>
+          </a:xfrm>
+          <a:prstGeom prst="rect">
+            <a:avLst/>
+          </a:prstGeom>
+          <a:noFill/>
+        </p:spPr>
+        <p:txBody>
+          <a:bodyPr rot="0" spcFirstLastPara="0" vert="horz" wrap="square" lIns="91440" tIns="45720" rIns="91440" bIns="45720" numCol="1" spcCol="0" rtlCol="0" fromWordArt="0" anchor="t" anchorCtr="0" forceAA="0" compatLnSpc="1">
+            <a:prstTxWarp prst="textNoShape">
+              <a:avLst/>
+            </a:prstTxWarp>
+            <a:spAutoFit/>
+          </a:bodyPr>
+          <a:lstStyle>
+            <a:defPPr>
+              <a:defRPr lang="en-US"/>
+            </a:defPPr>
+            <a:lvl1pPr marL="0" algn="l" defTabSz="914400" rtl="0" eaLnBrk="1" latinLnBrk="0" hangingPunct="1">
+              <a:defRPr sz="1800" kern="1200">
+                <a:solidFill>
+                  <a:schemeClr val="tx1"/>
+                </a:solidFill>
+                <a:latin typeface="+mn-lt"/>
+                <a:ea typeface="+mn-ea"/>
+                <a:cs typeface="+mn-cs"/>
+              </a:defRPr>
+            </a:lvl1pPr>
+            <a:lvl2pPr marL="457200" algn="l" defTabSz="914400" rtl="0" eaLnBrk="1" latinLnBrk="0" hangingPunct="1">
+              <a:defRPr sz="1800" kern="1200">
+                <a:solidFill>
+                  <a:schemeClr val="tx1"/>
+                </a:solidFill>
+                <a:latin typeface="+mn-lt"/>
+                <a:ea typeface="+mn-ea"/>
+                <a:cs typeface="+mn-cs"/>
+              </a:defRPr>
+            </a:lvl2pPr>
+            <a:lvl3pPr marL="914400" algn="l" defTabSz="914400" rtl="0" eaLnBrk="1" latinLnBrk="0" hangingPunct="1">
+              <a:defRPr sz="1800" kern="1200">
+                <a:solidFill>
+                  <a:schemeClr val="tx1"/>
+                </a:solidFill>
+                <a:latin typeface="+mn-lt"/>
+                <a:ea typeface="+mn-ea"/>
+                <a:cs typeface="+mn-cs"/>
+              </a:defRPr>
+            </a:lvl3pPr>
+            <a:lvl4pPr marL="1371600" algn="l" defTabSz="914400" rtl="0" eaLnBrk="1" latinLnBrk="0" hangingPunct="1">
+              <a:defRPr sz="1800" kern="1200">
+                <a:solidFill>
+                  <a:schemeClr val="tx1"/>
+                </a:solidFill>
+                <a:latin typeface="+mn-lt"/>
+                <a:ea typeface="+mn-ea"/>
+                <a:cs typeface="+mn-cs"/>
+              </a:defRPr>
+            </a:lvl4pPr>
+            <a:lvl5pPr marL="1828800" algn="l" defTabSz="914400" rtl="0" eaLnBrk="1" latinLnBrk="0" hangingPunct="1">
+              <a:defRPr sz="1800" kern="1200">
+                <a:solidFill>
+                  <a:schemeClr val="tx1"/>
+                </a:solidFill>
+                <a:latin typeface="+mn-lt"/>
+                <a:ea typeface="+mn-ea"/>
+                <a:cs typeface="+mn-cs"/>
+              </a:defRPr>
+            </a:lvl5pPr>
+            <a:lvl6pPr marL="2286000" algn="l" defTabSz="914400" rtl="0" eaLnBrk="1" latinLnBrk="0" hangingPunct="1">
+              <a:defRPr sz="1800" kern="1200">
+                <a:solidFill>
+                  <a:schemeClr val="tx1"/>
+                </a:solidFill>
+                <a:latin typeface="+mn-lt"/>
+                <a:ea typeface="+mn-ea"/>
+                <a:cs typeface="+mn-cs"/>
+              </a:defRPr>
+            </a:lvl6pPr>
+            <a:lvl7pPr marL="2743200" algn="l" defTabSz="914400" rtl="0" eaLnBrk="1" latinLnBrk="0" hangingPunct="1">
+              <a:defRPr sz="1800" kern="1200">
+                <a:solidFill>
+                  <a:schemeClr val="tx1"/>
+                </a:solidFill>
+                <a:latin typeface="+mn-lt"/>
+                <a:ea typeface="+mn-ea"/>
+                <a:cs typeface="+mn-cs"/>
+              </a:defRPr>
+            </a:lvl7pPr>
+            <a:lvl8pPr marL="3200400" algn="l" defTabSz="914400" rtl="0" eaLnBrk="1" latinLnBrk="0" hangingPunct="1">
+              <a:defRPr sz="1800" kern="1200">
+                <a:solidFill>
+                  <a:schemeClr val="tx1"/>
+                </a:solidFill>
+                <a:latin typeface="+mn-lt"/>
+                <a:ea typeface="+mn-ea"/>
+                <a:cs typeface="+mn-cs"/>
+              </a:defRPr>
+            </a:lvl8pPr>
+            <a:lvl9pPr marL="3657600" algn="l" defTabSz="914400" rtl="0" eaLnBrk="1" latinLnBrk="0" hangingPunct="1">
+              <a:defRPr sz="1800" kern="1200">
+                <a:solidFill>
+                  <a:schemeClr val="tx1"/>
+                </a:solidFill>
+                <a:latin typeface="+mn-lt"/>
+                <a:ea typeface="+mn-ea"/>
+                <a:cs typeface="+mn-cs"/>
+              </a:defRPr>
+            </a:lvl9pPr>
+          </a:lstStyle>
+          <a:p>
+            <a:r>
+              <a:rPr lang="en-US" b="1"/>
+              <a:t>Note: </a:t>
+            </a:r>
+            <a:r>
+              <a:rPr lang="en-US"/>
+              <a:t>Values are in MSE. Average excludes Electricity and Exchange datasets.</a:t>
+            </a:r>
+          </a:p>
+          <a:p>
+            <a:pPr algn="ctr"/>
+            <a:endParaRPr lang="en-US" b="1" dirty="0"/>
+          </a:p>
+        </p:txBody>
+      </p:sp>
+      <p:graphicFrame>
+        <p:nvGraphicFramePr>
+          <p:cNvPr id="13" name="Table 12">
+            <a:extLst>
+              <a:ext uri="{FF2B5EF4-FFF2-40B4-BE49-F238E27FC236}">
+                <a16:creationId xmlns:a16="http://schemas.microsoft.com/office/drawing/2014/main" id="{1F620C71-DBB3-CA78-EAB9-29C5D7053510}"/>
+              </a:ext>
+            </a:extLst>
+          </p:cNvPr>
+          <p:cNvGraphicFramePr>
+            <a:graphicFrameLocks noGrp="1"/>
+          </p:cNvGraphicFramePr>
+          <p:nvPr>
+            <p:extLst>
+              <p:ext uri="{D42A27DB-BD31-4B8C-83A1-F6EECF244321}">
+                <p14:modId xmlns:p14="http://schemas.microsoft.com/office/powerpoint/2010/main" val="1367503295"/>
+              </p:ext>
+            </p:extLst>
+          </p:nvPr>
+        </p:nvGraphicFramePr>
+        <p:xfrm>
+          <a:off x="5243593" y="619932"/>
+          <a:ext cx="6146160" cy="5242590"/>
+        </p:xfrm>
+        <a:graphic>
+          <a:graphicData uri="http://schemas.openxmlformats.org/drawingml/2006/table">
+            <a:tbl>
+              <a:tblPr firstRow="1" bandRow="1">
+                <a:tableStyleId>{5C22544A-7EE6-4342-B048-85BDC9FD1C3A}</a:tableStyleId>
+              </a:tblPr>
+              <a:tblGrid>
+                <a:gridCol w="2074189">
+                  <a:extLst>
+                    <a:ext uri="{9D8B030D-6E8A-4147-A177-3AD203B41FA5}">
+                      <a16:colId xmlns:a16="http://schemas.microsoft.com/office/drawing/2014/main" val="4049919890"/>
+                    </a:ext>
+                  </a:extLst>
+                </a:gridCol>
+                <a:gridCol w="1996832">
+                  <a:extLst>
+                    <a:ext uri="{9D8B030D-6E8A-4147-A177-3AD203B41FA5}">
+                      <a16:colId xmlns:a16="http://schemas.microsoft.com/office/drawing/2014/main" val="1964046921"/>
+                    </a:ext>
+                  </a:extLst>
+                </a:gridCol>
+                <a:gridCol w="2075139">
+                  <a:extLst>
+                    <a:ext uri="{9D8B030D-6E8A-4147-A177-3AD203B41FA5}">
+                      <a16:colId xmlns:a16="http://schemas.microsoft.com/office/drawing/2014/main" val="3905797602"/>
+                    </a:ext>
+                  </a:extLst>
+                </a:gridCol>
+              </a:tblGrid>
+              <a:tr h="582510">
+                <a:tc>
+                  <a:txBody>
+                    <a:bodyPr/>
+                    <a:lstStyle/>
+                    <a:p>
+                      <a:pPr lvl="0" algn="ctr">
+                        <a:buNone/>
+                      </a:pPr>
+                      <a:r>
+                        <a:rPr lang="en-US" sz="2000" b="1" i="0" u="none" strike="noStrike" noProof="0">
+                          <a:latin typeface="Aptos"/>
+                        </a:rPr>
+                        <a:t>Dataset</a:t>
+                      </a:r>
+                      <a:endParaRPr lang="en-US" sz="2000" b="1"/>
+                    </a:p>
+                  </a:txBody>
+                  <a:tcPr anchor="ctr"/>
+                </a:tc>
+                <a:tc>
+                  <a:txBody>
+                    <a:bodyPr/>
+                    <a:lstStyle/>
+                    <a:p>
+                      <a:pPr algn="ctr"/>
+                      <a:r>
+                        <a:rPr lang="en-US" sz="2000" b="1"/>
+                        <a:t>Our results</a:t>
+                      </a:r>
+                    </a:p>
+                  </a:txBody>
+                  <a:tcPr anchor="ctr"/>
+                </a:tc>
+                <a:tc>
+                  <a:txBody>
+                    <a:bodyPr/>
+                    <a:lstStyle/>
+                    <a:p>
+                      <a:pPr algn="ctr"/>
+                      <a:r>
+                        <a:rPr lang="en-US" sz="2000" b="1"/>
+                        <a:t>Paper's results</a:t>
+                      </a:r>
+                    </a:p>
+                  </a:txBody>
+                  <a:tcPr anchor="ctr"/>
+                </a:tc>
+                <a:extLst>
+                  <a:ext uri="{0D108BD9-81ED-4DB2-BD59-A6C34878D82A}">
+                    <a16:rowId xmlns:a16="http://schemas.microsoft.com/office/drawing/2014/main" val="3425150632"/>
+                  </a:ext>
+                </a:extLst>
+              </a:tr>
+              <a:tr h="582510">
+                <a:tc>
+                  <a:txBody>
+                    <a:bodyPr/>
+                    <a:lstStyle/>
+                    <a:p>
+                      <a:pPr lvl="0">
+                        <a:buNone/>
+                      </a:pPr>
+                      <a:r>
+                        <a:rPr lang="en-US" sz="2000" b="0" i="0" u="none" strike="noStrike" noProof="0">
+                          <a:latin typeface="Aptos"/>
+                        </a:rPr>
+                        <a:t>ETTh1</a:t>
+                      </a:r>
+                      <a:endParaRPr lang="en-US" sz="2000" dirty="0"/>
+                    </a:p>
+                  </a:txBody>
+                  <a:tcPr anchor="ctr"/>
+                </a:tc>
+                <a:tc>
+                  <a:txBody>
+                    <a:bodyPr/>
+                    <a:lstStyle/>
+                    <a:p>
+                      <a:pPr lvl="0">
+                        <a:buNone/>
+                      </a:pPr>
+                      <a:r>
+                        <a:rPr lang="en-US" sz="2000" b="0" i="0" u="none" strike="noStrike" noProof="0">
+                          <a:latin typeface="Aptos"/>
+                        </a:rPr>
+                        <a:t>0.3556</a:t>
+                      </a:r>
+                      <a:endParaRPr lang="en-US" sz="2000" dirty="0"/>
+                    </a:p>
+                  </a:txBody>
+                  <a:tcPr anchor="ctr"/>
+                </a:tc>
+                <a:tc>
+                  <a:txBody>
+                    <a:bodyPr/>
+                    <a:lstStyle/>
+                    <a:p>
+                      <a:pPr lvl="0">
+                        <a:buNone/>
+                      </a:pPr>
+                      <a:r>
+                        <a:rPr lang="en-US" sz="2000" b="0" i="0" u="none" strike="noStrike" noProof="0">
+                          <a:latin typeface="Aptos"/>
+                        </a:rPr>
+                        <a:t>0.3557</a:t>
+                      </a:r>
+                      <a:endParaRPr lang="en-US" sz="2000" dirty="0"/>
+                    </a:p>
+                  </a:txBody>
+                  <a:tcPr anchor="ctr"/>
+                </a:tc>
+                <a:extLst>
+                  <a:ext uri="{0D108BD9-81ED-4DB2-BD59-A6C34878D82A}">
+                    <a16:rowId xmlns:a16="http://schemas.microsoft.com/office/drawing/2014/main" val="4049841907"/>
+                  </a:ext>
+                </a:extLst>
+              </a:tr>
+              <a:tr h="582510">
+                <a:tc>
+                  <a:txBody>
+                    <a:bodyPr/>
+                    <a:lstStyle/>
+                    <a:p>
+                      <a:pPr lvl="0">
+                        <a:buNone/>
+                      </a:pPr>
+                      <a:r>
+                        <a:rPr lang="en-US" sz="2000" b="0" i="0" u="none" strike="noStrike" noProof="0">
+                          <a:latin typeface="Aptos"/>
+                        </a:rPr>
+                        <a:t>ETTh2</a:t>
+                      </a:r>
+                      <a:endParaRPr lang="en-US" sz="2000" dirty="0"/>
+                    </a:p>
+                  </a:txBody>
+                  <a:tcPr anchor="ctr"/>
+                </a:tc>
+                <a:tc>
+                  <a:txBody>
+                    <a:bodyPr/>
+                    <a:lstStyle/>
+                    <a:p>
+                      <a:pPr lvl="0">
+                        <a:buNone/>
+                      </a:pPr>
+                      <a:r>
+                        <a:rPr lang="en-US" sz="2000" b="0" i="0" u="none" strike="noStrike" noProof="0">
+                          <a:latin typeface="Aptos"/>
+                        </a:rPr>
+                        <a:t>0.2451</a:t>
+                      </a:r>
+                      <a:endParaRPr lang="en-US" sz="2000" dirty="0"/>
+                    </a:p>
+                  </a:txBody>
+                  <a:tcPr anchor="ctr"/>
+                </a:tc>
+                <a:tc>
+                  <a:txBody>
+                    <a:bodyPr/>
+                    <a:lstStyle/>
+                    <a:p>
+                      <a:pPr lvl="0">
+                        <a:buNone/>
+                      </a:pPr>
+                      <a:r>
+                        <a:rPr lang="en-US" sz="2000" b="0" i="0" u="none" strike="noStrike" noProof="0">
+                          <a:latin typeface="Aptos"/>
+                        </a:rPr>
+                        <a:t>0.2451</a:t>
+                      </a:r>
+                      <a:endParaRPr lang="en-US" sz="2000" dirty="0"/>
+                    </a:p>
+                  </a:txBody>
+                  <a:tcPr anchor="ctr"/>
+                </a:tc>
+                <a:extLst>
+                  <a:ext uri="{0D108BD9-81ED-4DB2-BD59-A6C34878D82A}">
+                    <a16:rowId xmlns:a16="http://schemas.microsoft.com/office/drawing/2014/main" val="2077583032"/>
+                  </a:ext>
+                </a:extLst>
+              </a:tr>
+              <a:tr h="582510">
+                <a:tc>
+                  <a:txBody>
+                    <a:bodyPr/>
+                    <a:lstStyle/>
+                    <a:p>
+                      <a:pPr lvl="0">
+                        <a:buNone/>
+                      </a:pPr>
+                      <a:r>
+                        <a:rPr lang="en-US" sz="2000" b="0" i="0" u="none" strike="noStrike" noProof="0">
+                          <a:latin typeface="Aptos"/>
+                        </a:rPr>
+                        <a:t>ETTm1</a:t>
+                      </a:r>
+                      <a:endParaRPr lang="en-US" sz="2000" dirty="0"/>
+                    </a:p>
+                  </a:txBody>
+                  <a:tcPr anchor="ctr"/>
+                </a:tc>
+                <a:tc>
+                  <a:txBody>
+                    <a:bodyPr/>
+                    <a:lstStyle/>
+                    <a:p>
+                      <a:pPr lvl="0">
+                        <a:buNone/>
+                      </a:pPr>
+                      <a:r>
+                        <a:rPr lang="en-US" sz="2000" b="0" i="0" u="none" strike="noStrike" noProof="0">
+                          <a:latin typeface="Aptos"/>
+                        </a:rPr>
+                        <a:t>0.2904</a:t>
+                      </a:r>
+                      <a:endParaRPr lang="en-US" sz="2000" dirty="0"/>
+                    </a:p>
+                  </a:txBody>
+                  <a:tcPr anchor="ctr"/>
+                </a:tc>
+                <a:tc>
+                  <a:txBody>
+                    <a:bodyPr/>
+                    <a:lstStyle/>
+                    <a:p>
+                      <a:pPr lvl="0">
+                        <a:buNone/>
+                      </a:pPr>
+                      <a:r>
+                        <a:rPr lang="en-US" sz="2000" b="0" i="0" u="none" strike="noStrike" noProof="0">
+                          <a:latin typeface="Aptos"/>
+                        </a:rPr>
+                        <a:t>0.2906</a:t>
+                      </a:r>
+                      <a:endParaRPr lang="en-US" sz="2000" dirty="0"/>
+                    </a:p>
+                  </a:txBody>
+                  <a:tcPr anchor="ctr"/>
+                </a:tc>
+                <a:extLst>
+                  <a:ext uri="{0D108BD9-81ED-4DB2-BD59-A6C34878D82A}">
+                    <a16:rowId xmlns:a16="http://schemas.microsoft.com/office/drawing/2014/main" val="2550771528"/>
+                  </a:ext>
+                </a:extLst>
+              </a:tr>
+              <a:tr h="582510">
+                <a:tc>
+                  <a:txBody>
+                    <a:bodyPr/>
+                    <a:lstStyle/>
+                    <a:p>
+                      <a:pPr lvl="0">
+                        <a:buNone/>
+                      </a:pPr>
+                      <a:r>
+                        <a:rPr lang="en-US" sz="2000" b="0" i="0" u="none" strike="noStrike" noProof="0">
+                          <a:latin typeface="Aptos"/>
+                        </a:rPr>
+                        <a:t>ETTm2</a:t>
+                      </a:r>
+                      <a:endParaRPr lang="en-US" sz="2000" dirty="0"/>
+                    </a:p>
+                  </a:txBody>
+                  <a:tcPr anchor="ctr"/>
+                </a:tc>
+                <a:tc>
+                  <a:txBody>
+                    <a:bodyPr/>
+                    <a:lstStyle/>
+                    <a:p>
+                      <a:pPr lvl="0">
+                        <a:buNone/>
+                      </a:pPr>
+                      <a:r>
+                        <a:rPr lang="en-US" sz="2000" b="0" i="0" u="none" strike="noStrike" noProof="0">
+                          <a:latin typeface="Aptos"/>
+                        </a:rPr>
+                        <a:t>0.1465</a:t>
+                      </a:r>
+                      <a:endParaRPr lang="en-US" sz="2000" dirty="0"/>
+                    </a:p>
+                  </a:txBody>
+                  <a:tcPr anchor="ctr"/>
+                </a:tc>
+                <a:tc>
+                  <a:txBody>
+                    <a:bodyPr/>
+                    <a:lstStyle/>
+                    <a:p>
+                      <a:pPr lvl="0">
+                        <a:buNone/>
+                      </a:pPr>
+                      <a:r>
+                        <a:rPr lang="en-US" sz="2000" b="0" i="0" u="none" strike="noStrike" noProof="0">
+                          <a:latin typeface="Aptos"/>
+                        </a:rPr>
+                        <a:t>0.1466</a:t>
+                      </a:r>
+                      <a:endParaRPr lang="en-US" sz="2000" dirty="0"/>
+                    </a:p>
+                  </a:txBody>
+                  <a:tcPr anchor="ctr"/>
+                </a:tc>
+                <a:extLst>
+                  <a:ext uri="{0D108BD9-81ED-4DB2-BD59-A6C34878D82A}">
+                    <a16:rowId xmlns:a16="http://schemas.microsoft.com/office/drawing/2014/main" val="1625431150"/>
+                  </a:ext>
+                </a:extLst>
+              </a:tr>
+              <a:tr h="582510">
+                <a:tc>
+                  <a:txBody>
+                    <a:bodyPr/>
+                    <a:lstStyle/>
+                    <a:p>
+                      <a:pPr lvl="0">
+                        <a:buNone/>
+                      </a:pPr>
+                      <a:r>
+                        <a:rPr lang="en-US" sz="2000" b="0" i="0" u="none" strike="noStrike" noProof="0">
+                          <a:latin typeface="Aptos"/>
+                        </a:rPr>
+                        <a:t>Weather</a:t>
+                      </a:r>
+                      <a:endParaRPr lang="en-US" sz="2000" dirty="0"/>
+                    </a:p>
+                  </a:txBody>
+                  <a:tcPr anchor="ctr"/>
+                </a:tc>
+                <a:tc>
+                  <a:txBody>
+                    <a:bodyPr/>
+                    <a:lstStyle/>
+                    <a:p>
+                      <a:pPr lvl="0">
+                        <a:buNone/>
+                      </a:pPr>
+                      <a:r>
+                        <a:rPr lang="en-US" sz="2000" b="0" i="0" u="none" strike="noStrike" noProof="0">
+                          <a:latin typeface="Aptos"/>
+                        </a:rPr>
+                        <a:t>0.1453</a:t>
+                      </a:r>
+                      <a:endParaRPr lang="en-US" sz="2000" dirty="0"/>
+                    </a:p>
+                  </a:txBody>
+                  <a:tcPr anchor="ctr"/>
+                </a:tc>
+                <a:tc>
+                  <a:txBody>
+                    <a:bodyPr/>
+                    <a:lstStyle/>
+                    <a:p>
+                      <a:pPr lvl="0">
+                        <a:buNone/>
+                      </a:pPr>
+                      <a:r>
+                        <a:rPr lang="en-US" sz="2000" b="0" i="0" u="none" strike="noStrike" noProof="0">
+                          <a:latin typeface="Aptos"/>
+                        </a:rPr>
+                        <a:t>0.1454</a:t>
+                      </a:r>
+                      <a:endParaRPr lang="en-US" sz="2000" dirty="0"/>
+                    </a:p>
+                  </a:txBody>
+                  <a:tcPr anchor="ctr"/>
+                </a:tc>
+                <a:extLst>
+                  <a:ext uri="{0D108BD9-81ED-4DB2-BD59-A6C34878D82A}">
+                    <a16:rowId xmlns:a16="http://schemas.microsoft.com/office/drawing/2014/main" val="3347409809"/>
+                  </a:ext>
+                </a:extLst>
+              </a:tr>
+              <a:tr h="582510">
+                <a:tc>
+                  <a:txBody>
+                    <a:bodyPr/>
+                    <a:lstStyle/>
+                    <a:p>
+                      <a:pPr lvl="0">
+                        <a:buNone/>
+                      </a:pPr>
+                      <a:r>
+                        <a:rPr lang="en-US" sz="2000" b="0" i="0" u="none" strike="noStrike" noProof="0">
+                          <a:latin typeface="Aptos"/>
+                        </a:rPr>
+                        <a:t>Electricity</a:t>
+                      </a:r>
+                    </a:p>
+                  </a:txBody>
+                  <a:tcPr anchor="ctr"/>
+                </a:tc>
+                <a:tc>
+                  <a:txBody>
+                    <a:bodyPr/>
+                    <a:lstStyle/>
+                    <a:p>
+                      <a:pPr lvl="0">
+                        <a:buNone/>
+                      </a:pPr>
+                      <a:r>
+                        <a:rPr lang="en-US" sz="2000" b="0" i="0" u="none" strike="noStrike" noProof="0">
+                          <a:latin typeface="Aptos"/>
+                        </a:rPr>
+                        <a:t>N/A</a:t>
+                      </a:r>
+                      <a:endParaRPr lang="en-US" sz="2000" dirty="0"/>
+                    </a:p>
+                  </a:txBody>
+                  <a:tcPr anchor="ctr"/>
+                </a:tc>
+                <a:tc>
+                  <a:txBody>
+                    <a:bodyPr/>
+                    <a:lstStyle/>
+                    <a:p>
+                      <a:pPr lvl="0">
+                        <a:buNone/>
+                      </a:pPr>
+                      <a:r>
+                        <a:rPr lang="en-US" sz="2000" b="0" i="0" u="none" strike="noStrike" noProof="0">
+                          <a:latin typeface="Aptos"/>
+                        </a:rPr>
+                        <a:t>0.1120</a:t>
+                      </a:r>
+                      <a:endParaRPr lang="en-US" sz="2000" dirty="0"/>
+                    </a:p>
+                  </a:txBody>
+                  <a:tcPr anchor="ctr"/>
+                </a:tc>
+                <a:extLst>
+                  <a:ext uri="{0D108BD9-81ED-4DB2-BD59-A6C34878D82A}">
+                    <a16:rowId xmlns:a16="http://schemas.microsoft.com/office/drawing/2014/main" val="2427461000"/>
+                  </a:ext>
+                </a:extLst>
+              </a:tr>
+              <a:tr h="582510">
+                <a:tc>
+                  <a:txBody>
+                    <a:bodyPr/>
+                    <a:lstStyle/>
+                    <a:p>
+                      <a:pPr lvl="0">
+                        <a:buNone/>
+                      </a:pPr>
+                      <a:r>
+                        <a:rPr lang="en-US" sz="2000" b="0" i="0" u="none" strike="noStrike" noProof="0">
+                          <a:latin typeface="Aptos"/>
+                        </a:rPr>
+                        <a:t>Exchange</a:t>
+                      </a:r>
+                      <a:endParaRPr lang="en-US" sz="2000" dirty="0"/>
+                    </a:p>
+                  </a:txBody>
+                  <a:tcPr anchor="ctr"/>
+                </a:tc>
+                <a:tc>
+                  <a:txBody>
+                    <a:bodyPr/>
+                    <a:lstStyle/>
+                    <a:p>
+                      <a:pPr lvl="0">
+                        <a:buNone/>
+                      </a:pPr>
+                      <a:r>
+                        <a:rPr lang="en-US" sz="2000" b="0" i="0" u="none" strike="noStrike" noProof="0">
+                          <a:latin typeface="Aptos"/>
+                        </a:rPr>
+                        <a:t>N/A</a:t>
+                      </a:r>
+                      <a:endParaRPr lang="en-US" sz="2000" dirty="0"/>
+                    </a:p>
+                  </a:txBody>
+                  <a:tcPr anchor="ctr"/>
+                </a:tc>
+                <a:tc>
+                  <a:txBody>
+                    <a:bodyPr/>
+                    <a:lstStyle/>
+                    <a:p>
+                      <a:pPr lvl="0">
+                        <a:buNone/>
+                      </a:pPr>
+                      <a:r>
+                        <a:rPr lang="en-US" sz="2000" b="0" i="0" u="none" strike="noStrike" noProof="0">
+                          <a:latin typeface="Aptos"/>
+                        </a:rPr>
+                        <a:t>0.0627</a:t>
+                      </a:r>
+                      <a:endParaRPr lang="en-US" sz="2000" dirty="0"/>
+                    </a:p>
+                  </a:txBody>
+                  <a:tcPr anchor="ctr"/>
+                </a:tc>
+                <a:extLst>
+                  <a:ext uri="{0D108BD9-81ED-4DB2-BD59-A6C34878D82A}">
+                    <a16:rowId xmlns:a16="http://schemas.microsoft.com/office/drawing/2014/main" val="1307688977"/>
+                  </a:ext>
+                </a:extLst>
+              </a:tr>
+              <a:tr h="582510">
+                <a:tc>
+                  <a:txBody>
+                    <a:bodyPr/>
+                    <a:lstStyle/>
+                    <a:p>
+                      <a:pPr lvl="0">
+                        <a:buNone/>
+                      </a:pPr>
+                      <a:r>
+                        <a:rPr lang="en-US" sz="2000" b="0" i="0" u="none" strike="noStrike" noProof="0">
+                          <a:latin typeface="Aptos"/>
+                        </a:rPr>
+                        <a:t>Average</a:t>
+                      </a:r>
+                      <a:endParaRPr lang="en-US" sz="1800" b="0" i="0" u="none" strike="noStrike" noProof="0">
+                        <a:latin typeface="Aptos"/>
+                      </a:endParaRPr>
+                    </a:p>
+                  </a:txBody>
+                  <a:tcPr anchor="ctr"/>
+                </a:tc>
+                <a:tc>
+                  <a:txBody>
+                    <a:bodyPr/>
+                    <a:lstStyle/>
+                    <a:p>
+                      <a:pPr lvl="0">
+                        <a:buNone/>
+                      </a:pPr>
+                      <a:r>
+                        <a:rPr lang="en-US" sz="2000" b="0" i="0" u="none" strike="noStrike" noProof="0"/>
+                        <a:t>0.23658</a:t>
+                      </a:r>
+                      <a:endParaRPr lang="en-US"/>
+                    </a:p>
+                  </a:txBody>
+                  <a:tcPr anchor="ctr"/>
+                </a:tc>
+                <a:tc>
+                  <a:txBody>
+                    <a:bodyPr/>
+                    <a:lstStyle/>
+                    <a:p>
+                      <a:pPr lvl="0">
+                        <a:buNone/>
+                      </a:pPr>
+                      <a:r>
+                        <a:rPr lang="en-US" sz="2000" b="0" i="0" u="none" strike="noStrike" noProof="0"/>
+                        <a:t>0.23668</a:t>
+                      </a:r>
+                      <a:endParaRPr lang="en-US"/>
+                    </a:p>
+                  </a:txBody>
+                  <a:tcPr anchor="ctr"/>
+                </a:tc>
+                <a:extLst>
+                  <a:ext uri="{0D108BD9-81ED-4DB2-BD59-A6C34878D82A}">
+                    <a16:rowId xmlns:a16="http://schemas.microsoft.com/office/drawing/2014/main" val="4212774633"/>
+                  </a:ext>
+                </a:extLst>
+              </a:tr>
+            </a:tbl>
+          </a:graphicData>
+        </a:graphic>
+      </p:graphicFrame>
+    </p:spTree>
+    <p:extLst>
+      <p:ext uri="{BB962C8B-B14F-4D97-AF65-F5344CB8AC3E}">
+        <p14:creationId xmlns:p14="http://schemas.microsoft.com/office/powerpoint/2010/main" val="2815617005"/>
+      </p:ext>
+    </p:extLst>
+  </p:cSld>
+  <p:clrMapOvr>
+    <a:masterClrMapping/>
+  </p:clrMapOvr>
+</p:sld>
+</file>
+
+<file path=ppt/slides/slide14.xml><?xml version="1.0" encoding="utf-8"?>
+<p:sld xmlns:a="http://schemas.openxmlformats.org/drawingml/2006/main" xmlns:r="http://schemas.openxmlformats.org/officeDocument/2006/relationships" xmlns:p="http://schemas.openxmlformats.org/presentationml/2006/main">
+  <p:cSld>
+    <p:spTree>
+      <p:nvGrpSpPr>
+        <p:cNvPr id="1" name=""/>
+        <p:cNvGrpSpPr/>
+        <p:nvPr/>
+      </p:nvGrpSpPr>
+      <p:grpSpPr>
+        <a:xfrm>
+          <a:off x="0" y="0"/>
+          <a:ext cx="0" cy="0"/>
+          <a:chOff x="0" y="0"/>
+          <a:chExt cx="0" cy="0"/>
+        </a:xfrm>
+      </p:grpSpPr>
+      <p:sp>
+        <p:nvSpPr>
           <p:cNvPr id="2" name="Title 1">
             <a:extLst>
               <a:ext uri="{FF2B5EF4-FFF2-40B4-BE49-F238E27FC236}">
@@ -6303,15 +7992,26 @@
           <a:lstStyle/>
           <a:p>
             <a:r>
-              <a:rPr lang="en-US" sz="4000"/>
-              <a:t>Critical Insite/</a:t>
+              <a:rPr lang="en-US" sz="4000" dirty="0"/>
+              <a:t>Critical </a:t>
             </a:r>
             <a:r>
               <a:rPr lang="en-US" sz="4000">
                 <a:ea typeface="+mj-lt"/>
                 <a:cs typeface="+mj-lt"/>
               </a:rPr>
-              <a:t>Limitations?</a:t>
+              <a:t>Insight</a:t>
+            </a:r>
+            <a:r>
+              <a:rPr lang="en-US" sz="4000"/>
+              <a:t> and </a:t>
+            </a:r>
+            <a:r>
+              <a:rPr lang="en-US" sz="4000">
+                <a:ea typeface="+mj-lt"/>
+                <a:cs typeface="+mj-lt"/>
+              </a:rPr>
+              <a:t>Limitations</a:t>
             </a:r>
             <a:endParaRPr lang="en-US" sz="4000"/>
           </a:p>
@@ -6340,64 +8040,113 @@
           </a:bodyPr>
           <a:lstStyle/>
           <a:p>
-            <a:r>
-              <a:rPr lang="en-US" sz="1700">
+            <a:pPr marL="457200" indent="-457200">
+              <a:buAutoNum type="arabicPeriod"/>
+            </a:pPr>
+            <a:r>
+              <a:rPr lang="en-US" sz="2000">
                 <a:ea typeface="+mn-lt"/>
                 <a:cs typeface="+mn-lt"/>
               </a:rPr>
-              <a:t>TS-RAG improves forecasting without changing the backbone itself very much. Keep in mind, that  the backbone is the base model, in this case, Chronos-Bolt.</a:t>
-            </a:r>
-            <a:endParaRPr lang="en-US" dirty="0"/>
-          </a:p>
-          <a:p>
-            <a:r>
-              <a:rPr lang="en-US" sz="1700" dirty="0">
+              <a:t>TS-RAG improves forecasting without changing the backbone model.</a:t>
+            </a:r>
+            <a:endParaRPr lang="en-US" sz="2000" dirty="0">
+              <a:ea typeface="+mn-lt"/>
+              <a:cs typeface="+mn-lt"/>
+            </a:endParaRPr>
+          </a:p>
+          <a:p>
+            <a:pPr marL="457200" lvl="1" indent="0">
+              <a:buNone/>
+            </a:pPr>
+            <a:endParaRPr lang="en-US" sz="2000" dirty="0">
+              <a:ea typeface="+mn-lt"/>
+              <a:cs typeface="+mn-lt"/>
+            </a:endParaRPr>
+          </a:p>
+          <a:p>
+            <a:pPr marL="457200" lvl="1" indent="0">
+              <a:buNone/>
+            </a:pPr>
+            <a:r>
+              <a:rPr lang="en-US" sz="2000" dirty="0">
                 <a:ea typeface="+mn-lt"/>
                 <a:cs typeface="+mn-lt"/>
               </a:rPr>
-              <a:t>Instead of attempting to improves performance by training a bigger model, it does so by retrieving useful historical patterns and mixing them into the prediction process.</a:t>
-            </a:r>
-            <a:endParaRPr lang="en-US" dirty="0"/>
-          </a:p>
-          <a:p>
-            <a:r>
-              <a:rPr lang="en-US" sz="1700">
+              <a:t>Instead of attempting to improves performance by training a bigger model, it does so by retrieving context - historical patterns. Then mixing those patterns into the prediction process.</a:t>
+            </a:r>
+            <a:endParaRPr lang="en-US" sz="2000"/>
+          </a:p>
+          <a:p>
+            <a:pPr marL="457200" lvl="1" indent="0">
+              <a:buNone/>
+            </a:pPr>
+            <a:endParaRPr lang="en-US" sz="2000" dirty="0">
+              <a:ea typeface="+mn-lt"/>
+              <a:cs typeface="+mn-lt"/>
+            </a:endParaRPr>
+          </a:p>
+          <a:p>
+            <a:pPr marL="457200" lvl="1" indent="0">
+              <a:buNone/>
+            </a:pPr>
+            <a:r>
+              <a:rPr lang="en-US" sz="2000">
                 <a:ea typeface="+mn-lt"/>
                 <a:cs typeface="+mn-lt"/>
               </a:rPr>
-              <a:t>That stood out to us because it suggests that, in zero-shot forecasting, having the right context may be just as important as having a stronger model.</a:t>
-            </a:r>
-            <a:endParaRPr lang="en-US"/>
-          </a:p>
-          <a:p>
-            <a:endParaRPr lang="en-US" sz="1700" dirty="0"/>
-          </a:p>
-          <a:p>
-            <a:endParaRPr lang="en-US" sz="1700" dirty="0"/>
-          </a:p>
-          <a:p>
-            <a:endParaRPr lang="en-US" sz="1700" dirty="0"/>
+              <a:t>This stood out to us because it suggests that,</a:t>
+            </a:r>
+            <a:r>
+              <a:rPr lang="en-US" sz="2000" b="1">
+                <a:solidFill>
+                  <a:srgbClr val="FF0000"/>
+                </a:solidFill>
+                <a:ea typeface="+mn-lt"/>
+                <a:cs typeface="+mn-lt"/>
+              </a:rPr>
+              <a:t> in zero-shot forecasting, having the right context may be just as important as having a stronger model</a:t>
+            </a:r>
+            <a:r>
+              <a:rPr lang="en-US" sz="2000">
+                <a:ea typeface="+mn-lt"/>
+                <a:cs typeface="+mn-lt"/>
+              </a:rPr>
+              <a:t>.</a:t>
+            </a:r>
+            <a:endParaRPr lang="en-US" sz="2000"/>
           </a:p>
           <a:p>
             <a:pPr marL="0" indent="0">
               <a:buNone/>
             </a:pPr>
-            <a:r>
-              <a:rPr lang="en-US" sz="1700" b="1">
-                <a:solidFill>
-                  <a:srgbClr val="FF0000"/>
-                </a:solidFill>
-              </a:rPr>
-              <a:t>Think about adding limitations?</a:t>
-            </a:r>
-            <a:endParaRPr lang="en-US" sz="1700" dirty="0">
-              <a:solidFill>
-                <a:srgbClr val="000000"/>
-              </a:solidFill>
-            </a:endParaRPr>
-          </a:p>
-          <a:p>
-            <a:endParaRPr lang="en-US" dirty="0"/>
+            <a:endParaRPr lang="en-US" sz="2000" dirty="0"/>
+          </a:p>
+          <a:p>
+            <a:pPr marL="0" indent="0">
+              <a:buNone/>
+            </a:pPr>
+            <a:r>
+              <a:rPr lang="en-US" sz="2000" dirty="0"/>
+              <a:t>2. I would have liked to have been able to run Exchange and Electricity datasets to have </a:t>
+            </a:r>
+            <a:r>
+              <a:rPr lang="en-US" sz="2000"/>
+              <a:t>a</a:t>
+            </a:r>
+            <a:br>
+              <a:rPr lang="en-US" sz="2000" dirty="0"/>
+            </a:br>
+            <a:r>
+              <a:rPr lang="en-US" sz="2000"/>
+              <a:t>     complete comparison.</a:t>
+            </a:r>
+          </a:p>
+          <a:p>
+            <a:pPr>
+              <a:buAutoNum type="arabicPeriod"/>
+            </a:pPr>
+            <a:endParaRPr lang="en-US" sz="2000" dirty="0"/>
           </a:p>
         </p:txBody>
       </p:sp>
@@ -6405,6 +8154,371 @@
     <p:extLst>
       <p:ext uri="{BB962C8B-B14F-4D97-AF65-F5344CB8AC3E}">
         <p14:creationId xmlns:p14="http://schemas.microsoft.com/office/powerpoint/2010/main" val="416096641"/>
+      </p:ext>
+    </p:extLst>
+  </p:cSld>
+  <p:clrMapOvr>
+    <a:masterClrMapping/>
+  </p:clrMapOvr>
+</p:sld>
+</file>
+
+<file path=ppt/slides/slide15.xml><?xml version="1.0" encoding="utf-8"?>
+<p:sld xmlns:a="http://schemas.openxmlformats.org/drawingml/2006/main" xmlns:r="http://schemas.openxmlformats.org/officeDocument/2006/relationships" xmlns:p="http://schemas.openxmlformats.org/presentationml/2006/main">
+  <p:cSld>
+    <p:spTree>
+      <p:nvGrpSpPr>
+        <p:cNvPr id="1" name=""/>
+        <p:cNvGrpSpPr/>
+        <p:nvPr/>
+      </p:nvGrpSpPr>
+      <p:grpSpPr>
+        <a:xfrm>
+          <a:off x="0" y="0"/>
+          <a:ext cx="0" cy="0"/>
+          <a:chOff x="0" y="0"/>
+          <a:chExt cx="0" cy="0"/>
+        </a:xfrm>
+      </p:grpSpPr>
+      <p:sp>
+        <p:nvSpPr>
+          <p:cNvPr id="2" name="Title 1">
+            <a:extLst>
+              <a:ext uri="{FF2B5EF4-FFF2-40B4-BE49-F238E27FC236}">
+                <a16:creationId xmlns:a16="http://schemas.microsoft.com/office/drawing/2014/main" id="{63F61B2F-17AA-8174-A7A2-F627D73CA622}"/>
+              </a:ext>
+            </a:extLst>
+          </p:cNvPr>
+          <p:cNvSpPr>
+            <a:spLocks noGrp="1"/>
+          </p:cNvSpPr>
+          <p:nvPr>
+            <p:ph type="title"/>
+          </p:nvPr>
+        </p:nvSpPr>
+        <p:spPr/>
+        <p:txBody>
+          <a:bodyPr/>
+          <a:lstStyle/>
+          <a:p>
+            <a:r>
+              <a:rPr lang="en-US"/>
+              <a:t>End</a:t>
+            </a:r>
+          </a:p>
+        </p:txBody>
+      </p:sp>
+      <p:sp>
+        <p:nvSpPr>
+          <p:cNvPr id="4" name="TextBox 3">
+            <a:extLst>
+              <a:ext uri="{FF2B5EF4-FFF2-40B4-BE49-F238E27FC236}">
+                <a16:creationId xmlns:a16="http://schemas.microsoft.com/office/drawing/2014/main" id="{5635F305-F562-E610-AB47-B4DB0CEE9E58}"/>
+              </a:ext>
+            </a:extLst>
+          </p:cNvPr>
+          <p:cNvSpPr txBox="1"/>
+          <p:nvPr/>
+        </p:nvSpPr>
+        <p:spPr>
+          <a:xfrm>
+            <a:off x="837127" y="4824211"/>
+            <a:ext cx="6096000" cy="1846659"/>
+          </a:xfrm>
+          <a:prstGeom prst="rect">
+            <a:avLst/>
+          </a:prstGeom>
+          <a:noFill/>
+        </p:spPr>
+        <p:txBody>
+          <a:bodyPr rot="0" spcFirstLastPara="0" vertOverflow="overflow" horzOverflow="overflow" vert="horz" wrap="square" lIns="91440" tIns="45720" rIns="91440" bIns="45720" numCol="1" spcCol="0" rtlCol="0" fromWordArt="0" anchor="t" anchorCtr="0" forceAA="0" compatLnSpc="1">
+            <a:prstTxWarp prst="textNoShape">
+              <a:avLst/>
+            </a:prstTxWarp>
+            <a:spAutoFit/>
+          </a:bodyPr>
+          <a:lstStyle/>
+          <a:p>
+            <a:pPr algn="l" rtl="0"/>
+            <a:r>
+              <a:rPr lang="en-US" sz="1600" b="0" i="0" u="none" strike="noStrike" baseline="0">
+                <a:solidFill>
+                  <a:srgbClr val="000000"/>
+                </a:solidFill>
+                <a:latin typeface="Aptos"/>
+                <a:ea typeface="Segoe UI"/>
+                <a:cs typeface="Segoe UI"/>
+              </a:rPr>
+              <a:t>Intelligent Systems - CSC 500</a:t>
+            </a:r>
+            <a:r>
+              <a:rPr lang="en-US" sz="1600" b="0" i="0">
+                <a:solidFill>
+                  <a:srgbClr val="000000"/>
+                </a:solidFill>
+                <a:latin typeface="Aptos"/>
+                <a:ea typeface="Segoe UI"/>
+                <a:cs typeface="Segoe UI"/>
+              </a:rPr>
+              <a:t>​</a:t>
+            </a:r>
+          </a:p>
+          <a:p>
+            <a:pPr algn="l" rtl="0"/>
+            <a:r>
+              <a:rPr lang="en-US" sz="1600" b="0" i="0" u="none" strike="noStrike" baseline="0">
+                <a:solidFill>
+                  <a:srgbClr val="000000"/>
+                </a:solidFill>
+                <a:latin typeface="Aptos"/>
+                <a:ea typeface="Segoe UI"/>
+                <a:cs typeface="Segoe UI"/>
+              </a:rPr>
+              <a:t>Dr. Sahoo</a:t>
+            </a:r>
+            <a:r>
+              <a:rPr lang="en-US" sz="1600" b="0" i="0">
+                <a:solidFill>
+                  <a:srgbClr val="000000"/>
+                </a:solidFill>
+                <a:latin typeface="Aptos"/>
+                <a:ea typeface="Segoe UI"/>
+                <a:cs typeface="Segoe UI"/>
+              </a:rPr>
+              <a:t>​</a:t>
+            </a:r>
+          </a:p>
+          <a:p>
+            <a:pPr algn="l" rtl="0"/>
+            <a:r>
+              <a:rPr lang="en-US" sz="1600" b="0" i="0" u="none" strike="noStrike" baseline="0">
+                <a:solidFill>
+                  <a:srgbClr val="000000"/>
+                </a:solidFill>
+                <a:latin typeface="Aptos"/>
+                <a:ea typeface="Segoe UI"/>
+                <a:cs typeface="Segoe UI"/>
+              </a:rPr>
+              <a:t>Quinnipiac University</a:t>
+            </a:r>
+            <a:r>
+              <a:rPr lang="en-US" sz="1600" b="0" i="0">
+                <a:solidFill>
+                  <a:srgbClr val="000000"/>
+                </a:solidFill>
+                <a:latin typeface="Aptos"/>
+                <a:ea typeface="Segoe UI"/>
+                <a:cs typeface="Segoe UI"/>
+              </a:rPr>
+              <a:t>​</a:t>
+            </a:r>
+          </a:p>
+          <a:p>
+            <a:pPr algn="l" rtl="0"/>
+            <a:r>
+              <a:rPr lang="en-US" sz="1600" b="0" i="0" u="none" strike="noStrike" baseline="0">
+                <a:solidFill>
+                  <a:srgbClr val="000000"/>
+                </a:solidFill>
+                <a:latin typeface="Aptos"/>
+                <a:ea typeface="Segoe UI"/>
+                <a:cs typeface="Segoe UI"/>
+              </a:rPr>
+              <a:t>April 21, 2026</a:t>
+            </a:r>
+            <a:r>
+              <a:rPr lang="en-US" sz="1600" b="0" i="0">
+                <a:solidFill>
+                  <a:srgbClr val="000000"/>
+                </a:solidFill>
+                <a:latin typeface="Aptos"/>
+                <a:ea typeface="Segoe UI"/>
+                <a:cs typeface="Segoe UI"/>
+              </a:rPr>
+              <a:t>​</a:t>
+            </a:r>
+          </a:p>
+          <a:p>
+            <a:pPr algn="l" rtl="0"/>
+            <a:r>
+              <a:rPr lang="en-US" sz="1600" b="0" i="0">
+                <a:solidFill>
+                  <a:srgbClr val="000000"/>
+                </a:solidFill>
+                <a:latin typeface="Aptos"/>
+                <a:ea typeface="Segoe UI"/>
+                <a:cs typeface="Segoe UI"/>
+              </a:rPr>
+              <a:t>​</a:t>
+            </a:r>
+          </a:p>
+          <a:p>
+            <a:pPr algn="l" rtl="0"/>
+            <a:r>
+              <a:rPr lang="en-US" sz="1600" b="0" i="0" u="none" strike="noStrike" baseline="0">
+                <a:solidFill>
+                  <a:srgbClr val="000000"/>
+                </a:solidFill>
+                <a:latin typeface="Aptos"/>
+                <a:ea typeface="Segoe UI"/>
+                <a:cs typeface="Segoe UI"/>
+              </a:rPr>
+              <a:t>Repo: </a:t>
+            </a:r>
+            <a:r>
+              <a:rPr lang="en-US" sz="1600" b="0" i="1" u="none" strike="noStrike" baseline="0">
+                <a:solidFill>
+                  <a:srgbClr val="122BE3"/>
+                </a:solidFill>
+                <a:latin typeface="Aptos"/>
+                <a:ea typeface="Segoe UI"/>
+                <a:cs typeface="Segoe UI"/>
+              </a:rPr>
+              <a:t>https://github.com/UConn-DSIS/TS-RAG</a:t>
+            </a:r>
+            <a:r>
+              <a:rPr lang="en-US" sz="1600" b="0" i="0">
+                <a:solidFill>
+                  <a:srgbClr val="000000"/>
+                </a:solidFill>
+                <a:latin typeface="Aptos"/>
+                <a:ea typeface="Segoe UI"/>
+                <a:cs typeface="Segoe UI"/>
+              </a:rPr>
+              <a:t>​</a:t>
+            </a:r>
+          </a:p>
+          <a:p>
+            <a:pPr algn="ctr"/>
+            <a:endParaRPr lang="en-US"/>
+          </a:p>
+        </p:txBody>
+      </p:sp>
+      <p:sp>
+        <p:nvSpPr>
+          <p:cNvPr id="5" name="TextBox 4">
+            <a:extLst>
+              <a:ext uri="{FF2B5EF4-FFF2-40B4-BE49-F238E27FC236}">
+                <a16:creationId xmlns:a16="http://schemas.microsoft.com/office/drawing/2014/main" id="{1BC79663-E7B3-3F09-ABE1-B773C1135E0C}"/>
+              </a:ext>
+            </a:extLst>
+          </p:cNvPr>
+          <p:cNvSpPr txBox="1"/>
+          <p:nvPr/>
+        </p:nvSpPr>
+        <p:spPr>
+          <a:xfrm>
+            <a:off x="837127" y="3429000"/>
+            <a:ext cx="6096000" cy="1292662"/>
+          </a:xfrm>
+          <a:prstGeom prst="rect">
+            <a:avLst/>
+          </a:prstGeom>
+          <a:noFill/>
+        </p:spPr>
+        <p:txBody>
+          <a:bodyPr rot="0" spcFirstLastPara="0" vertOverflow="overflow" horzOverflow="overflow" vert="horz" wrap="square" lIns="91440" tIns="45720" rIns="91440" bIns="45720" numCol="1" spcCol="0" rtlCol="0" fromWordArt="0" anchor="t" anchorCtr="0" forceAA="0" compatLnSpc="1">
+            <a:prstTxWarp prst="textNoShape">
+              <a:avLst/>
+            </a:prstTxWarp>
+            <a:spAutoFit/>
+          </a:bodyPr>
+          <a:lstStyle/>
+          <a:p>
+            <a:r>
+              <a:rPr lang="en-US" sz="2000" b="1">
+                <a:solidFill>
+                  <a:srgbClr val="000000"/>
+                </a:solidFill>
+                <a:latin typeface="Aptos"/>
+                <a:cs typeface="Segoe UI"/>
+              </a:rPr>
+              <a:t>Group members</a:t>
+            </a:r>
+            <a:r>
+              <a:rPr lang="en-US" sz="2000">
+                <a:solidFill>
+                  <a:srgbClr val="000000"/>
+                </a:solidFill>
+                <a:latin typeface="Aptos"/>
+                <a:cs typeface="Segoe UI"/>
+              </a:rPr>
+              <a:t>​</a:t>
+            </a:r>
+            <a:endParaRPr lang="en-US"/>
+          </a:p>
+          <a:p>
+            <a:pPr algn="l" rtl="0"/>
+            <a:r>
+              <a:rPr lang="en-US" sz="2000" b="0" i="0" u="none" strike="noStrike" baseline="0">
+                <a:solidFill>
+                  <a:srgbClr val="000000"/>
+                </a:solidFill>
+                <a:latin typeface="Aptos"/>
+                <a:ea typeface="Segoe UI"/>
+                <a:cs typeface="Segoe UI"/>
+              </a:rPr>
+              <a:t>Zoe Rochelle</a:t>
+            </a:r>
+            <a:r>
+              <a:rPr lang="en-US" sz="2000" b="0" i="0">
+                <a:solidFill>
+                  <a:srgbClr val="000000"/>
+                </a:solidFill>
+                <a:latin typeface="Aptos"/>
+                <a:ea typeface="Segoe UI"/>
+                <a:cs typeface="Segoe UI"/>
+              </a:rPr>
+              <a:t>​</a:t>
+            </a:r>
+            <a:endParaRPr lang="en-US"/>
+          </a:p>
+          <a:p>
+            <a:pPr algn="l" rtl="0"/>
+            <a:r>
+              <a:rPr lang="en-US" sz="2000" b="0" i="0" u="none" strike="noStrike" baseline="0" dirty="0">
+                <a:solidFill>
+                  <a:srgbClr val="000000"/>
+                </a:solidFill>
+                <a:latin typeface="Aptos"/>
+                <a:ea typeface="Segoe UI"/>
+                <a:cs typeface="Segoe UI"/>
+              </a:rPr>
+              <a:t>Sarah </a:t>
+            </a:r>
+            <a:r>
+              <a:rPr lang="en-US" sz="2000" b="0" i="0" u="none" strike="noStrike" baseline="0" dirty="0" err="1">
+                <a:solidFill>
+                  <a:srgbClr val="000000"/>
+                </a:solidFill>
+                <a:latin typeface="Aptos"/>
+                <a:ea typeface="Segoe UI"/>
+                <a:cs typeface="Segoe UI"/>
+              </a:rPr>
+              <a:t>Quraishy</a:t>
+            </a:r>
+            <a:r>
+              <a:rPr lang="en-US" sz="2000" b="0" i="0" dirty="0">
+                <a:solidFill>
+                  <a:srgbClr val="000000"/>
+                </a:solidFill>
+                <a:latin typeface="Aptos"/>
+                <a:ea typeface="Segoe UI"/>
+                <a:cs typeface="Segoe UI"/>
+              </a:rPr>
+              <a:t>​</a:t>
+            </a:r>
+          </a:p>
+          <a:p>
+            <a:pPr algn="ctr"/>
+            <a:endParaRPr lang="en-US"/>
+          </a:p>
+        </p:txBody>
+      </p:sp>
+    </p:spTree>
+    <p:extLst>
+      <p:ext uri="{BB962C8B-B14F-4D97-AF65-F5344CB8AC3E}">
+        <p14:creationId xmlns:p14="http://schemas.microsoft.com/office/powerpoint/2010/main" val="2164628943"/>
       </p:ext>
     </p:extLst>
   </p:cSld>
@@ -6422,7 +8536,7 @@
         <p:cNvPr id="1" name="">
           <a:extLst>
             <a:ext uri="{FF2B5EF4-FFF2-40B4-BE49-F238E27FC236}">
-              <a16:creationId xmlns:a16="http://schemas.microsoft.com/office/drawing/2014/main" id="{5E5460C0-04C5-DB95-9E58-B722972A8490}"/>
+              <a16:creationId xmlns:a16="http://schemas.microsoft.com/office/drawing/2014/main" id="{306C7D93-E64C-DDBE-3A27-AC3E75553982}"/>
             </a:ext>
           </a:extLst>
         </p:cNvPr>
@@ -6442,7 +8556,7 @@
           <p:cNvPr id="2" name="Title 1">
             <a:extLst>
               <a:ext uri="{FF2B5EF4-FFF2-40B4-BE49-F238E27FC236}">
-                <a16:creationId xmlns:a16="http://schemas.microsoft.com/office/drawing/2014/main" id="{40EE7E0F-8C8A-BFCC-A742-C4A7DCBAEE3B}"/>
+                <a16:creationId xmlns:a16="http://schemas.microsoft.com/office/drawing/2014/main" id="{FD53088A-2338-91AC-D7DE-4A408FAC1BFD}"/>
               </a:ext>
             </a:extLst>
           </p:cNvPr>
@@ -6462,133 +8576,199 @@
           <a:p>
             <a:r>
               <a:rPr lang="en-US" sz="4000"/>
-              <a:t>Problem/Motivation (Cont.) - in simple terms</a:t>
-            </a:r>
-          </a:p>
-        </p:txBody>
-      </p:sp>
-      <p:sp>
-        <p:nvSpPr>
-          <p:cNvPr id="3" name="Content Placeholder 2">
+              <a:t>Problem/Motivation</a:t>
+            </a:r>
+          </a:p>
+        </p:txBody>
+      </p:sp>
+      <p:sp>
+        <p:nvSpPr>
+          <p:cNvPr id="6" name="TextBox 5">
             <a:extLst>
               <a:ext uri="{FF2B5EF4-FFF2-40B4-BE49-F238E27FC236}">
-                <a16:creationId xmlns:a16="http://schemas.microsoft.com/office/drawing/2014/main" id="{AD17AA79-0307-E012-C3C3-47C1D6D4CF8D}"/>
+                <a16:creationId xmlns:a16="http://schemas.microsoft.com/office/drawing/2014/main" id="{6100E12B-7138-5537-F211-CD52FE475305}"/>
               </a:ext>
             </a:extLst>
           </p:cNvPr>
-          <p:cNvSpPr>
-            <a:spLocks noGrp="1"/>
-          </p:cNvSpPr>
-          <p:nvPr>
-            <p:ph idx="1"/>
-          </p:nvPr>
-        </p:nvSpPr>
-        <p:spPr/>
-        <p:txBody>
-          <a:bodyPr vert="horz" lIns="91440" tIns="45720" rIns="91440" bIns="45720" rtlCol="0" anchor="t">
-            <a:normAutofit/>
+          <p:cNvSpPr txBox="1"/>
+          <p:nvPr/>
+        </p:nvSpPr>
+        <p:spPr>
+          <a:xfrm>
+            <a:off x="839492" y="1711271"/>
+            <a:ext cx="10667999" cy="4490204"/>
+          </a:xfrm>
+          <a:prstGeom prst="rect">
+            <a:avLst/>
+          </a:prstGeom>
+          <a:noFill/>
+        </p:spPr>
+        <p:txBody>
+          <a:bodyPr rot="0" spcFirstLastPara="0" vertOverflow="overflow" horzOverflow="overflow" vert="horz" wrap="square" lIns="91440" tIns="45720" rIns="91440" bIns="45720" numCol="1" spcCol="0" rtlCol="0" fromWordArt="0" anchor="t" anchorCtr="0" forceAA="0" compatLnSpc="1">
+            <a:prstTxWarp prst="textNoShape">
+              <a:avLst/>
+            </a:prstTxWarp>
+            <a:spAutoFit/>
           </a:bodyPr>
           <a:lstStyle/>
           <a:p>
-            <a:pPr>
-              <a:buNone/>
+            <a:r>
+              <a:rPr lang="en-US" sz="2000" dirty="0"/>
+              <a:t>The goal of this experiment is to </a:t>
+            </a:r>
+            <a:r>
+              <a:rPr lang="en-US" sz="2000" b="1" dirty="0">
+                <a:solidFill>
+                  <a:srgbClr val="FF0000"/>
+                </a:solidFill>
+              </a:rPr>
+              <a:t>improve time series forecasts</a:t>
+            </a:r>
+            <a:r>
+              <a:rPr lang="en-US" sz="2000" dirty="0"/>
+              <a:t> by using similar past examples to provide </a:t>
+            </a:r>
+            <a:r>
+              <a:rPr lang="en-US" sz="2000"/>
+              <a:t>extra context to the model before generating the forecast.</a:t>
+            </a:r>
+            <a:endParaRPr lang="en-US" sz="2000" dirty="0"/>
+          </a:p>
+          <a:p>
+            <a:endParaRPr lang="en-US" sz="2000" dirty="0"/>
+          </a:p>
+          <a:p>
+            <a:r>
+              <a:rPr lang="en-US" sz="2000" b="1">
+                <a:solidFill>
+                  <a:srgbClr val="FF0000"/>
+                </a:solidFill>
+              </a:rPr>
+              <a:t>How do these approaches differ?</a:t>
+            </a:r>
+          </a:p>
+          <a:p>
+            <a:endParaRPr lang="en-US" sz="2000" dirty="0"/>
+          </a:p>
+          <a:p>
+            <a:pPr marL="228600" indent="-228600">
+              <a:lnSpc>
+                <a:spcPct val="90000"/>
+              </a:lnSpc>
+              <a:spcBef>
+                <a:spcPts val="1000"/>
+              </a:spcBef>
             </a:pPr>
             <a:r>
-              <a:rPr lang="en-US" sz="2000" b="1">
-                <a:ea typeface="+mn-lt"/>
-                <a:cs typeface="+mn-lt"/>
-              </a:rPr>
-              <a:t>Normal forecasting model (TSFM):</a:t>
-            </a:r>
-            <a:endParaRPr lang="en-US" sz="2000">
-              <a:ea typeface="+mn-lt"/>
-              <a:cs typeface="+mn-lt"/>
-            </a:endParaRPr>
-          </a:p>
-          <a:p>
-            <a:pPr lvl="1">
-              <a:buNone/>
+              <a:rPr lang="en-US" sz="2000" b="1"/>
+              <a:t>A typical forecasting model (TSFM):</a:t>
+            </a:r>
+            <a:endParaRPr lang="en-US" sz="2000"/>
+          </a:p>
+          <a:p>
+            <a:pPr marL="685800" lvl="1" indent="-228600">
+              <a:lnSpc>
+                <a:spcPct val="90000"/>
+              </a:lnSpc>
+              <a:spcBef>
+                <a:spcPts val="500"/>
+              </a:spcBef>
             </a:pPr>
             <a:r>
-              <a:rPr lang="en-US" sz="2000">
-                <a:ea typeface="+mn-lt"/>
-                <a:cs typeface="+mn-lt"/>
-              </a:rPr>
+              <a:rPr lang="en-US" sz="2000"/>
               <a:t>Here is the recent pattern.</a:t>
             </a:r>
           </a:p>
           <a:p>
-            <a:pPr lvl="1">
-              <a:buNone/>
+            <a:pPr marL="685800" lvl="1" indent="-228600">
+              <a:lnSpc>
+                <a:spcPct val="90000"/>
+              </a:lnSpc>
+              <a:spcBef>
+                <a:spcPts val="500"/>
+              </a:spcBef>
             </a:pPr>
             <a:r>
-              <a:rPr lang="en-US" sz="2000">
-                <a:ea typeface="+mn-lt"/>
-                <a:cs typeface="+mn-lt"/>
-              </a:rPr>
-              <a:t>Predict what comes next. </a:t>
-            </a:r>
-          </a:p>
-          <a:p>
-            <a:pPr>
-              <a:buNone/>
+              <a:rPr lang="en-US" sz="2000"/>
+              <a:t>Predict what comes next.</a:t>
+            </a:r>
+            <a:endParaRPr lang="en-US"/>
+          </a:p>
+          <a:p>
+            <a:pPr marL="685800" lvl="1" indent="-228600">
+              <a:lnSpc>
+                <a:spcPct val="90000"/>
+              </a:lnSpc>
+              <a:spcBef>
+                <a:spcPts val="500"/>
+              </a:spcBef>
             </a:pPr>
             <a:endParaRPr lang="en-US" sz="2000" dirty="0"/>
           </a:p>
           <a:p>
-            <a:pPr>
-              <a:buNone/>
+            <a:pPr marL="228600" indent="-228600">
+              <a:lnSpc>
+                <a:spcPct val="90000"/>
+              </a:lnSpc>
+              <a:spcBef>
+                <a:spcPts val="1000"/>
+              </a:spcBef>
             </a:pPr>
             <a:r>
-              <a:rPr lang="en-US" sz="2000" b="1">
-                <a:ea typeface="+mn-lt"/>
-                <a:cs typeface="+mn-lt"/>
-              </a:rPr>
+              <a:rPr lang="en-US" sz="2000" b="1"/>
               <a:t>TS-RAG:</a:t>
             </a:r>
-          </a:p>
-          <a:p>
-            <a:pPr lvl="1">
-              <a:buNone/>
+            <a:endParaRPr lang="en-US" sz="2000"/>
+          </a:p>
+          <a:p>
+            <a:pPr marL="685800" lvl="1" indent="-228600">
+              <a:lnSpc>
+                <a:spcPct val="90000"/>
+              </a:lnSpc>
+              <a:spcBef>
+                <a:spcPts val="500"/>
+              </a:spcBef>
             </a:pPr>
             <a:r>
-              <a:rPr lang="en-US" sz="2000">
-                <a:ea typeface="+mn-lt"/>
-                <a:cs typeface="+mn-lt"/>
-              </a:rPr>
+              <a:rPr lang="en-US" sz="2000"/>
               <a:t>Here is the recent pattern.</a:t>
             </a:r>
           </a:p>
           <a:p>
-            <a:pPr lvl="1">
-              <a:buNone/>
+            <a:pPr marL="685800" lvl="1" indent="-228600">
+              <a:lnSpc>
+                <a:spcPct val="90000"/>
+              </a:lnSpc>
+              <a:spcBef>
+                <a:spcPts val="500"/>
+              </a:spcBef>
             </a:pPr>
             <a:r>
-              <a:rPr lang="en-US" sz="2000">
-                <a:ea typeface="+mn-lt"/>
-                <a:cs typeface="+mn-lt"/>
-              </a:rPr>
+              <a:rPr lang="en-US" sz="2000"/>
               <a:t>Also, here are several old patterns that looked similar, plus what happened after them.</a:t>
             </a:r>
           </a:p>
           <a:p>
-            <a:pPr lvl="1">
-              <a:buNone/>
+            <a:pPr marL="685800" lvl="1" indent="-228600">
+              <a:lnSpc>
+                <a:spcPct val="90000"/>
+              </a:lnSpc>
+              <a:spcBef>
+                <a:spcPts val="500"/>
+              </a:spcBef>
             </a:pPr>
             <a:r>
-              <a:rPr lang="en-US" sz="2000">
-                <a:ea typeface="+mn-lt"/>
-                <a:cs typeface="+mn-lt"/>
-              </a:rPr>
+              <a:rPr lang="en-US" sz="2000"/>
               <a:t>Now predict what comes next.</a:t>
             </a:r>
+            <a:endParaRPr lang="en-US"/>
           </a:p>
         </p:txBody>
       </p:sp>
     </p:spTree>
     <p:extLst>
       <p:ext uri="{BB962C8B-B14F-4D97-AF65-F5344CB8AC3E}">
-        <p14:creationId xmlns:p14="http://schemas.microsoft.com/office/powerpoint/2010/main" val="2957766565"/>
+        <p14:creationId xmlns:p14="http://schemas.microsoft.com/office/powerpoint/2010/main" val="1797350472"/>
       </p:ext>
     </p:extLst>
   </p:cSld>
@@ -6645,18 +8825,11 @@
           <a:lstStyle/>
           <a:p>
             <a:r>
-              <a:rPr lang="en-US" sz="4000" dirty="0">
-                <a:ea typeface="+mj-lt"/>
-                <a:cs typeface="+mj-lt"/>
-              </a:rPr>
-              <a:t>What is the repo </a:t>
-            </a:r>
-            <a:r>
               <a:rPr lang="en-US" sz="4000">
                 <a:ea typeface="+mj-lt"/>
                 <a:cs typeface="+mj-lt"/>
               </a:rPr>
-              <a:t>proposing?</a:t>
+              <a:t>What is this repo proposing?</a:t>
             </a:r>
             <a:endParaRPr lang="en-US" sz="4000"/>
           </a:p>
@@ -6746,11 +8919,11 @@
               </a:rPr>
             </a:br>
             <a:r>
-              <a:rPr lang="en-US" sz="2000">
+              <a:rPr lang="en-US" sz="2000" dirty="0">
                 <a:ea typeface="+mn-lt"/>
                 <a:cs typeface="+mn-lt"/>
               </a:rPr>
-              <a:t>Compare a retrieval augmented forecasting model (TS-RAG) against a standard backbone forecasting model without retrieval.</a:t>
+              <a:t>Compare a retrieval augmented forecasting model (TS-RAG) against a standard backbone forecasting model (i.e. without retrieval) and examine the results.</a:t>
             </a:r>
           </a:p>
           <a:p>
@@ -6926,7 +9099,7 @@
                 <a:ea typeface="+mn-lt"/>
                 <a:cs typeface="+mn-lt"/>
               </a:rPr>
-              <a:t>: the plain base model used to make forecasts, without the extra TS-RAG retrieval components added on top. In our case "Chronos-Bolt".</a:t>
+              <a:t>: this is the plain base model used to make forecasts, without the extra TS-RAG retrieval components added on top. In our case "Chronos-Bolt".</a:t>
             </a:r>
             <a:endParaRPr lang="en-US" sz="2000" dirty="0">
               <a:ea typeface="+mn-lt"/>
@@ -7146,10 +9319,130 @@
         </p:nvSpPr>
         <p:spPr/>
         <p:txBody>
-          <a:bodyPr/>
+          <a:bodyPr>
+            <a:normAutofit fontScale="92500" lnSpcReduction="10000"/>
+          </a:bodyPr>
           <a:lstStyle/>
           <a:p>
-            <a:endParaRPr lang="en-US"/>
+            <a:pPr marL="0" indent="0">
+              <a:buNone/>
+            </a:pPr>
+            <a:r>
+              <a:rPr lang="en-US" dirty="0"/>
+              <a:t>Standard Backbone Model (no TS-RAG)</a:t>
+            </a:r>
+          </a:p>
+          <a:p>
+            <a:pPr marL="0" indent="0">
+              <a:buNone/>
+            </a:pPr>
+            <a:r>
+              <a:rPr lang="en-US" sz="2000" dirty="0"/>
+              <a:t>[ Input Time Series ] → [ Chronos-Bolt ] → [ Forecast (H) ]</a:t>
+            </a:r>
+          </a:p>
+          <a:p>
+            <a:pPr marL="0" indent="0">
+              <a:buNone/>
+            </a:pPr>
+            <a:r>
+              <a:rPr lang="en-US" dirty="0"/>
+              <a:t> </a:t>
+            </a:r>
+          </a:p>
+          <a:p>
+            <a:pPr marL="0" indent="0">
+              <a:buNone/>
+            </a:pPr>
+            <a:r>
+              <a:rPr lang="en-US" dirty="0"/>
+              <a:t>TS-RAG </a:t>
+            </a:r>
+          </a:p>
+          <a:p>
+            <a:pPr marL="0" indent="0">
+              <a:buNone/>
+            </a:pPr>
+            <a:r>
+              <a:rPr lang="en-US" sz="2100" dirty="0"/>
+              <a:t>[ Input Time Series ]</a:t>
+            </a:r>
+            <a:br>
+              <a:rPr lang="en-US" sz="2100" dirty="0"/>
+            </a:br>
+            <a:r>
+              <a:rPr lang="en-US" sz="2100" dirty="0"/>
+              <a:t>        ↓</a:t>
+            </a:r>
+            <a:br>
+              <a:rPr lang="en-US" sz="2100" dirty="0"/>
+            </a:br>
+            <a:r>
+              <a:rPr lang="en-US" sz="2100" dirty="0"/>
+              <a:t>   [ Retriever ]</a:t>
+            </a:r>
+            <a:br>
+              <a:rPr lang="en-US" sz="2100" dirty="0"/>
+            </a:br>
+            <a:r>
+              <a:rPr lang="en-US" sz="2100" dirty="0"/>
+              <a:t>        ↓</a:t>
+            </a:r>
+            <a:br>
+              <a:rPr lang="en-US" sz="2100" dirty="0"/>
+            </a:br>
+            <a:r>
+              <a:rPr lang="en-US" sz="2100" dirty="0"/>
+              <a:t>[ Retrieved Patterns ]</a:t>
+            </a:r>
+            <a:br>
+              <a:rPr lang="en-US" sz="2100" dirty="0"/>
+            </a:br>
+            <a:r>
+              <a:rPr lang="en-US" sz="2100" dirty="0"/>
+              <a:t>        ↓</a:t>
+            </a:r>
+            <a:br>
+              <a:rPr lang="en-US" sz="2100" dirty="0"/>
+            </a:br>
+            <a:r>
+              <a:rPr lang="en-US" sz="2100" dirty="0"/>
+              <a:t>[ ARM ]</a:t>
+            </a:r>
+            <a:br>
+              <a:rPr lang="en-US" sz="2100" dirty="0"/>
+            </a:br>
+            <a:r>
+              <a:rPr lang="en-US" sz="2100" dirty="0"/>
+              <a:t>        ↓</a:t>
+            </a:r>
+            <a:br>
+              <a:rPr lang="en-US" sz="2100" dirty="0"/>
+            </a:br>
+            <a:r>
+              <a:rPr lang="en-US" sz="2100" dirty="0"/>
+              <a:t>[ Chronos-Bolt ]</a:t>
+            </a:r>
+            <a:br>
+              <a:rPr lang="en-US" sz="2100" dirty="0"/>
+            </a:br>
+            <a:r>
+              <a:rPr lang="en-US" sz="2100" dirty="0"/>
+              <a:t>        ↓</a:t>
+            </a:r>
+            <a:br>
+              <a:rPr lang="en-US" sz="2100" dirty="0"/>
+            </a:br>
+            <a:r>
+              <a:rPr lang="en-US" sz="2100" dirty="0"/>
+              <a:t>[ Forecast (H) ]</a:t>
+            </a:r>
+          </a:p>
+          <a:p>
+            <a:pPr marL="0" indent="0">
+              <a:buNone/>
+            </a:pPr>
+            <a:endParaRPr lang="en-US" dirty="0"/>
           </a:p>
         </p:txBody>
       </p:sp>
@@ -7240,7 +9533,60 @@
           <a:bodyPr/>
           <a:lstStyle/>
           <a:p>
-            <a:endParaRPr lang="en-US"/>
+            <a:r>
+              <a:rPr lang="en-US" b="1" dirty="0"/>
+              <a:t>Retriever</a:t>
+            </a:r>
+            <a:br>
+              <a:rPr lang="en-US" dirty="0"/>
+            </a:br>
+            <a:r>
+              <a:rPr lang="en-US" dirty="0"/>
+              <a:t>Finds similar past patterns</a:t>
+            </a:r>
+          </a:p>
+          <a:p>
+            <a:r>
+              <a:rPr lang="en-US" dirty="0"/>
+              <a:t> </a:t>
+            </a:r>
+            <a:r>
+              <a:rPr lang="en-US" b="1" dirty="0"/>
+              <a:t>Retrieved Data</a:t>
+            </a:r>
+            <a:br>
+              <a:rPr lang="en-US" dirty="0"/>
+            </a:br>
+            <a:r>
+              <a:rPr lang="en-US" dirty="0"/>
+              <a:t>Shows what happened next before </a:t>
+            </a:r>
+          </a:p>
+          <a:p>
+            <a:r>
+              <a:rPr lang="en-US" b="1" dirty="0"/>
+              <a:t>ARM (Mixer)</a:t>
+            </a:r>
+            <a:br>
+              <a:rPr lang="en-US" dirty="0"/>
+            </a:br>
+            <a:r>
+              <a:rPr lang="en-US" dirty="0"/>
+              <a:t>Combines input + retrieved info </a:t>
+            </a:r>
+          </a:p>
+          <a:p>
+            <a:r>
+              <a:rPr lang="en-US" b="1" dirty="0"/>
+              <a:t>Chronos-Bolt</a:t>
+            </a:r>
+            <a:br>
+              <a:rPr lang="en-US" dirty="0"/>
+            </a:br>
+            <a:r>
+              <a:rPr lang="en-US" dirty="0"/>
+              <a:t>Makes the final prediction</a:t>
+            </a:r>
           </a:p>
         </p:txBody>
       </p:sp>
@@ -7305,7 +9651,7 @@
           <a:p>
             <a:r>
               <a:rPr lang="en-US" sz="4000"/>
-              <a:t>Experiment Logic - </a:t>
+              <a:t>Experiment Setup - </a:t>
             </a:r>
             <a:r>
               <a:rPr lang="en-US" sz="4000">
@@ -7388,84 +9734,77 @@
             </a:pPr>
             <a:r>
               <a:rPr lang="en-US" sz="2000" dirty="0"/>
-              <a:t>The non-retrieval the backbone model </a:t>
-            </a:r>
-            <a:r>
-              <a:rPr lang="en-US" sz="2000" b="1" dirty="0" err="1">
+              <a:t>The </a:t>
+            </a:r>
+            <a:r>
+              <a:rPr lang="en-US" sz="2000" b="1" dirty="0">
                 <a:solidFill>
                   <a:srgbClr val="FF0000"/>
                 </a:solidFill>
               </a:rPr>
+              <a:t>non-retrieval</a:t>
+            </a:r>
+            <a:r>
+              <a:rPr lang="en-US" sz="2000" dirty="0"/>
+              <a:t> backbone model </a:t>
+            </a:r>
+            <a:r>
+              <a:rPr lang="en-US" sz="2000" dirty="0" err="1"/>
               <a:t>ChronosBolt</a:t>
             </a:r>
-            <a:endParaRPr lang="en-US" sz="2000" dirty="0">
-              <a:solidFill>
-                <a:srgbClr val="FF0000"/>
-              </a:solidFill>
-            </a:endParaRPr>
+            <a:endParaRPr lang="en-US" sz="2000" dirty="0"/>
+          </a:p>
+          <a:p>
+            <a:pPr>
+              <a:buNone/>
+            </a:pPr>
+            <a:endParaRPr lang="en-US" sz="2000" dirty="0"/>
           </a:p>
           <a:p>
             <a:pPr marL="0" indent="0">
               <a:buNone/>
             </a:pPr>
-            <a:endParaRPr lang="en-US" sz="2000" dirty="0">
-              <a:ea typeface="+mn-lt"/>
-              <a:cs typeface="+mn-lt"/>
-            </a:endParaRPr>
-          </a:p>
-          <a:p>
-            <a:pPr>
+            <a:r>
+              <a:rPr lang="en-US" sz="2000" b="1"/>
+              <a:t>Platform</a:t>
+            </a:r>
+            <a:endParaRPr lang="en-US" sz="2000"/>
+          </a:p>
+          <a:p>
+            <a:pPr marL="457200" lvl="1" indent="0">
               <a:buNone/>
             </a:pPr>
             <a:r>
-              <a:rPr lang="en-US" sz="2000">
-                <a:ea typeface="+mn-lt"/>
-                <a:cs typeface="+mn-lt"/>
-              </a:rPr>
-              <a:t>The repo’s zero-shot script supports these model choices:</a:t>
+              <a:rPr lang="en-US" sz="2000"/>
+              <a:t>OS: Ubuntu 24.04</a:t>
+            </a:r>
+          </a:p>
+          <a:p>
+            <a:pPr marL="457200" lvl="1" indent="0">
+              <a:buNone/>
+            </a:pPr>
+            <a:r>
+              <a:rPr lang="en-US" sz="2000"/>
+              <a:t>CPU: i9-9900k</a:t>
             </a:r>
             <a:endParaRPr lang="en-US" sz="2000" dirty="0"/>
           </a:p>
           <a:p>
-            <a:pPr marL="914400" lvl="1" indent="-457200"/>
-            <a:r>
-              <a:rPr lang="en-US" sz="2000" dirty="0" err="1">
-                <a:ea typeface="+mn-lt"/>
-                <a:cs typeface="+mn-lt"/>
-              </a:rPr>
-              <a:t>ChronosBoltRetrieve</a:t>
-            </a:r>
-            <a:endParaRPr lang="en-US" sz="2000" dirty="0">
-              <a:ea typeface="+mn-lt"/>
-              <a:cs typeface="+mn-lt"/>
-            </a:endParaRPr>
-          </a:p>
-          <a:p>
-            <a:pPr marL="914400" lvl="1" indent="-457200"/>
-            <a:r>
-              <a:rPr lang="en-US" sz="2000" dirty="0" err="1">
-                <a:ea typeface="+mn-lt"/>
-                <a:cs typeface="+mn-lt"/>
-              </a:rPr>
-              <a:t>ChronosBolt</a:t>
-            </a:r>
-            <a:endParaRPr lang="en-US" sz="2000" dirty="0"/>
-          </a:p>
-          <a:p>
-            <a:pPr marL="914400" lvl="1" indent="-457200"/>
-            <a:r>
-              <a:rPr lang="en-US" sz="2000" dirty="0" err="1">
-                <a:ea typeface="+mn-lt"/>
-                <a:cs typeface="+mn-lt"/>
-              </a:rPr>
-              <a:t>MOMENTRetrieve</a:t>
-            </a:r>
-            <a:r>
-              <a:rPr lang="en-US" sz="2000" dirty="0">
-                <a:ea typeface="+mn-lt"/>
-                <a:cs typeface="+mn-lt"/>
-              </a:rPr>
-              <a:t> (unused)</a:t>
+            <a:pPr marL="457200" lvl="1" indent="0">
+              <a:buNone/>
+            </a:pPr>
+            <a:r>
+              <a:rPr lang="en-US" sz="2000"/>
+              <a:t>GPU: Nvidia 3080</a:t>
+            </a:r>
+          </a:p>
+          <a:p>
+            <a:pPr marL="457200" lvl="1" indent="0">
+              <a:buNone/>
+            </a:pPr>
+            <a:r>
+              <a:rPr lang="en-US" sz="2000"/>
+              <a:t>RAM: 32 GiB</a:t>
             </a:r>
             <a:endParaRPr lang="en-US" sz="2000" dirty="0"/>
           </a:p>
@@ -7540,7 +9879,7 @@
             </a:r>
             <a:r>
               <a:rPr lang="en-US" sz="4000"/>
-              <a:t> Logic (Cont.) - Metrics</a:t>
+              <a:t> Setup (Cont.) - Metrics</a:t>
             </a:r>
             <a:endParaRPr lang="en-US" sz="4000" dirty="0"/>
           </a:p>
@@ -7581,7 +9920,7 @@
                 <a:ea typeface="+mn-lt"/>
                 <a:cs typeface="+mn-lt"/>
               </a:rPr>
-              <a:t>(Mean Squared Error) - measures prediction error, but it squares the errors, so </a:t>
+              <a:t>(Mean Squared Error) - </a:t>
             </a:r>
             <a:r>
               <a:rPr lang="en-US" sz="2000" b="1">
@@ -7591,30 +9930,14 @@
                 <a:ea typeface="+mn-lt"/>
                 <a:cs typeface="+mn-lt"/>
               </a:rPr>
-              <a:t>it penalizes larger mistakes more heavily</a:t>
+              <a:t>measures prediction error</a:t>
             </a:r>
             <a:r>
               <a:rPr lang="en-US" sz="2000">
                 <a:ea typeface="+mn-lt"/>
                 <a:cs typeface="+mn-lt"/>
               </a:rPr>
-              <a:t>. That makes it useful when big forecasting misses are especially undesirable.</a:t>
-            </a:r>
-          </a:p>
-          <a:p>
-            <a:r>
-              <a:rPr lang="en-US" sz="2000" b="1">
-                <a:ea typeface="+mn-lt"/>
-                <a:cs typeface="+mn-lt"/>
-              </a:rPr>
-              <a:t>MAE </a:t>
-            </a:r>
-            <a:r>
-              <a:rPr lang="en-US" sz="2000">
-                <a:ea typeface="+mn-lt"/>
-                <a:cs typeface="+mn-lt"/>
-              </a:rPr>
-              <a:t>(Mean Absolute Error) - measures the average absolute difference between the forecast and the true values. It is easy to interpret because </a:t>
+              <a:t>, but it squares the errors, so </a:t>
             </a:r>
             <a:r>
               <a:rPr lang="en-US" sz="2000" b="1">
@@ -7624,7 +9947,105 @@
                 <a:ea typeface="+mn-lt"/>
                 <a:cs typeface="+mn-lt"/>
               </a:rPr>
-              <a:t>it tells you the typical size of the model’s error</a:t>
+              <a:t>it </a:t>
+            </a:r>
+            <a:r>
+              <a:rPr lang="en-US" sz="2000">
+                <a:ea typeface="+mn-lt"/>
+                <a:cs typeface="+mn-lt"/>
+              </a:rPr>
+              <a:t>penalizes larger mistakes more heavily. That makes it useful when big forecasting misses are especially undesirable.</a:t>
+            </a:r>
+          </a:p>
+          <a:p>
+            <a:endParaRPr lang="en-US" sz="2000" dirty="0">
+              <a:ea typeface="+mn-lt"/>
+              <a:cs typeface="+mn-lt"/>
+            </a:endParaRPr>
+          </a:p>
+          <a:p>
+            <a:r>
+              <a:rPr lang="en-US" sz="2000" b="1">
+                <a:ea typeface="+mn-lt"/>
+                <a:cs typeface="+mn-lt"/>
+              </a:rPr>
+              <a:t>MAE </a:t>
+            </a:r>
+            <a:r>
+              <a:rPr lang="en-US" sz="2000">
+                <a:ea typeface="+mn-lt"/>
+                <a:cs typeface="+mn-lt"/>
+              </a:rPr>
+              <a:t>(Mean Absolute Error) - </a:t>
+            </a:r>
+            <a:r>
+              <a:rPr lang="en-US" sz="2000" b="1">
+                <a:solidFill>
+                  <a:srgbClr val="FF0000"/>
+                </a:solidFill>
+                <a:ea typeface="+mn-lt"/>
+                <a:cs typeface="+mn-lt"/>
+              </a:rPr>
+              <a:t>measures the average absolute difference between the forecast and the true values</a:t>
+            </a:r>
+            <a:r>
+              <a:rPr lang="en-US" sz="2000">
+                <a:ea typeface="+mn-lt"/>
+                <a:cs typeface="+mn-lt"/>
+              </a:rPr>
+              <a:t>. It is easy to interpret because it tells you the typical size of the model’s error.</a:t>
+            </a:r>
+          </a:p>
+          <a:p>
+            <a:endParaRPr lang="en-US" sz="2000" dirty="0">
+              <a:ea typeface="+mn-lt"/>
+              <a:cs typeface="+mn-lt"/>
+            </a:endParaRPr>
+          </a:p>
+          <a:p>
+            <a:pPr>
+              <a:buNone/>
+            </a:pPr>
+            <a:r>
+              <a:rPr lang="en-US" sz="2000">
+                <a:ea typeface="+mn-lt"/>
+                <a:cs typeface="+mn-lt"/>
+              </a:rPr>
+              <a:t>Using both metrics gives a more balanced evaluation: </a:t>
+            </a:r>
+            <a:r>
+              <a:rPr lang="en-US" sz="2000" b="1">
+                <a:ea typeface="+mn-lt"/>
+                <a:cs typeface="+mn-lt"/>
+              </a:rPr>
+              <a:t>MAE shows overall average error</a:t>
+            </a:r>
+            <a:r>
+              <a:rPr lang="en-US" sz="2000">
+                <a:ea typeface="+mn-lt"/>
+                <a:cs typeface="+mn-lt"/>
+              </a:rPr>
+              <a:t>,</a:t>
+            </a:r>
+            <a:endParaRPr lang="en-US"/>
+          </a:p>
+          <a:p>
+            <a:pPr>
+              <a:buNone/>
+            </a:pPr>
+            <a:r>
+              <a:rPr lang="en-US" sz="2000" dirty="0">
+                <a:ea typeface="+mn-lt"/>
+                <a:cs typeface="+mn-lt"/>
+              </a:rPr>
+              <a:t>while </a:t>
+            </a:r>
+            <a:r>
+              <a:rPr lang="en-US" sz="2000" b="1">
+                <a:ea typeface="+mn-lt"/>
+                <a:cs typeface="+mn-lt"/>
+              </a:rPr>
+              <a:t>MSE shows whether the model sometimes makes especially large mistakes</a:t>
             </a:r>
             <a:r>
               <a:rPr lang="en-US" sz="2000">
@@ -7632,37 +10053,6 @@
                 <a:cs typeface="+mn-lt"/>
               </a:rPr>
               <a:t>.</a:t>
-            </a:r>
-          </a:p>
-          <a:p>
-            <a:endParaRPr lang="en-US" sz="2000" dirty="0">
-              <a:ea typeface="+mn-lt"/>
-              <a:cs typeface="+mn-lt"/>
-            </a:endParaRPr>
-          </a:p>
-          <a:p>
-            <a:pPr>
-              <a:buNone/>
-            </a:pPr>
-            <a:r>
-              <a:rPr lang="en-US" sz="2000">
-                <a:ea typeface="+mn-lt"/>
-                <a:cs typeface="+mn-lt"/>
-              </a:rPr>
-              <a:t>Using both metrics gives a more balanced evaluation: MAE shows overall average error,</a:t>
-            </a:r>
-            <a:endParaRPr lang="en-US"/>
-          </a:p>
-          <a:p>
-            <a:pPr>
-              <a:buNone/>
-            </a:pPr>
-            <a:r>
-              <a:rPr lang="en-US" sz="2000">
-                <a:ea typeface="+mn-lt"/>
-                <a:cs typeface="+mn-lt"/>
-              </a:rPr>
-              <a:t>while MSE highlights whether the model sometimes makes especially large mistakes. </a:t>
             </a:r>
             <a:endParaRPr lang="en-US">
               <a:ea typeface="+mn-lt"/>
@@ -7743,11 +10133,18 @@
           <a:lstStyle/>
           <a:p>
             <a:r>
+              <a:rPr lang="en-US" sz="4000" dirty="0">
+                <a:ea typeface="+mj-lt"/>
+                <a:cs typeface="+mj-lt"/>
+              </a:rPr>
+              <a:t>Experiment Setup (</a:t>
+            </a:r>
+            <a:r>
               <a:rPr lang="en-US" sz="4000">
                 <a:ea typeface="+mj-lt"/>
                 <a:cs typeface="+mj-lt"/>
               </a:rPr>
-              <a:t>Datasets</a:t>
+              <a:t>Cont.) - Datasets</a:t>
             </a:r>
             <a:endParaRPr lang="en-US" sz="4000"/>
           </a:p>
@@ -7780,18 +10177,11 @@
               <a:buNone/>
             </a:pPr>
             <a:r>
-              <a:rPr lang="en-US" sz="2000" dirty="0">
-                <a:ea typeface="+mn-lt"/>
-                <a:cs typeface="+mn-lt"/>
-              </a:rPr>
-              <a:t>ETTh1, ETTh2, ETTm1, ETTm2, Weather, Traffic, and Electricity (ECL) are common benchmark </a:t>
-            </a:r>
-            <a:r>
               <a:rPr lang="en-US" sz="2000">
                 <a:ea typeface="+mn-lt"/>
                 <a:cs typeface="+mn-lt"/>
               </a:rPr>
-              <a:t>datasets in time-series forecasting. Our reproduction used only ETTh1, but the repo supports </a:t>
+              <a:t>ETTh1, ETTh2, ETTm1, ETTm2, Weather, Exchange, and Electricity (ECL) are common benchmark datasets in time-series forecasting. Our reproduction used only ETTh1, but the repo supports </a:t>
             </a:r>
             <a:r>
               <a:rPr lang="en-US" sz="2000" dirty="0">
@@ -7846,14 +10236,14 @@
                 <a:ea typeface="+mn-lt"/>
                 <a:cs typeface="+mn-lt"/>
               </a:rPr>
-              <a:t>Traffic:</a:t>
+              <a:t>Exchange:</a:t>
             </a:r>
             <a:r>
               <a:rPr lang="en-US" sz="2000">
                 <a:ea typeface="+mn-lt"/>
                 <a:cs typeface="+mn-lt"/>
               </a:rPr>
-              <a:t> a multivariate traffic dataset, often built from many road sensors.</a:t>
+              <a:t> currency exchange-rate.</a:t>
             </a:r>
           </a:p>
           <a:p>
@@ -7871,6 +10261,7 @@
               </a:rPr>
               <a:t> the electricity load dataset; “ECL” is the short name commonly used in papers and benchmark libraries.</a:t>
             </a:r>
+            <a:endParaRPr lang="en-US"/>
           </a:p>
         </p:txBody>
       </p:sp>
